--- a/Zambia_Economic_Recovery_Presentation.pptx
+++ b/Zambia_Economic_Recovery_Presentation.pptx
@@ -5868,7 +5868,7 @@
                 </a:solidFill>
                 <a:latin typeface="Calibri"/>
               </a:rPr>
-              <a:t>1.4 %  (2020)</a:t>
+              <a:t>-2.8 %  (2020)</a:t>
             </a:r>
           </a:p>
         </p:txBody>

--- a/Zambia_Economic_Recovery_Presentation.pptx
+++ b/Zambia_Economic_Recovery_Presentation.pptx
@@ -12,6 +12,7 @@
     <p:sldId id="260" r:id="rId11"/>
     <p:sldId id="261" r:id="rId12"/>
     <p:sldId id="262" r:id="rId13"/>
+    <p:sldId id="263" r:id="rId14"/>
   </p:sldIdLst>
   <p:sldSz cx="12188952" cy="6858000" type="screen4x3"/>
   <p:notesSz cx="6858000" cy="9144000"/>
@@ -111,6 +112,998 @@
     </a:lvl9pPr>
   </p:defaultTextStyle>
 </p:presentation>
+</file>
+
+<file path=ppt/charts/chart1.xml><?xml version="1.0" encoding="utf-8"?>
+<c:chartSpace xmlns:c="http://schemas.openxmlformats.org/drawingml/2006/chart" xmlns:a="http://schemas.openxmlformats.org/drawingml/2006/main" xmlns:r="http://schemas.openxmlformats.org/officeDocument/2006/relationships">
+  <c:date1904 val="0"/>
+  <c:chart>
+    <c:autoTitleDeleted val="0"/>
+    <c:plotArea>
+      <c:barChart>
+        <c:barDir val="col"/>
+        <c:grouping val="clustered"/>
+        <c:ser>
+          <c:idx val="0"/>
+          <c:order val="0"/>
+          <c:tx>
+            <c:strRef>
+              <c:f>Sheet1!$B$1</c:f>
+              <c:strCache>
+                <c:ptCount val="1"/>
+                <c:pt idx="0">
+                  <c:v/>
+                </c:pt>
+              </c:strCache>
+            </c:strRef>
+          </c:tx>
+          <c:spPr>
+            <a:solidFill>
+              <a:srgbClr val="E88C00"/>
+            </a:solidFill>
+            <a:ln>
+              <a:solidFill>
+                <a:srgbClr val="E88C00"/>
+              </a:solidFill>
+            </a:ln>
+          </c:spPr>
+          <c:dPt>
+            <c:idx val="4"/>
+            <c:spPr>
+              <a:solidFill>
+                <a:srgbClr val="E74C3C"/>
+              </a:solidFill>
+            </c:spPr>
+          </c:dPt>
+          <c:dPt>
+            <c:idx val="5"/>
+            <c:spPr>
+              <a:solidFill>
+                <a:srgbClr val="E74C3C"/>
+              </a:solidFill>
+            </c:spPr>
+          </c:dPt>
+          <c:cat>
+            <c:strRef>
+              <c:f>Sheet1!$A$2:$A$11</c:f>
+              <c:strCache>
+                <c:ptCount val="10"/>
+                <c:pt idx="0">
+                  <c:v>2015</c:v>
+                </c:pt>
+                <c:pt idx="1">
+                  <c:v>2016</c:v>
+                </c:pt>
+                <c:pt idx="2">
+                  <c:v>2017</c:v>
+                </c:pt>
+                <c:pt idx="3">
+                  <c:v>2018</c:v>
+                </c:pt>
+                <c:pt idx="4">
+                  <c:v>2019</c:v>
+                </c:pt>
+                <c:pt idx="5">
+                  <c:v>2020</c:v>
+                </c:pt>
+                <c:pt idx="6">
+                  <c:v>2021</c:v>
+                </c:pt>
+                <c:pt idx="7">
+                  <c:v>2022</c:v>
+                </c:pt>
+                <c:pt idx="8">
+                  <c:v>2023</c:v>
+                </c:pt>
+                <c:pt idx="9">
+                  <c:v>2024</c:v>
+                </c:pt>
+              </c:strCache>
+            </c:strRef>
+          </c:cat>
+          <c:val>
+            <c:numRef>
+              <c:f>Sheet1!$B$2:$B$11</c:f>
+              <c:numCache>
+                <c:formatCode>General</c:formatCode>
+                <c:ptCount val="10"/>
+                <c:pt idx="0">
+                  <c:v>12.3</c:v>
+                </c:pt>
+                <c:pt idx="1">
+                  <c:v>14.0</c:v>
+                </c:pt>
+                <c:pt idx="2">
+                  <c:v>17.5</c:v>
+                </c:pt>
+                <c:pt idx="3">
+                  <c:v>22.4</c:v>
+                </c:pt>
+                <c:pt idx="4">
+                  <c:v>29.1</c:v>
+                </c:pt>
+                <c:pt idx="5">
+                  <c:v>31.5</c:v>
+                </c:pt>
+                <c:pt idx="6">
+                  <c:v>29.8</c:v>
+                </c:pt>
+                <c:pt idx="7">
+                  <c:v>26.4</c:v>
+                </c:pt>
+                <c:pt idx="8">
+                  <c:v>22.7</c:v>
+                </c:pt>
+                <c:pt idx="9">
+                  <c:v>18.9</c:v>
+                </c:pt>
+              </c:numCache>
+            </c:numRef>
+          </c:val>
+        </c:ser>
+        <c:gapWidth val="80"/>
+        <c:axId val="-2068027336"/>
+        <c:axId val="-2113994440"/>
+      </c:barChart>
+      <c:catAx>
+        <c:axId val="-2068027336"/>
+        <c:scaling>
+          <c:orientation val="minMax"/>
+        </c:scaling>
+        <c:delete val="0"/>
+        <c:axPos val="b"/>
+        <c:majorTickMark val="out"/>
+        <c:minorTickMark val="none"/>
+        <c:tickLblPos val="nextTo"/>
+        <c:txPr>
+          <a:bodyPr/>
+          <a:lstStyle/>
+          <a:p>
+            <a:pPr>
+              <a:defRPr sz="800" b="0">
+                <a:latin typeface="Calibri"/>
+              </a:defRPr>
+            </a:pPr>
+          </a:p>
+        </c:txPr>
+        <c:crossAx val="-2113994440"/>
+        <c:crosses val="autoZero"/>
+        <c:auto val="1"/>
+        <c:lblAlgn val="ctr"/>
+        <c:lblOffset val="100"/>
+        <c:noMultiLvlLbl val="0"/>
+      </c:catAx>
+      <c:valAx>
+        <c:axId val="-2113994440"/>
+        <c:scaling/>
+        <c:delete val="0"/>
+        <c:axPos val="l"/>
+        <c:majorGridlines/>
+        <c:majorTickMark val="out"/>
+        <c:minorTickMark val="none"/>
+        <c:tickLblPos val="nextTo"/>
+        <c:txPr>
+          <a:bodyPr/>
+          <a:lstStyle/>
+          <a:p>
+            <a:pPr>
+              <a:defRPr sz="800" b="0">
+                <a:latin typeface="Calibri"/>
+              </a:defRPr>
+            </a:pPr>
+          </a:p>
+        </c:txPr>
+        <c:crossAx val="-2068027336"/>
+        <c:crosses val="autoZero"/>
+      </c:valAx>
+    </c:plotArea>
+    <c:dispBlanksAs val="gap"/>
+  </c:chart>
+  <c:txPr>
+    <a:bodyPr/>
+    <a:lstStyle/>
+    <a:p>
+      <a:pPr>
+        <a:defRPr sz="1800"/>
+      </a:pPr>
+      <a:endParaRPr lang="en-US"/>
+    </a:p>
+  </c:txPr>
+  <c:externalData r:id="rId1">
+    <c:autoUpdate val="0"/>
+  </c:externalData>
+</c:chartSpace>
+</file>
+
+<file path=ppt/charts/chart2.xml><?xml version="1.0" encoding="utf-8"?>
+<c:chartSpace xmlns:c="http://schemas.openxmlformats.org/drawingml/2006/chart" xmlns:a="http://schemas.openxmlformats.org/drawingml/2006/main" xmlns:r="http://schemas.openxmlformats.org/officeDocument/2006/relationships">
+  <c:date1904 val="0"/>
+  <c:chart>
+    <c:autoTitleDeleted val="0"/>
+    <c:plotArea>
+      <c:lineChart>
+        <c:grouping val="standard"/>
+        <c:varyColors val="0"/>
+        <c:ser>
+          <c:idx val="0"/>
+          <c:order val="0"/>
+          <c:tx>
+            <c:strRef>
+              <c:f>Sheet1!$B$1</c:f>
+              <c:strCache>
+                <c:ptCount val="1"/>
+                <c:pt idx="0">
+                  <c:v/>
+                </c:pt>
+              </c:strCache>
+            </c:strRef>
+          </c:tx>
+          <c:spPr>
+            <a:solidFill>
+              <a:srgbClr val="2ECC71"/>
+            </a:solidFill>
+            <a:ln w="25400">
+              <a:solidFill>
+                <a:srgbClr val="2ECC71"/>
+              </a:solidFill>
+            </a:ln>
+          </c:spPr>
+          <c:marker>
+            <c:symbol val="none"/>
+            <c:spPr>
+              <a:solidFill>
+                <a:srgbClr val="2ECC71"/>
+              </a:solidFill>
+              <a:ln>
+                <a:solidFill>
+                  <a:srgbClr val="2ECC71"/>
+                </a:solidFill>
+              </a:ln>
+            </c:spPr>
+          </c:marker>
+          <c:cat>
+            <c:strRef>
+              <c:f>Sheet1!$A$2:$A$11</c:f>
+              <c:strCache>
+                <c:ptCount val="10"/>
+                <c:pt idx="0">
+                  <c:v>2015</c:v>
+                </c:pt>
+                <c:pt idx="1">
+                  <c:v>2016</c:v>
+                </c:pt>
+                <c:pt idx="2">
+                  <c:v>2017</c:v>
+                </c:pt>
+                <c:pt idx="3">
+                  <c:v>2018</c:v>
+                </c:pt>
+                <c:pt idx="4">
+                  <c:v>2019</c:v>
+                </c:pt>
+                <c:pt idx="5">
+                  <c:v>2020</c:v>
+                </c:pt>
+                <c:pt idx="6">
+                  <c:v>2021</c:v>
+                </c:pt>
+                <c:pt idx="7">
+                  <c:v>2022</c:v>
+                </c:pt>
+                <c:pt idx="8">
+                  <c:v>2023</c:v>
+                </c:pt>
+                <c:pt idx="9">
+                  <c:v>2024</c:v>
+                </c:pt>
+              </c:strCache>
+            </c:strRef>
+          </c:cat>
+          <c:val>
+            <c:numRef>
+              <c:f>Sheet1!$B$2:$B$11</c:f>
+              <c:numCache>
+                <c:formatCode>General</c:formatCode>
+                <c:ptCount val="10"/>
+                <c:pt idx="0">
+                  <c:v>-3.6</c:v>
+                </c:pt>
+                <c:pt idx="1">
+                  <c:v>-4.1</c:v>
+                </c:pt>
+                <c:pt idx="2">
+                  <c:v>-1.9</c:v>
+                </c:pt>
+                <c:pt idx="3">
+                  <c:v>-1.7</c:v>
+                </c:pt>
+                <c:pt idx="4">
+                  <c:v>-1.5</c:v>
+                </c:pt>
+                <c:pt idx="5">
+                  <c:v>2.9</c:v>
+                </c:pt>
+                <c:pt idx="6">
+                  <c:v>11.9</c:v>
+                </c:pt>
+                <c:pt idx="7">
+                  <c:v>4.7</c:v>
+                </c:pt>
+                <c:pt idx="8">
+                  <c:v>3.1</c:v>
+                </c:pt>
+                <c:pt idx="9">
+                  <c:v>2.0</c:v>
+                </c:pt>
+              </c:numCache>
+            </c:numRef>
+          </c:val>
+          <c:smooth/>
+        </c:ser>
+        <c:marker val="1"/>
+        <c:smooth val="0"/>
+        <c:axId val="2118791784"/>
+        <c:axId val="2140495176"/>
+      </c:lineChart>
+      <c:catAx>
+        <c:axId val="2118791784"/>
+        <c:scaling>
+          <c:orientation val="minMax"/>
+        </c:scaling>
+        <c:delete val="0"/>
+        <c:axPos val="b"/>
+        <c:majorTickMark val="out"/>
+        <c:minorTickMark val="none"/>
+        <c:tickLblPos val="nextTo"/>
+        <c:txPr>
+          <a:bodyPr/>
+          <a:lstStyle/>
+          <a:p>
+            <a:pPr>
+              <a:defRPr sz="800" b="0">
+                <a:latin typeface="Calibri"/>
+              </a:defRPr>
+            </a:pPr>
+          </a:p>
+        </c:txPr>
+        <c:crossAx val="2140495176"/>
+        <c:crosses val="autoZero"/>
+        <c:auto val="1"/>
+        <c:lblAlgn val="ctr"/>
+        <c:lblOffset val="100"/>
+        <c:noMultiLvlLbl val="0"/>
+      </c:catAx>
+      <c:valAx>
+        <c:axId val="2140495176"/>
+        <c:scaling/>
+        <c:delete val="0"/>
+        <c:axPos val="l"/>
+        <c:majorGridlines/>
+        <c:majorTickMark val="out"/>
+        <c:minorTickMark val="none"/>
+        <c:tickLblPos val="nextTo"/>
+        <c:txPr>
+          <a:bodyPr/>
+          <a:lstStyle/>
+          <a:p>
+            <a:pPr>
+              <a:defRPr sz="800" b="0">
+                <a:latin typeface="Calibri"/>
+              </a:defRPr>
+            </a:pPr>
+          </a:p>
+        </c:txPr>
+        <c:crossAx val="2118791784"/>
+        <c:crosses val="autoZero"/>
+      </c:valAx>
+    </c:plotArea>
+    <c:plotVisOnly val="1"/>
+    <c:dispBlanksAs val="gap"/>
+    <c:showDLblsOverMax val="0"/>
+  </c:chart>
+  <c:txPr>
+    <a:bodyPr/>
+    <a:lstStyle/>
+    <a:p>
+      <a:pPr>
+        <a:defRPr sz="1800"/>
+      </a:pPr>
+      <a:endParaRPr lang="en-US"/>
+    </a:p>
+  </c:txPr>
+  <c:externalData r:id="rId1">
+    <c:autoUpdate val="0"/>
+  </c:externalData>
+</c:chartSpace>
+</file>
+
+<file path=ppt/charts/chart3.xml><?xml version="1.0" encoding="utf-8"?>
+<c:chartSpace xmlns:c="http://schemas.openxmlformats.org/drawingml/2006/chart" xmlns:a="http://schemas.openxmlformats.org/drawingml/2006/main" xmlns:r="http://schemas.openxmlformats.org/officeDocument/2006/relationships">
+  <c:date1904 val="0"/>
+  <c:chart>
+    <c:autoTitleDeleted val="0"/>
+    <c:plotArea>
+      <c:barChart>
+        <c:barDir val="col"/>
+        <c:grouping val="clustered"/>
+        <c:ser>
+          <c:idx val="0"/>
+          <c:order val="0"/>
+          <c:tx>
+            <c:strRef>
+              <c:f>Sheet1!$B$1</c:f>
+              <c:strCache>
+                <c:ptCount val="1"/>
+                <c:pt idx="0">
+                  <c:v/>
+                </c:pt>
+              </c:strCache>
+            </c:strRef>
+          </c:tx>
+          <c:spPr>
+            <a:solidFill>
+              <a:srgbClr val="E88C00"/>
+            </a:solidFill>
+            <a:ln>
+              <a:solidFill>
+                <a:srgbClr val="E88C00"/>
+              </a:solidFill>
+            </a:ln>
+          </c:spPr>
+          <c:dPt>
+            <c:idx val="4"/>
+            <c:spPr>
+              <a:solidFill>
+                <a:srgbClr val="FFA500"/>
+              </a:solidFill>
+            </c:spPr>
+          </c:dPt>
+          <c:dPt>
+            <c:idx val="5"/>
+            <c:spPr>
+              <a:solidFill>
+                <a:srgbClr val="E74C3C"/>
+              </a:solidFill>
+            </c:spPr>
+          </c:dPt>
+          <c:dPt>
+            <c:idx val="6"/>
+            <c:spPr>
+              <a:solidFill>
+                <a:srgbClr val="2ECC71"/>
+              </a:solidFill>
+            </c:spPr>
+          </c:dPt>
+          <c:dPt>
+            <c:idx val="7"/>
+            <c:spPr>
+              <a:solidFill>
+                <a:srgbClr val="2ECC71"/>
+              </a:solidFill>
+            </c:spPr>
+          </c:dPt>
+          <c:dPt>
+            <c:idx val="8"/>
+            <c:spPr>
+              <a:solidFill>
+                <a:srgbClr val="2ECC71"/>
+              </a:solidFill>
+            </c:spPr>
+          </c:dPt>
+          <c:dPt>
+            <c:idx val="9"/>
+            <c:spPr>
+              <a:solidFill>
+                <a:srgbClr val="2ECC71"/>
+              </a:solidFill>
+            </c:spPr>
+          </c:dPt>
+          <c:cat>
+            <c:strRef>
+              <c:f>Sheet1!$A$2:$A$11</c:f>
+              <c:strCache>
+                <c:ptCount val="10"/>
+                <c:pt idx="0">
+                  <c:v>2015</c:v>
+                </c:pt>
+                <c:pt idx="1">
+                  <c:v>2016</c:v>
+                </c:pt>
+                <c:pt idx="2">
+                  <c:v>2017</c:v>
+                </c:pt>
+                <c:pt idx="3">
+                  <c:v>2018</c:v>
+                </c:pt>
+                <c:pt idx="4">
+                  <c:v>2019</c:v>
+                </c:pt>
+                <c:pt idx="5">
+                  <c:v>2020</c:v>
+                </c:pt>
+                <c:pt idx="6">
+                  <c:v>2021</c:v>
+                </c:pt>
+                <c:pt idx="7">
+                  <c:v>2022</c:v>
+                </c:pt>
+                <c:pt idx="8">
+                  <c:v>2023</c:v>
+                </c:pt>
+                <c:pt idx="9">
+                  <c:v>2024</c:v>
+                </c:pt>
+              </c:strCache>
+            </c:strRef>
+          </c:cat>
+          <c:val>
+            <c:numRef>
+              <c:f>Sheet1!$B$2:$B$11</c:f>
+              <c:numCache>
+                <c:formatCode>General</c:formatCode>
+                <c:ptCount val="10"/>
+                <c:pt idx="0">
+                  <c:v>2.9</c:v>
+                </c:pt>
+                <c:pt idx="1">
+                  <c:v>3.8</c:v>
+                </c:pt>
+                <c:pt idx="2">
+                  <c:v>3.5</c:v>
+                </c:pt>
+                <c:pt idx="3">
+                  <c:v>4.0</c:v>
+                </c:pt>
+                <c:pt idx="4">
+                  <c:v>1.4</c:v>
+                </c:pt>
+                <c:pt idx="5">
+                  <c:v>-2.8</c:v>
+                </c:pt>
+                <c:pt idx="6">
+                  <c:v>4.6</c:v>
+                </c:pt>
+                <c:pt idx="7">
+                  <c:v>4.7</c:v>
+                </c:pt>
+                <c:pt idx="8">
+                  <c:v>4.7</c:v>
+                </c:pt>
+                <c:pt idx="9">
+                  <c:v>5.3</c:v>
+                </c:pt>
+              </c:numCache>
+            </c:numRef>
+          </c:val>
+        </c:ser>
+        <c:gapWidth val="80"/>
+        <c:axId val="-2068027336"/>
+        <c:axId val="-2113994440"/>
+      </c:barChart>
+      <c:catAx>
+        <c:axId val="-2068027336"/>
+        <c:scaling>
+          <c:orientation val="minMax"/>
+        </c:scaling>
+        <c:delete val="0"/>
+        <c:axPos val="b"/>
+        <c:majorTickMark val="out"/>
+        <c:minorTickMark val="none"/>
+        <c:tickLblPos val="nextTo"/>
+        <c:txPr>
+          <a:bodyPr/>
+          <a:lstStyle/>
+          <a:p>
+            <a:pPr>
+              <a:defRPr sz="800" b="0">
+                <a:latin typeface="Calibri"/>
+              </a:defRPr>
+            </a:pPr>
+          </a:p>
+        </c:txPr>
+        <c:crossAx val="-2113994440"/>
+        <c:crosses val="autoZero"/>
+        <c:auto val="1"/>
+        <c:lblAlgn val="ctr"/>
+        <c:lblOffset val="100"/>
+        <c:noMultiLvlLbl val="0"/>
+      </c:catAx>
+      <c:valAx>
+        <c:axId val="-2113994440"/>
+        <c:scaling/>
+        <c:delete val="0"/>
+        <c:axPos val="l"/>
+        <c:majorGridlines/>
+        <c:majorTickMark val="out"/>
+        <c:minorTickMark val="none"/>
+        <c:tickLblPos val="nextTo"/>
+        <c:txPr>
+          <a:bodyPr/>
+          <a:lstStyle/>
+          <a:p>
+            <a:pPr>
+              <a:defRPr sz="800" b="0">
+                <a:latin typeface="Calibri"/>
+              </a:defRPr>
+            </a:pPr>
+          </a:p>
+        </c:txPr>
+        <c:crossAx val="-2068027336"/>
+        <c:crosses val="autoZero"/>
+      </c:valAx>
+    </c:plotArea>
+    <c:dispBlanksAs val="gap"/>
+  </c:chart>
+  <c:txPr>
+    <a:bodyPr/>
+    <a:lstStyle/>
+    <a:p>
+      <a:pPr>
+        <a:defRPr sz="1800"/>
+      </a:pPr>
+      <a:endParaRPr lang="en-US"/>
+    </a:p>
+  </c:txPr>
+  <c:externalData r:id="rId1">
+    <c:autoUpdate val="0"/>
+  </c:externalData>
+</c:chartSpace>
+</file>
+
+<file path=ppt/charts/chart4.xml><?xml version="1.0" encoding="utf-8"?>
+<c:chartSpace xmlns:c="http://schemas.openxmlformats.org/drawingml/2006/chart" xmlns:a="http://schemas.openxmlformats.org/drawingml/2006/main" xmlns:r="http://schemas.openxmlformats.org/officeDocument/2006/relationships">
+  <c:date1904 val="0"/>
+  <c:chart>
+    <c:autoTitleDeleted val="0"/>
+    <c:plotArea>
+      <c:barChart>
+        <c:barDir val="col"/>
+        <c:grouping val="clustered"/>
+        <c:ser>
+          <c:idx val="0"/>
+          <c:order val="0"/>
+          <c:tx>
+            <c:strRef>
+              <c:f>Sheet1!$B$1</c:f>
+              <c:strCache>
+                <c:ptCount val="1"/>
+                <c:pt idx="0">
+                  <c:v/>
+                </c:pt>
+              </c:strCache>
+            </c:strRef>
+          </c:tx>
+          <c:spPr>
+            <a:solidFill>
+              <a:srgbClr val="E88C00"/>
+            </a:solidFill>
+            <a:ln>
+              <a:solidFill>
+                <a:srgbClr val="E88C00"/>
+              </a:solidFill>
+            </a:ln>
+          </c:spPr>
+          <c:dPt>
+            <c:idx val="5"/>
+            <c:spPr>
+              <a:solidFill>
+                <a:srgbClr val="E74C3C"/>
+              </a:solidFill>
+            </c:spPr>
+          </c:dPt>
+          <c:dPt>
+            <c:idx val="9"/>
+            <c:spPr>
+              <a:solidFill>
+                <a:srgbClr val="2ECC71"/>
+              </a:solidFill>
+            </c:spPr>
+          </c:dPt>
+          <c:cat>
+            <c:strRef>
+              <c:f>Sheet1!$A$2:$A$11</c:f>
+              <c:strCache>
+                <c:ptCount val="10"/>
+                <c:pt idx="0">
+                  <c:v>2015</c:v>
+                </c:pt>
+                <c:pt idx="1">
+                  <c:v>2016</c:v>
+                </c:pt>
+                <c:pt idx="2">
+                  <c:v>2017</c:v>
+                </c:pt>
+                <c:pt idx="3">
+                  <c:v>2018</c:v>
+                </c:pt>
+                <c:pt idx="4">
+                  <c:v>2019</c:v>
+                </c:pt>
+                <c:pt idx="5">
+                  <c:v>2020</c:v>
+                </c:pt>
+                <c:pt idx="6">
+                  <c:v>2021</c:v>
+                </c:pt>
+                <c:pt idx="7">
+                  <c:v>2022</c:v>
+                </c:pt>
+                <c:pt idx="8">
+                  <c:v>2023</c:v>
+                </c:pt>
+                <c:pt idx="9">
+                  <c:v>2024</c:v>
+                </c:pt>
+              </c:strCache>
+            </c:strRef>
+          </c:cat>
+          <c:val>
+            <c:numRef>
+              <c:f>Sheet1!$B$2:$B$11</c:f>
+              <c:numCache>
+                <c:formatCode>General</c:formatCode>
+                <c:ptCount val="10"/>
+                <c:pt idx="0">
+                  <c:v>3.2</c:v>
+                </c:pt>
+                <c:pt idx="1">
+                  <c:v>2.5</c:v>
+                </c:pt>
+                <c:pt idx="2">
+                  <c:v>3.5</c:v>
+                </c:pt>
+                <c:pt idx="3">
+                  <c:v>2.8</c:v>
+                </c:pt>
+                <c:pt idx="4">
+                  <c:v>2.4</c:v>
+                </c:pt>
+                <c:pt idx="5">
+                  <c:v>1.8</c:v>
+                </c:pt>
+                <c:pt idx="6">
+                  <c:v>3.7</c:v>
+                </c:pt>
+                <c:pt idx="7">
+                  <c:v>5.1</c:v>
+                </c:pt>
+                <c:pt idx="8">
+                  <c:v>6.8</c:v>
+                </c:pt>
+                <c:pt idx="9">
+                  <c:v>9.32</c:v>
+                </c:pt>
+              </c:numCache>
+            </c:numRef>
+          </c:val>
+        </c:ser>
+        <c:gapWidth val="80"/>
+        <c:axId val="-2068027336"/>
+        <c:axId val="-2113994440"/>
+      </c:barChart>
+      <c:catAx>
+        <c:axId val="-2068027336"/>
+        <c:scaling>
+          <c:orientation val="minMax"/>
+        </c:scaling>
+        <c:delete val="0"/>
+        <c:axPos val="b"/>
+        <c:majorTickMark val="out"/>
+        <c:minorTickMark val="none"/>
+        <c:tickLblPos val="nextTo"/>
+        <c:txPr>
+          <a:bodyPr/>
+          <a:lstStyle/>
+          <a:p>
+            <a:pPr>
+              <a:defRPr sz="800" b="0">
+                <a:latin typeface="Calibri"/>
+              </a:defRPr>
+            </a:pPr>
+          </a:p>
+        </c:txPr>
+        <c:crossAx val="-2113994440"/>
+        <c:crosses val="autoZero"/>
+        <c:auto val="1"/>
+        <c:lblAlgn val="ctr"/>
+        <c:lblOffset val="100"/>
+        <c:noMultiLvlLbl val="0"/>
+      </c:catAx>
+      <c:valAx>
+        <c:axId val="-2113994440"/>
+        <c:scaling/>
+        <c:delete val="0"/>
+        <c:axPos val="l"/>
+        <c:majorGridlines/>
+        <c:majorTickMark val="out"/>
+        <c:minorTickMark val="none"/>
+        <c:tickLblPos val="nextTo"/>
+        <c:txPr>
+          <a:bodyPr/>
+          <a:lstStyle/>
+          <a:p>
+            <a:pPr>
+              <a:defRPr sz="800" b="0">
+                <a:latin typeface="Calibri"/>
+              </a:defRPr>
+            </a:pPr>
+          </a:p>
+        </c:txPr>
+        <c:crossAx val="-2068027336"/>
+        <c:crosses val="autoZero"/>
+      </c:valAx>
+    </c:plotArea>
+    <c:dispBlanksAs val="gap"/>
+  </c:chart>
+  <c:txPr>
+    <a:bodyPr/>
+    <a:lstStyle/>
+    <a:p>
+      <a:pPr>
+        <a:defRPr sz="1800"/>
+      </a:pPr>
+      <a:endParaRPr lang="en-US"/>
+    </a:p>
+  </c:txPr>
+  <c:externalData r:id="rId1">
+    <c:autoUpdate val="0"/>
+  </c:externalData>
+</c:chartSpace>
+</file>
+
+<file path=ppt/charts/chart5.xml><?xml version="1.0" encoding="utf-8"?>
+<c:chartSpace xmlns:c="http://schemas.openxmlformats.org/drawingml/2006/chart" xmlns:a="http://schemas.openxmlformats.org/drawingml/2006/main" xmlns:r="http://schemas.openxmlformats.org/officeDocument/2006/relationships">
+  <c:date1904 val="0"/>
+  <c:chart>
+    <c:autoTitleDeleted val="0"/>
+    <c:plotArea>
+      <c:barChart>
+        <c:barDir val="col"/>
+        <c:grouping val="clustered"/>
+        <c:ser>
+          <c:idx val="0"/>
+          <c:order val="0"/>
+          <c:tx>
+            <c:strRef>
+              <c:f>Sheet1!$B$1</c:f>
+              <c:strCache>
+                <c:ptCount val="1"/>
+                <c:pt idx="0">
+                  <c:v>Debt Service % Exports</c:v>
+                </c:pt>
+              </c:strCache>
+            </c:strRef>
+          </c:tx>
+          <c:spPr>
+            <a:solidFill>
+              <a:srgbClr val="E88C00"/>
+            </a:solidFill>
+            <a:ln>
+              <a:solidFill>
+                <a:srgbClr val="E88C00"/>
+              </a:solidFill>
+            </a:ln>
+          </c:spPr>
+          <c:dPt>
+            <c:idx val="0"/>
+            <c:spPr>
+              <a:solidFill>
+                <a:srgbClr val="E74C3C"/>
+              </a:solidFill>
+            </c:spPr>
+          </c:dPt>
+          <c:dPt>
+            <c:idx val="1"/>
+            <c:spPr>
+              <a:solidFill>
+                <a:srgbClr val="2ECC71"/>
+              </a:solidFill>
+            </c:spPr>
+          </c:dPt>
+          <c:cat>
+            <c:strRef>
+              <c:f>Sheet1!$A$2:$A$3</c:f>
+              <c:strCache>
+                <c:ptCount val="2"/>
+                <c:pt idx="0">
+                  <c:v>Pre-restructuring
+(2020)</c:v>
+                </c:pt>
+                <c:pt idx="1">
+                  <c:v>Post-restructuring
+(2024)</c:v>
+                </c:pt>
+              </c:strCache>
+            </c:strRef>
+          </c:cat>
+          <c:val>
+            <c:numRef>
+              <c:f>Sheet1!$B$2:$B$3</c:f>
+              <c:numCache>
+                <c:formatCode>General</c:formatCode>
+                <c:ptCount val="2"/>
+                <c:pt idx="0">
+                  <c:v>12.5</c:v>
+                </c:pt>
+                <c:pt idx="1">
+                  <c:v>3.0</c:v>
+                </c:pt>
+              </c:numCache>
+            </c:numRef>
+          </c:val>
+        </c:ser>
+        <c:gapWidth val="100"/>
+        <c:axId val="-2068027336"/>
+        <c:axId val="-2113994440"/>
+      </c:barChart>
+      <c:catAx>
+        <c:axId val="-2068027336"/>
+        <c:scaling>
+          <c:orientation val="minMax"/>
+        </c:scaling>
+        <c:delete val="0"/>
+        <c:axPos val="b"/>
+        <c:majorTickMark val="out"/>
+        <c:minorTickMark val="none"/>
+        <c:tickLblPos val="nextTo"/>
+        <c:txPr>
+          <a:bodyPr/>
+          <a:lstStyle/>
+          <a:p>
+            <a:pPr>
+              <a:defRPr sz="800" b="0">
+                <a:latin typeface="Calibri"/>
+              </a:defRPr>
+            </a:pPr>
+          </a:p>
+        </c:txPr>
+        <c:crossAx val="-2113994440"/>
+        <c:crosses val="autoZero"/>
+        <c:auto val="1"/>
+        <c:lblAlgn val="ctr"/>
+        <c:lblOffset val="100"/>
+        <c:noMultiLvlLbl val="0"/>
+      </c:catAx>
+      <c:valAx>
+        <c:axId val="-2113994440"/>
+        <c:scaling/>
+        <c:delete val="0"/>
+        <c:axPos val="l"/>
+        <c:majorGridlines/>
+        <c:majorTickMark val="out"/>
+        <c:minorTickMark val="none"/>
+        <c:tickLblPos val="nextTo"/>
+        <c:txPr>
+          <a:bodyPr/>
+          <a:lstStyle/>
+          <a:p>
+            <a:pPr>
+              <a:defRPr sz="800" b="0">
+                <a:latin typeface="Calibri"/>
+              </a:defRPr>
+            </a:pPr>
+          </a:p>
+        </c:txPr>
+        <c:crossAx val="-2068027336"/>
+        <c:crosses val="autoZero"/>
+      </c:valAx>
+    </c:plotArea>
+    <c:dispBlanksAs val="gap"/>
+  </c:chart>
+  <c:txPr>
+    <a:bodyPr/>
+    <a:lstStyle/>
+    <a:p>
+      <a:pPr>
+        <a:defRPr sz="1800"/>
+      </a:pPr>
+      <a:endParaRPr lang="en-US"/>
+    </a:p>
+  </c:txPr>
+  <c:externalData r:id="rId1">
+    <c:autoUpdate val="0"/>
+  </c:externalData>
+</c:chartSpace>
 </file>
 
 <file path=ppt/slideLayouts/slideLayout1.xml><?xml version="1.0" encoding="utf-8"?>
@@ -3621,7 +4614,7 @@
         <p:spPr>
           <a:xfrm>
             <a:off x="457200" y="640080"/>
-            <a:ext cx="10972800" cy="1005840"/>
+            <a:ext cx="10972800" cy="822960"/>
           </a:xfrm>
           <a:prstGeom prst="rect">
             <a:avLst/>
@@ -3636,7 +4629,7 @@
           <a:p>
             <a:pPr algn="l"/>
             <a:r>
-              <a:rPr sz="2800" b="1">
+              <a:rPr sz="2600" b="1">
                 <a:solidFill>
                   <a:srgbClr val="F5F5F5"/>
                 </a:solidFill>
@@ -3655,7 +4648,7 @@
         </p:nvSpPr>
         <p:spPr>
           <a:xfrm>
-            <a:off x="457200" y="1600200"/>
+            <a:off x="457200" y="1508760"/>
             <a:ext cx="5029200" cy="19050"/>
           </a:xfrm>
           <a:prstGeom prst="rect">
@@ -3698,8 +4691,8 @@
         </p:nvSpPr>
         <p:spPr>
           <a:xfrm>
-            <a:off x="457200" y="1828800"/>
-            <a:ext cx="5486400" cy="2743200"/>
+            <a:off x="457200" y="1645920"/>
+            <a:ext cx="5486400" cy="2560320"/>
           </a:xfrm>
           <a:prstGeom prst="rect">
             <a:avLst/>
@@ -3714,19 +4707,19 @@
           <a:p>
             <a:pPr algn="l"/>
             <a:r>
-              <a:rPr sz="1200" b="0">
+              <a:rPr sz="1100" b="0">
                 <a:solidFill>
                   <a:srgbClr val="F5F5F5"/>
                 </a:solidFill>
                 <a:latin typeface="Calibri"/>
               </a:rPr>
-              <a:t>Between 2015 and 2019, Zambia's external debt tripled — from $12.3 B to $29.1 B — as the government borrowed heavily against future copper revenues. When COVID-19 struck in 2020, the fiscal position collapsed. In November 2020, Zambia became the first African sovereign to default during the pandemic era, missing a $42.5 M Eurobond coupon payment.</a:t>
+              <a:t>Between 2015 and 2019, Zambia's external debt tripled — from $12.3 B to $29.1 B — as the government borrowed against future copper revenues. When COVID-19 struck in 2020, revenues collapsed. In November 2020 Zambia became the first African sovereign pandemic-era default, missing a $42.5 M Eurobond coupon payment.</a:t>
             </a:r>
           </a:p>
           <a:p>
             <a:pPr algn="l"/>
             <a:r>
-              <a:rPr sz="1200" b="0">
+              <a:rPr sz="1100" b="0">
                 <a:solidFill>
                   <a:srgbClr val="F5F5F5"/>
                 </a:solidFill>
@@ -3738,37 +4731,25 @@
           <a:p>
             <a:pPr algn="l"/>
             <a:r>
-              <a:rPr sz="1200" b="0">
+              <a:rPr sz="1100" b="0">
                 <a:solidFill>
                   <a:srgbClr val="B0BEC5"/>
                 </a:solidFill>
                 <a:latin typeface="Calibri"/>
               </a:rPr>
-              <a:t>Two structural vulnerabilities converged:</a:t>
+              <a:t>  •  Copper-dependent export base: no buffer against price shocks</a:t>
             </a:r>
           </a:p>
           <a:p>
             <a:pPr algn="l"/>
             <a:r>
-              <a:rPr sz="1200" b="0">
+              <a:rPr sz="1100" b="0">
                 <a:solidFill>
                   <a:srgbClr val="B0BEC5"/>
                 </a:solidFill>
                 <a:latin typeface="Calibri"/>
               </a:rPr>
-              <a:t>  •  A copper-dependent export base unable to absorb a commodity price shock</a:t>
-            </a:r>
-          </a:p>
-          <a:p>
-            <a:pPr algn="l"/>
-            <a:r>
-              <a:rPr sz="1200" b="0">
-                <a:solidFill>
-                  <a:srgbClr val="B0BEC5"/>
-                </a:solidFill>
-                <a:latin typeface="Calibri"/>
-              </a:rPr>
-              <a:t>  •  Debt service obligations that consumed 12.5 % of all export earnings</a:t>
+              <a:t>  •  Debt service consumed 12.5 % of all export earnings</a:t>
             </a:r>
           </a:p>
         </p:txBody>
@@ -3781,8 +4762,8 @@
         </p:nvSpPr>
         <p:spPr>
           <a:xfrm>
-            <a:off x="6583680" y="1645920"/>
-            <a:ext cx="4480560" cy="1097280"/>
+            <a:off x="457200" y="4754880"/>
+            <a:ext cx="5303520" cy="868680"/>
           </a:xfrm>
           <a:prstGeom prst="rect">
             <a:avLst/>
@@ -3824,8 +4805,8 @@
         </p:nvSpPr>
         <p:spPr>
           <a:xfrm>
-            <a:off x="6720840" y="1737360"/>
-            <a:ext cx="1097280" cy="347472"/>
+            <a:off x="594360" y="4846320"/>
+            <a:ext cx="5029200" cy="320040"/>
           </a:xfrm>
           <a:prstGeom prst="rect">
             <a:avLst/>
@@ -3840,13 +4821,13 @@
           <a:p>
             <a:pPr algn="l"/>
             <a:r>
-              <a:rPr sz="1100" b="1" i="0">
-                <a:solidFill>
-                  <a:srgbClr val="E88C00"/>
-                </a:solidFill>
-                <a:latin typeface="Calibri"/>
-              </a:rPr>
-              <a:t>2015</a:t>
+              <a:rPr sz="900" b="0" i="0">
+                <a:solidFill>
+                  <a:srgbClr val="B0BEC5"/>
+                </a:solidFill>
+                <a:latin typeface="Calibri"/>
+              </a:rPr>
+              <a:t>PPG DEBT SERVICE AT PEAK</a:t>
             </a:r>
           </a:p>
         </p:txBody>
@@ -3859,8 +4840,8 @@
         </p:nvSpPr>
         <p:spPr>
           <a:xfrm>
-            <a:off x="6720840" y="2103120"/>
-            <a:ext cx="4114800" cy="502920"/>
+            <a:off x="594360" y="5166360"/>
+            <a:ext cx="1828800" cy="365760"/>
           </a:xfrm>
           <a:prstGeom prst="rect">
             <a:avLst/>
@@ -3875,70 +4856,27 @@
           <a:p>
             <a:pPr algn="l"/>
             <a:r>
-              <a:rPr sz="1400" b="1" i="0">
-                <a:solidFill>
-                  <a:srgbClr val="F5F5F5"/>
-                </a:solidFill>
-                <a:latin typeface="Calibri"/>
-              </a:rPr>
-              <a:t>Debt: $12.3 B</a:t>
-            </a:r>
-          </a:p>
-        </p:txBody>
-      </p:sp>
-      <p:sp>
-        <p:nvSpPr>
-          <p:cNvPr id="11" name="Rectangle 10"/>
-          <p:cNvSpPr/>
-          <p:nvPr/>
-        </p:nvSpPr>
-        <p:spPr>
-          <a:xfrm>
-            <a:off x="6583680" y="3108960"/>
-            <a:ext cx="4480560" cy="1097280"/>
-          </a:xfrm>
-          <a:prstGeom prst="rect">
-            <a:avLst/>
-          </a:prstGeom>
-          <a:solidFill>
-            <a:srgbClr val="1E3A5F"/>
-          </a:solidFill>
-          <a:ln>
-            <a:noFill/>
-          </a:ln>
-        </p:spPr>
-        <p:style>
-          <a:lnRef idx="1">
-            <a:schemeClr val="accent1"/>
-          </a:lnRef>
-          <a:fillRef idx="3">
-            <a:schemeClr val="accent1"/>
-          </a:fillRef>
-          <a:effectRef idx="2">
-            <a:schemeClr val="accent1"/>
-          </a:effectRef>
-          <a:fontRef idx="minor">
-            <a:schemeClr val="lt1"/>
-          </a:fontRef>
-        </p:style>
-        <p:txBody>
-          <a:bodyPr rtlCol="0" anchor="ctr"/>
-          <a:lstStyle/>
-          <a:p>
-            <a:pPr algn="ctr"/>
-          </a:p>
-        </p:txBody>
-      </p:sp>
-      <p:sp>
-        <p:nvSpPr>
-          <p:cNvPr id="12" name="TextBox 11"/>
+              <a:rPr sz="2000" b="1" i="0">
+                <a:solidFill>
+                  <a:srgbClr val="E74C3C"/>
+                </a:solidFill>
+                <a:latin typeface="Calibri"/>
+              </a:rPr>
+              <a:t>12.5%</a:t>
+            </a:r>
+          </a:p>
+        </p:txBody>
+      </p:sp>
+      <p:sp>
+        <p:nvSpPr>
+          <p:cNvPr id="11" name="TextBox 10"/>
           <p:cNvSpPr txBox="1"/>
           <p:nvPr/>
         </p:nvSpPr>
         <p:spPr>
           <a:xfrm>
-            <a:off x="6720840" y="3200400"/>
-            <a:ext cx="1097280" cy="347472"/>
+            <a:off x="2560320" y="5230368"/>
+            <a:ext cx="2926080" cy="292608"/>
           </a:xfrm>
           <a:prstGeom prst="rect">
             <a:avLst/>
@@ -3953,27 +4891,27 @@
           <a:p>
             <a:pPr algn="l"/>
             <a:r>
-              <a:rPr sz="1100" b="1" i="0">
-                <a:solidFill>
-                  <a:srgbClr val="E88C00"/>
-                </a:solidFill>
-                <a:latin typeface="Calibri"/>
-              </a:rPr>
-              <a:t>2019</a:t>
-            </a:r>
-          </a:p>
-        </p:txBody>
-      </p:sp>
-      <p:sp>
-        <p:nvSpPr>
-          <p:cNvPr id="13" name="TextBox 12"/>
+              <a:rPr sz="1000" b="0" i="0">
+                <a:solidFill>
+                  <a:srgbClr val="B0BEC5"/>
+                </a:solidFill>
+                <a:latin typeface="Calibri"/>
+              </a:rPr>
+              <a:t>of total export earnings</a:t>
+            </a:r>
+          </a:p>
+        </p:txBody>
+      </p:sp>
+      <p:sp>
+        <p:nvSpPr>
+          <p:cNvPr id="12" name="TextBox 11"/>
           <p:cNvSpPr txBox="1"/>
           <p:nvPr/>
         </p:nvSpPr>
         <p:spPr>
           <a:xfrm>
-            <a:off x="6720840" y="3566160"/>
-            <a:ext cx="4114800" cy="502920"/>
+            <a:off x="6035040" y="1188720"/>
+            <a:ext cx="5943600" cy="320040"/>
           </a:xfrm>
           <a:prstGeom prst="rect">
             <a:avLst/>
@@ -3988,281 +4926,38 @@
           <a:p>
             <a:pPr algn="l"/>
             <a:r>
-              <a:rPr sz="1400" b="1" i="0">
-                <a:solidFill>
-                  <a:srgbClr val="E74C3C"/>
-                </a:solidFill>
-                <a:latin typeface="Calibri"/>
-              </a:rPr>
-              <a:t>Debt: $29.1 B  (+137 %)</a:t>
-            </a:r>
-          </a:p>
-        </p:txBody>
-      </p:sp>
-      <p:sp>
-        <p:nvSpPr>
-          <p:cNvPr id="14" name="Rectangle 13"/>
-          <p:cNvSpPr/>
-          <p:nvPr/>
-        </p:nvSpPr>
-        <p:spPr>
-          <a:xfrm>
-            <a:off x="6583680" y="4572000"/>
-            <a:ext cx="4480560" cy="1097280"/>
-          </a:xfrm>
-          <a:prstGeom prst="rect">
-            <a:avLst/>
-          </a:prstGeom>
-          <a:solidFill>
-            <a:srgbClr val="1E3A5F"/>
-          </a:solidFill>
-          <a:ln>
-            <a:noFill/>
-          </a:ln>
-        </p:spPr>
-        <p:style>
-          <a:lnRef idx="1">
-            <a:schemeClr val="accent1"/>
-          </a:lnRef>
-          <a:fillRef idx="3">
-            <a:schemeClr val="accent1"/>
-          </a:fillRef>
-          <a:effectRef idx="2">
-            <a:schemeClr val="accent1"/>
-          </a:effectRef>
-          <a:fontRef idx="minor">
-            <a:schemeClr val="lt1"/>
-          </a:fontRef>
-        </p:style>
-        <p:txBody>
-          <a:bodyPr rtlCol="0" anchor="ctr"/>
-          <a:lstStyle/>
-          <a:p>
-            <a:pPr algn="ctr"/>
-          </a:p>
-        </p:txBody>
-      </p:sp>
-      <p:sp>
-        <p:nvSpPr>
-          <p:cNvPr id="15" name="TextBox 14"/>
-          <p:cNvSpPr txBox="1"/>
-          <p:nvPr/>
-        </p:nvSpPr>
-        <p:spPr>
-          <a:xfrm>
-            <a:off x="6720840" y="4663440"/>
-            <a:ext cx="1097280" cy="347472"/>
-          </a:xfrm>
-          <a:prstGeom prst="rect">
-            <a:avLst/>
-          </a:prstGeom>
-          <a:noFill/>
-        </p:spPr>
-        <p:txBody>
-          <a:bodyPr wrap="square">
-            <a:spAutoFit/>
-          </a:bodyPr>
-          <a:lstStyle/>
-          <a:p>
-            <a:pPr algn="l"/>
-            <a:r>
-              <a:rPr sz="1100" b="1" i="0">
-                <a:solidFill>
-                  <a:srgbClr val="E88C00"/>
-                </a:solidFill>
-                <a:latin typeface="Calibri"/>
-              </a:rPr>
-              <a:t>Nov 2020</a:t>
-            </a:r>
-          </a:p>
-        </p:txBody>
-      </p:sp>
-      <p:sp>
-        <p:nvSpPr>
-          <p:cNvPr id="16" name="TextBox 15"/>
-          <p:cNvSpPr txBox="1"/>
-          <p:nvPr/>
-        </p:nvSpPr>
-        <p:spPr>
-          <a:xfrm>
-            <a:off x="6720840" y="5029200"/>
-            <a:ext cx="4114800" cy="502920"/>
-          </a:xfrm>
-          <a:prstGeom prst="rect">
-            <a:avLst/>
-          </a:prstGeom>
-          <a:noFill/>
-        </p:spPr>
-        <p:txBody>
-          <a:bodyPr wrap="square">
-            <a:spAutoFit/>
-          </a:bodyPr>
-          <a:lstStyle/>
-          <a:p>
-            <a:pPr algn="l"/>
-            <a:r>
-              <a:rPr sz="1400" b="1" i="0">
-                <a:solidFill>
-                  <a:srgbClr val="E74C3C"/>
-                </a:solidFill>
-                <a:latin typeface="Calibri"/>
-              </a:rPr>
-              <a:t>Eurobond DEFAULT</a:t>
-            </a:r>
-          </a:p>
-        </p:txBody>
-      </p:sp>
-      <p:sp>
-        <p:nvSpPr>
-          <p:cNvPr id="17" name="Rectangle 16"/>
-          <p:cNvSpPr/>
-          <p:nvPr/>
-        </p:nvSpPr>
-        <p:spPr>
-          <a:xfrm>
-            <a:off x="457200" y="4846320"/>
-            <a:ext cx="5303520" cy="914400"/>
-          </a:xfrm>
-          <a:prstGeom prst="rect">
-            <a:avLst/>
-          </a:prstGeom>
-          <a:solidFill>
-            <a:srgbClr val="1E3A5F"/>
-          </a:solidFill>
-          <a:ln>
-            <a:noFill/>
-          </a:ln>
-        </p:spPr>
-        <p:style>
-          <a:lnRef idx="1">
-            <a:schemeClr val="accent1"/>
-          </a:lnRef>
-          <a:fillRef idx="3">
-            <a:schemeClr val="accent1"/>
-          </a:fillRef>
-          <a:effectRef idx="2">
-            <a:schemeClr val="accent1"/>
-          </a:effectRef>
-          <a:fontRef idx="minor">
-            <a:schemeClr val="lt1"/>
-          </a:fontRef>
-        </p:style>
-        <p:txBody>
-          <a:bodyPr rtlCol="0" anchor="ctr"/>
-          <a:lstStyle/>
-          <a:p>
-            <a:pPr algn="ctr"/>
-          </a:p>
-        </p:txBody>
-      </p:sp>
-      <p:sp>
-        <p:nvSpPr>
-          <p:cNvPr id="18" name="TextBox 17"/>
-          <p:cNvSpPr txBox="1"/>
-          <p:nvPr/>
-        </p:nvSpPr>
-        <p:spPr>
-          <a:xfrm>
-            <a:off x="594360" y="4937760"/>
-            <a:ext cx="5029200" cy="365760"/>
-          </a:xfrm>
-          <a:prstGeom prst="rect">
-            <a:avLst/>
-          </a:prstGeom>
-          <a:noFill/>
-        </p:spPr>
-        <p:txBody>
-          <a:bodyPr wrap="square">
-            <a:spAutoFit/>
-          </a:bodyPr>
-          <a:lstStyle/>
-          <a:p>
-            <a:pPr algn="l"/>
-            <a:r>
-              <a:rPr sz="900" b="0" i="0">
+              <a:rPr sz="900" b="1" i="0">
                 <a:solidFill>
                   <a:srgbClr val="B0BEC5"/>
                 </a:solidFill>
                 <a:latin typeface="Calibri"/>
               </a:rPr>
-              <a:t>PPG DEBT SERVICE AT PEAK</a:t>
-            </a:r>
-          </a:p>
-        </p:txBody>
-      </p:sp>
-      <p:sp>
-        <p:nvSpPr>
-          <p:cNvPr id="19" name="TextBox 18"/>
-          <p:cNvSpPr txBox="1"/>
-          <p:nvPr/>
-        </p:nvSpPr>
-        <p:spPr>
-          <a:xfrm>
-            <a:off x="594360" y="5257800"/>
-            <a:ext cx="2286000" cy="411480"/>
-          </a:xfrm>
-          <a:prstGeom prst="rect">
-            <a:avLst/>
-          </a:prstGeom>
-          <a:noFill/>
-        </p:spPr>
-        <p:txBody>
-          <a:bodyPr wrap="square">
-            <a:spAutoFit/>
-          </a:bodyPr>
-          <a:lstStyle/>
-          <a:p>
-            <a:pPr algn="l"/>
-            <a:r>
-              <a:rPr sz="2200" b="1" i="0">
-                <a:solidFill>
-                  <a:srgbClr val="E74C3C"/>
-                </a:solidFill>
-                <a:latin typeface="Calibri"/>
-              </a:rPr>
-              <a:t>12.5%</a:t>
-            </a:r>
-          </a:p>
-        </p:txBody>
-      </p:sp>
-      <p:sp>
-        <p:nvSpPr>
-          <p:cNvPr id="20" name="TextBox 19"/>
-          <p:cNvSpPr txBox="1"/>
-          <p:nvPr/>
-        </p:nvSpPr>
-        <p:spPr>
-          <a:xfrm>
-            <a:off x="2743200" y="5349240"/>
-            <a:ext cx="2743200" cy="320040"/>
-          </a:xfrm>
-          <a:prstGeom prst="rect">
-            <a:avLst/>
-          </a:prstGeom>
-          <a:noFill/>
-        </p:spPr>
-        <p:txBody>
-          <a:bodyPr wrap="square">
-            <a:spAutoFit/>
-          </a:bodyPr>
-          <a:lstStyle/>
-          <a:p>
-            <a:pPr algn="l"/>
-            <a:r>
-              <a:rPr sz="1100" b="0" i="0">
-                <a:solidFill>
-                  <a:srgbClr val="B0BEC5"/>
-                </a:solidFill>
-                <a:latin typeface="Calibri"/>
-              </a:rPr>
-              <a:t>of total export earnings</a:t>
-            </a:r>
-          </a:p>
-        </p:txBody>
-      </p:sp>
-      <p:sp>
-        <p:nvSpPr>
-          <p:cNvPr id="21" name="TextBox 20"/>
+              <a:t>EXTERNAL DEBT  ($ billions)  2015 – 2024</a:t>
+            </a:r>
+          </a:p>
+        </p:txBody>
+      </p:sp>
+      <p:graphicFrame>
+        <p:nvGraphicFramePr>
+          <p:cNvPr id="13" name="Chart 12"/>
+          <p:cNvGraphicFramePr>
+            <a:graphicFrameLocks noGrp="1"/>
+          </p:cNvGraphicFramePr>
+          <p:nvPr/>
+        </p:nvGraphicFramePr>
+        <p:xfrm>
+          <a:off x="6035040" y="1508760"/>
+          <a:ext cx="5943600" cy="4389120"/>
+        </p:xfrm>
+        <a:graphic>
+          <a:graphicData uri="http://schemas.openxmlformats.org/drawingml/2006/chart">
+            <c:chart xmlns:c="http://schemas.openxmlformats.org/drawingml/2006/chart" r:id="rId2"/>
+          </a:graphicData>
+        </a:graphic>
+      </p:graphicFrame>
+      <p:sp>
+        <p:nvSpPr>
+          <p:cNvPr id="14" name="TextBox 13"/>
           <p:cNvSpPr txBox="1"/>
           <p:nvPr/>
         </p:nvSpPr>
@@ -4451,7 +5146,7 @@
         <p:spPr>
           <a:xfrm>
             <a:off x="457200" y="640080"/>
-            <a:ext cx="10972800" cy="1005840"/>
+            <a:ext cx="10972800" cy="822960"/>
           </a:xfrm>
           <a:prstGeom prst="rect">
             <a:avLst/>
@@ -4466,7 +5161,7 @@
           <a:p>
             <a:pPr algn="l"/>
             <a:r>
-              <a:rPr sz="2800" b="1">
+              <a:rPr sz="2600" b="1">
                 <a:solidFill>
                   <a:srgbClr val="F5F5F5"/>
                 </a:solidFill>
@@ -4485,7 +5180,7 @@
         </p:nvSpPr>
         <p:spPr>
           <a:xfrm>
-            <a:off x="457200" y="1600200"/>
+            <a:off x="457200" y="1508760"/>
             <a:ext cx="5029200" cy="19050"/>
           </a:xfrm>
           <a:prstGeom prst="rect">
@@ -4528,8 +5223,8 @@
         </p:nvSpPr>
         <p:spPr>
           <a:xfrm>
-            <a:off x="457200" y="1828800"/>
-            <a:ext cx="5669280" cy="3200400"/>
+            <a:off x="457200" y="1645920"/>
+            <a:ext cx="5486400" cy="2743200"/>
           </a:xfrm>
           <a:prstGeom prst="rect">
             <a:avLst/>
@@ -4544,7 +5239,7 @@
           <a:p>
             <a:pPr algn="l"/>
             <a:r>
-              <a:rPr sz="1200" b="0">
+              <a:rPr sz="1100" b="0">
                 <a:solidFill>
                   <a:srgbClr val="F5F5F5"/>
                 </a:solidFill>
@@ -4556,7 +5251,7 @@
           <a:p>
             <a:pPr algn="l"/>
             <a:r>
-              <a:rPr sz="1200" b="0">
+              <a:rPr sz="1100" b="0">
                 <a:solidFill>
                   <a:srgbClr val="F5F5F5"/>
                 </a:solidFill>
@@ -4568,19 +5263,19 @@
           <a:p>
             <a:pPr algn="l"/>
             <a:r>
-              <a:rPr sz="1200" b="0">
+              <a:rPr sz="1100" b="0">
                 <a:solidFill>
                   <a:srgbClr val="F5F5F5"/>
                 </a:solidFill>
                 <a:latin typeface="Calibri"/>
               </a:rPr>
-              <a:t>Simultaneously, the IMF approved a $1.3 B Extended Credit Facility (ECF) programme, giving the government a credible fiscal anchor and unlocking multilateral support.</a:t>
+              <a:t>Simultaneously, the IMF approved a $1.3 B Extended Credit Facility (ECF) programme, providing a credible fiscal anchor.</a:t>
             </a:r>
           </a:p>
           <a:p>
             <a:pPr algn="l"/>
             <a:r>
-              <a:rPr sz="1200" b="0">
+              <a:rPr sz="1100" b="0">
                 <a:solidFill>
                   <a:srgbClr val="F5F5F5"/>
                 </a:solidFill>
@@ -4592,7 +5287,7 @@
           <a:p>
             <a:pPr algn="l"/>
             <a:r>
-              <a:rPr sz="1200" b="1">
+              <a:rPr sz="1100" b="1">
                 <a:solidFill>
                   <a:srgbClr val="E88C00"/>
                 </a:solidFill>
@@ -4611,8 +5306,8 @@
         </p:nvSpPr>
         <p:spPr>
           <a:xfrm>
-            <a:off x="6675120" y="1645920"/>
-            <a:ext cx="1691640" cy="1463040"/>
+            <a:off x="457200" y="4754880"/>
+            <a:ext cx="1691640" cy="1234440"/>
           </a:xfrm>
           <a:prstGeom prst="rect">
             <a:avLst/>
@@ -4654,7 +5349,7 @@
         </p:nvSpPr>
         <p:spPr>
           <a:xfrm>
-            <a:off x="6766560" y="1755648"/>
+            <a:off x="548640" y="4864608"/>
             <a:ext cx="1508760" cy="365760"/>
           </a:xfrm>
           <a:prstGeom prst="rect">
@@ -4690,7 +5385,7 @@
         </p:nvSpPr>
         <p:spPr>
           <a:xfrm>
-            <a:off x="6720840" y="2084832"/>
+            <a:off x="502920" y="5193792"/>
             <a:ext cx="1600200" cy="502920"/>
           </a:xfrm>
           <a:prstGeom prst="rect">
@@ -4725,7 +5420,7 @@
         </p:nvSpPr>
         <p:spPr>
           <a:xfrm>
-            <a:off x="6766560" y="2560320"/>
+            <a:off x="548640" y="5669280"/>
             <a:ext cx="1508760" cy="365760"/>
           </a:xfrm>
           <a:prstGeom prst="rect">
@@ -4747,7 +5442,7 @@
                 </a:solidFill>
                 <a:latin typeface="Calibri"/>
               </a:rPr>
-              <a:t>of GDP  (deficit)</a:t>
+              <a:t>% of GDP  (deficit)</a:t>
             </a:r>
           </a:p>
         </p:txBody>
@@ -4760,8 +5455,8 @@
         </p:nvSpPr>
         <p:spPr>
           <a:xfrm>
-            <a:off x="8503920" y="1645920"/>
-            <a:ext cx="1691640" cy="1463040"/>
+            <a:off x="2286000" y="4754880"/>
+            <a:ext cx="1691640" cy="1234440"/>
           </a:xfrm>
           <a:prstGeom prst="rect">
             <a:avLst/>
@@ -4803,7 +5498,7 @@
         </p:nvSpPr>
         <p:spPr>
           <a:xfrm>
-            <a:off x="8595360" y="1755648"/>
+            <a:off x="2377440" y="4864608"/>
             <a:ext cx="1508760" cy="365760"/>
           </a:xfrm>
           <a:prstGeom prst="rect">
@@ -4839,7 +5534,7 @@
         </p:nvSpPr>
         <p:spPr>
           <a:xfrm>
-            <a:off x="8549640" y="2084832"/>
+            <a:off x="2331720" y="5193792"/>
             <a:ext cx="1600200" cy="502920"/>
           </a:xfrm>
           <a:prstGeom prst="rect">
@@ -4874,7 +5569,7 @@
         </p:nvSpPr>
         <p:spPr>
           <a:xfrm>
-            <a:off x="8595360" y="2560320"/>
+            <a:off x="2377440" y="5669280"/>
             <a:ext cx="1508760" cy="365760"/>
           </a:xfrm>
           <a:prstGeom prst="rect">
@@ -4896,7 +5591,7 @@
                 </a:solidFill>
                 <a:latin typeface="Calibri"/>
               </a:rPr>
-              <a:t>of GDP  (surplus)</a:t>
+              <a:t>% of GDP  (surplus)</a:t>
             </a:r>
           </a:p>
         </p:txBody>
@@ -4909,8 +5604,8 @@
         </p:nvSpPr>
         <p:spPr>
           <a:xfrm>
-            <a:off x="10332720" y="1645920"/>
-            <a:ext cx="1691640" cy="1463040"/>
+            <a:off x="4114800" y="4754880"/>
+            <a:ext cx="1691640" cy="1234440"/>
           </a:xfrm>
           <a:prstGeom prst="rect">
             <a:avLst/>
@@ -4952,7 +5647,7 @@
         </p:nvSpPr>
         <p:spPr>
           <a:xfrm>
-            <a:off x="10424160" y="1755648"/>
+            <a:off x="4206240" y="4864608"/>
             <a:ext cx="1508760" cy="365760"/>
           </a:xfrm>
           <a:prstGeom prst="rect">
@@ -4975,7 +5670,7 @@
                 <a:latin typeface="Calibri"/>
               </a:rPr>
               <a:t>IMF ECF
-Programme</a:t>
+Approved</a:t>
             </a:r>
           </a:p>
         </p:txBody>
@@ -4988,7 +5683,7 @@
         </p:nvSpPr>
         <p:spPr>
           <a:xfrm>
-            <a:off x="10378440" y="2084832"/>
+            <a:off x="4160520" y="5193792"/>
             <a:ext cx="1600200" cy="502920"/>
           </a:xfrm>
           <a:prstGeom prst="rect">
@@ -5023,7 +5718,7 @@
         </p:nvSpPr>
         <p:spPr>
           <a:xfrm>
-            <a:off x="10424160" y="2560320"/>
+            <a:off x="4206240" y="5669280"/>
             <a:ext cx="1508760" cy="365760"/>
           </a:xfrm>
           <a:prstGeom prst="rect">
@@ -5045,64 +5740,21 @@
                 </a:solidFill>
                 <a:latin typeface="Calibri"/>
               </a:rPr>
-              <a:t>approved 2022</a:t>
-            </a:r>
-          </a:p>
-        </p:txBody>
-      </p:sp>
-      <p:sp>
-        <p:nvSpPr>
-          <p:cNvPr id="20" name="Rectangle 19"/>
-          <p:cNvSpPr/>
-          <p:nvPr/>
-        </p:nvSpPr>
-        <p:spPr>
-          <a:xfrm>
-            <a:off x="6675120" y="3657600"/>
-            <a:ext cx="5349240" cy="1005840"/>
-          </a:xfrm>
-          <a:prstGeom prst="rect">
-            <a:avLst/>
-          </a:prstGeom>
-          <a:solidFill>
-            <a:srgbClr val="1E3A5F"/>
-          </a:solidFill>
-          <a:ln>
-            <a:noFill/>
-          </a:ln>
-        </p:spPr>
-        <p:style>
-          <a:lnRef idx="1">
-            <a:schemeClr val="accent1"/>
-          </a:lnRef>
-          <a:fillRef idx="3">
-            <a:schemeClr val="accent1"/>
-          </a:fillRef>
-          <a:effectRef idx="2">
-            <a:schemeClr val="accent1"/>
-          </a:effectRef>
-          <a:fontRef idx="minor">
-            <a:schemeClr val="lt1"/>
-          </a:fontRef>
-        </p:style>
-        <p:txBody>
-          <a:bodyPr rtlCol="0" anchor="ctr"/>
-          <a:lstStyle/>
-          <a:p>
-            <a:pPr algn="ctr"/>
-          </a:p>
-        </p:txBody>
-      </p:sp>
-      <p:sp>
-        <p:nvSpPr>
-          <p:cNvPr id="21" name="TextBox 20"/>
+              <a:t>2022 facility</a:t>
+            </a:r>
+          </a:p>
+        </p:txBody>
+      </p:sp>
+      <p:sp>
+        <p:nvSpPr>
+          <p:cNvPr id="20" name="TextBox 19"/>
           <p:cNvSpPr txBox="1"/>
           <p:nvPr/>
         </p:nvSpPr>
         <p:spPr>
           <a:xfrm>
-            <a:off x="6858000" y="3749039"/>
-            <a:ext cx="5029200" cy="320040"/>
+            <a:off x="6035040" y="1188720"/>
+            <a:ext cx="5943600" cy="320040"/>
           </a:xfrm>
           <a:prstGeom prst="rect">
             <a:avLst/>
@@ -5117,90 +5769,38 @@
           <a:p>
             <a:pPr algn="l"/>
             <a:r>
-              <a:rPr sz="900" b="0" i="0">
+              <a:rPr sz="900" b="1" i="0">
                 <a:solidFill>
                   <a:srgbClr val="B0BEC5"/>
                 </a:solidFill>
                 <a:latin typeface="Calibri"/>
               </a:rPr>
-              <a:t>COPPER PRICE — PEAK</a:t>
-            </a:r>
-          </a:p>
-        </p:txBody>
-      </p:sp>
+              <a:t>CURRENT ACCOUNT BALANCE  (% of GDP)  2015 – 2024</a:t>
+            </a:r>
+          </a:p>
+        </p:txBody>
+      </p:sp>
+      <p:graphicFrame>
+        <p:nvGraphicFramePr>
+          <p:cNvPr id="21" name="Chart 20"/>
+          <p:cNvGraphicFramePr>
+            <a:graphicFrameLocks noGrp="1"/>
+          </p:cNvGraphicFramePr>
+          <p:nvPr/>
+        </p:nvGraphicFramePr>
+        <p:xfrm>
+          <a:off x="6035040" y="1508760"/>
+          <a:ext cx="5943600" cy="4389120"/>
+        </p:xfrm>
+        <a:graphic>
+          <a:graphicData uri="http://schemas.openxmlformats.org/drawingml/2006/chart">
+            <c:chart xmlns:c="http://schemas.openxmlformats.org/drawingml/2006/chart" r:id="rId2"/>
+          </a:graphicData>
+        </a:graphic>
+      </p:graphicFrame>
       <p:sp>
         <p:nvSpPr>
           <p:cNvPr id="22" name="TextBox 21"/>
-          <p:cNvSpPr txBox="1"/>
-          <p:nvPr/>
-        </p:nvSpPr>
-        <p:spPr>
-          <a:xfrm>
-            <a:off x="6858000" y="4041648"/>
-            <a:ext cx="2286000" cy="457200"/>
-          </a:xfrm>
-          <a:prstGeom prst="rect">
-            <a:avLst/>
-          </a:prstGeom>
-          <a:noFill/>
-        </p:spPr>
-        <p:txBody>
-          <a:bodyPr wrap="square">
-            <a:spAutoFit/>
-          </a:bodyPr>
-          <a:lstStyle/>
-          <a:p>
-            <a:pPr algn="l"/>
-            <a:r>
-              <a:rPr sz="2000" b="1" i="0">
-                <a:solidFill>
-                  <a:srgbClr val="E88C00"/>
-                </a:solidFill>
-                <a:latin typeface="Calibri"/>
-              </a:rPr>
-              <a:t>~$10,700 /t</a:t>
-            </a:r>
-          </a:p>
-        </p:txBody>
-      </p:sp>
-      <p:sp>
-        <p:nvSpPr>
-          <p:cNvPr id="23" name="TextBox 22"/>
-          <p:cNvSpPr txBox="1"/>
-          <p:nvPr/>
-        </p:nvSpPr>
-        <p:spPr>
-          <a:xfrm>
-            <a:off x="9144000" y="4114800"/>
-            <a:ext cx="2743200" cy="365760"/>
-          </a:xfrm>
-          <a:prstGeom prst="rect">
-            <a:avLst/>
-          </a:prstGeom>
-          <a:noFill/>
-        </p:spPr>
-        <p:txBody>
-          <a:bodyPr wrap="square">
-            <a:spAutoFit/>
-          </a:bodyPr>
-          <a:lstStyle/>
-          <a:p>
-            <a:pPr algn="l"/>
-            <a:r>
-              <a:rPr sz="1000" b="0" i="0">
-                <a:solidFill>
-                  <a:srgbClr val="B0BEC5"/>
-                </a:solidFill>
-                <a:latin typeface="Calibri"/>
-              </a:rPr>
-              <a:t>May 2021 LME high</a:t>
-            </a:r>
-          </a:p>
-        </p:txBody>
-      </p:sp>
-      <p:sp>
-        <p:nvSpPr>
-          <p:cNvPr id="24" name="TextBox 23"/>
           <p:cNvSpPr txBox="1"/>
           <p:nvPr/>
         </p:nvSpPr>
@@ -5389,7 +5989,7 @@
         <p:spPr>
           <a:xfrm>
             <a:off x="457200" y="640080"/>
-            <a:ext cx="10972800" cy="1005840"/>
+            <a:ext cx="10972800" cy="822960"/>
           </a:xfrm>
           <a:prstGeom prst="rect">
             <a:avLst/>
@@ -5404,7 +6004,7 @@
           <a:p>
             <a:pPr algn="l"/>
             <a:r>
-              <a:rPr sz="2800" b="1">
+              <a:rPr sz="2600" b="1">
                 <a:solidFill>
                   <a:srgbClr val="F5F5F5"/>
                 </a:solidFill>
@@ -5423,7 +6023,7 @@
         </p:nvSpPr>
         <p:spPr>
           <a:xfrm>
-            <a:off x="457200" y="1600200"/>
+            <a:off x="457200" y="1508760"/>
             <a:ext cx="5029200" cy="19050"/>
           </a:xfrm>
           <a:prstGeom prst="rect">
@@ -5466,8 +6066,8 @@
         </p:nvSpPr>
         <p:spPr>
           <a:xfrm>
-            <a:off x="457200" y="1828800"/>
-            <a:ext cx="5669280" cy="3474720"/>
+            <a:off x="457200" y="1645920"/>
+            <a:ext cx="5486400" cy="3200400"/>
           </a:xfrm>
           <a:prstGeom prst="rect">
             <a:avLst/>
@@ -5482,19 +6082,19 @@
           <a:p>
             <a:pPr algn="l"/>
             <a:r>
-              <a:rPr sz="1200" b="0">
+              <a:rPr sz="1100" b="0">
                 <a:solidFill>
                   <a:srgbClr val="F5F5F5"/>
                 </a:solidFill>
                 <a:latin typeface="Calibri"/>
               </a:rPr>
-              <a:t>In November 2023, Zambia finalised its G20 Common Framework restructuring deal — the first successful completion under this framework. Bilateral creditor agreements were implemented through 2024.</a:t>
+              <a:t>In November 2023, Zambia finalised the G20 Common Framework restructuring deal — the first successful completion under this framework.</a:t>
             </a:r>
           </a:p>
           <a:p>
             <a:pPr algn="l"/>
             <a:r>
-              <a:rPr sz="1200" b="0">
+              <a:rPr sz="1100" b="0">
                 <a:solidFill>
                   <a:srgbClr val="F5F5F5"/>
                 </a:solidFill>
@@ -5506,73 +6106,61 @@
           <a:p>
             <a:pPr algn="l"/>
             <a:r>
-              <a:rPr sz="1200" b="0">
-                <a:solidFill>
-                  <a:srgbClr val="B0BEC5"/>
-                </a:solidFill>
-                <a:latin typeface="Calibri"/>
-              </a:rPr>
-              <a:t>The structural impact was immediate and measurable:</a:t>
+              <a:rPr sz="1100" b="0">
+                <a:solidFill>
+                  <a:srgbClr val="2ECC71"/>
+                </a:solidFill>
+                <a:latin typeface="Calibri"/>
+              </a:rPr>
+              <a:t>  •  PPG debt service: 12.5 % → 3 % of exports</a:t>
             </a:r>
           </a:p>
           <a:p>
             <a:pPr algn="l"/>
             <a:r>
-              <a:rPr sz="1200" b="0">
+              <a:rPr sz="1100" b="0">
                 <a:solidFill>
                   <a:srgbClr val="2ECC71"/>
                 </a:solidFill>
                 <a:latin typeface="Calibri"/>
               </a:rPr>
-              <a:t>  •  PPG debt service fell from 12.5 % → 3 % of exports</a:t>
+              <a:t>  •  GDP growth held at 5.2–5.4 % as copper prices cooled</a:t>
             </a:r>
           </a:p>
           <a:p>
             <a:pPr algn="l"/>
             <a:r>
-              <a:rPr sz="1200" b="0">
+              <a:rPr sz="1100" b="0">
                 <a:solidFill>
                   <a:srgbClr val="2ECC71"/>
                 </a:solidFill>
                 <a:latin typeface="Calibri"/>
               </a:rPr>
-              <a:t>  •  GDP growth held at 5.2–5.4 % even as copper prices cooled</a:t>
+              <a:t>  •  FDI hit a decade-high of 9.32 % of GDP in 2024</a:t>
             </a:r>
           </a:p>
           <a:p>
             <a:pPr algn="l"/>
             <a:r>
-              <a:rPr sz="1200" b="0">
-                <a:solidFill>
-                  <a:srgbClr val="2ECC71"/>
-                </a:solidFill>
-                <a:latin typeface="Calibri"/>
-              </a:rPr>
-              <a:t>  •  FDI inflows hit a decade-high of 9.32 % of GDP in 2024</a:t>
+              <a:rPr sz="1100" b="0">
+                <a:solidFill>
+                  <a:srgbClr val="F5F5F5"/>
+                </a:solidFill>
+                <a:latin typeface="Calibri"/>
+              </a:rPr>
+              <a:t/>
             </a:r>
           </a:p>
           <a:p>
             <a:pPr algn="l"/>
             <a:r>
-              <a:rPr sz="1200" b="0">
+              <a:rPr sz="1100" b="1">
                 <a:solidFill>
                   <a:srgbClr val="F5F5F5"/>
                 </a:solidFill>
                 <a:latin typeface="Calibri"/>
               </a:rPr>
-              <a:t/>
-            </a:r>
-          </a:p>
-          <a:p>
-            <a:pPr algn="l"/>
-            <a:r>
-              <a:rPr sz="1200" b="1">
-                <a:solidFill>
-                  <a:srgbClr val="F5F5F5"/>
-                </a:solidFill>
-                <a:latin typeface="Calibri"/>
-              </a:rPr>
-              <a:t>This is the key distinction: copper created fiscal space; restructuring institutionalised it.</a:t>
+              <a:t>Key distinction: copper created fiscal space; restructuring institutionalised it.</a:t>
             </a:r>
           </a:p>
         </p:txBody>
@@ -5585,8 +6173,8 @@
         </p:nvSpPr>
         <p:spPr>
           <a:xfrm>
-            <a:off x="6675120" y="1645920"/>
-            <a:ext cx="5303520" cy="320040"/>
+            <a:off x="457200" y="4754880"/>
+            <a:ext cx="5394960" cy="274320"/>
           </a:xfrm>
           <a:prstGeom prst="rect">
             <a:avLst/>
@@ -5607,7 +6195,7 @@
                 </a:solidFill>
                 <a:latin typeface="Calibri"/>
               </a:rPr>
-              <a:t>BEFORE vs AFTER RESTRUCTURING</a:t>
+              <a:t>BEFORE  →  AFTER RESTRUCTURING</a:t>
             </a:r>
           </a:p>
         </p:txBody>
@@ -5620,8 +6208,8 @@
         </p:nvSpPr>
         <p:spPr>
           <a:xfrm>
-            <a:off x="6675120" y="2057400"/>
-            <a:ext cx="5349240" cy="749808"/>
+            <a:off x="457200" y="5074920"/>
+            <a:ext cx="5349240" cy="384048"/>
           </a:xfrm>
           <a:prstGeom prst="rect">
             <a:avLst/>
@@ -5663,8 +6251,8 @@
         </p:nvSpPr>
         <p:spPr>
           <a:xfrm>
-            <a:off x="6766560" y="2103120"/>
-            <a:ext cx="2103120" cy="320040"/>
+            <a:off x="548640" y="5120640"/>
+            <a:ext cx="2011680" cy="274320"/>
           </a:xfrm>
           <a:prstGeom prst="rect">
             <a:avLst/>
@@ -5679,7 +6267,7 @@
           <a:p>
             <a:pPr algn="l"/>
             <a:r>
-              <a:rPr sz="900" b="0" i="0">
+              <a:rPr sz="800" b="0" i="0">
                 <a:solidFill>
                   <a:srgbClr val="B0BEC5"/>
                 </a:solidFill>
@@ -5698,8 +6286,8 @@
         </p:nvSpPr>
         <p:spPr>
           <a:xfrm>
-            <a:off x="6766560" y="2423160"/>
-            <a:ext cx="1828800" cy="320040"/>
+            <a:off x="2606040" y="5120640"/>
+            <a:ext cx="1097280" cy="274320"/>
           </a:xfrm>
           <a:prstGeom prst="rect">
             <a:avLst/>
@@ -5714,7 +6302,7 @@
           <a:p>
             <a:pPr algn="l"/>
             <a:r>
-              <a:rPr sz="1200" b="1" i="0">
+              <a:rPr sz="1000" b="1" i="0">
                 <a:solidFill>
                   <a:srgbClr val="E74C3C"/>
                 </a:solidFill>
@@ -5733,8 +6321,8 @@
         </p:nvSpPr>
         <p:spPr>
           <a:xfrm>
-            <a:off x="9326880" y="2423160"/>
-            <a:ext cx="2468880" cy="320040"/>
+            <a:off x="3749039" y="5120640"/>
+            <a:ext cx="1920240" cy="274320"/>
           </a:xfrm>
           <a:prstGeom prst="rect">
             <a:avLst/>
@@ -5749,7 +6337,7 @@
           <a:p>
             <a:pPr algn="l"/>
             <a:r>
-              <a:rPr sz="1200" b="1" i="0">
+              <a:rPr sz="1000" b="1" i="0">
                 <a:solidFill>
                   <a:srgbClr val="2ECC71"/>
                 </a:solidFill>
@@ -5768,8 +6356,8 @@
         </p:nvSpPr>
         <p:spPr>
           <a:xfrm>
-            <a:off x="6675120" y="2898648"/>
-            <a:ext cx="5349240" cy="749808"/>
+            <a:off x="457200" y="5513832"/>
+            <a:ext cx="5349240" cy="384048"/>
           </a:xfrm>
           <a:prstGeom prst="rect">
             <a:avLst/>
@@ -5811,8 +6399,8 @@
         </p:nvSpPr>
         <p:spPr>
           <a:xfrm>
-            <a:off x="6766560" y="2944368"/>
-            <a:ext cx="2103120" cy="320040"/>
+            <a:off x="548640" y="5559552"/>
+            <a:ext cx="2011680" cy="274320"/>
           </a:xfrm>
           <a:prstGeom prst="rect">
             <a:avLst/>
@@ -5827,13 +6415,13 @@
           <a:p>
             <a:pPr algn="l"/>
             <a:r>
-              <a:rPr sz="900" b="0" i="0">
+              <a:rPr sz="800" b="0" i="0">
                 <a:solidFill>
                   <a:srgbClr val="B0BEC5"/>
                 </a:solidFill>
                 <a:latin typeface="Calibri"/>
               </a:rPr>
-              <a:t>GDP Growth</a:t>
+              <a:t>FDI Inflows (% GDP)</a:t>
             </a:r>
           </a:p>
         </p:txBody>
@@ -5846,8 +6434,8 @@
         </p:nvSpPr>
         <p:spPr>
           <a:xfrm>
-            <a:off x="6766560" y="3264408"/>
-            <a:ext cx="1828800" cy="320040"/>
+            <a:off x="2606040" y="5559552"/>
+            <a:ext cx="1097280" cy="274320"/>
           </a:xfrm>
           <a:prstGeom prst="rect">
             <a:avLst/>
@@ -5862,13 +6450,13 @@
           <a:p>
             <a:pPr algn="l"/>
             <a:r>
-              <a:rPr sz="1200" b="1" i="0">
+              <a:rPr sz="1000" b="1" i="0">
                 <a:solidFill>
                   <a:srgbClr val="E74C3C"/>
                 </a:solidFill>
                 <a:latin typeface="Calibri"/>
               </a:rPr>
-              <a:t>-2.8 %  (2020)</a:t>
+              <a:t>1.8 %  (2020)</a:t>
             </a:r>
           </a:p>
         </p:txBody>
@@ -5881,8 +6469,8 @@
         </p:nvSpPr>
         <p:spPr>
           <a:xfrm>
-            <a:off x="9326880" y="3264408"/>
-            <a:ext cx="2468880" cy="320040"/>
+            <a:off x="3749039" y="5559552"/>
+            <a:ext cx="1920240" cy="274320"/>
           </a:xfrm>
           <a:prstGeom prst="rect">
             <a:avLst/>
@@ -5897,70 +6485,27 @@
           <a:p>
             <a:pPr algn="l"/>
             <a:r>
-              <a:rPr sz="1200" b="1" i="0">
+              <a:rPr sz="1000" b="1" i="0">
                 <a:solidFill>
                   <a:srgbClr val="2ECC71"/>
                 </a:solidFill>
                 <a:latin typeface="Calibri"/>
               </a:rPr>
-              <a:t>→  5.3 %  (2024)</a:t>
-            </a:r>
-          </a:p>
-        </p:txBody>
-      </p:sp>
-      <p:sp>
-        <p:nvSpPr>
-          <p:cNvPr id="17" name="Rectangle 16"/>
-          <p:cNvSpPr/>
-          <p:nvPr/>
-        </p:nvSpPr>
-        <p:spPr>
-          <a:xfrm>
-            <a:off x="6675120" y="3739896"/>
-            <a:ext cx="5349240" cy="749808"/>
-          </a:xfrm>
-          <a:prstGeom prst="rect">
-            <a:avLst/>
-          </a:prstGeom>
-          <a:solidFill>
-            <a:srgbClr val="1E3A5F"/>
-          </a:solidFill>
-          <a:ln>
-            <a:noFill/>
-          </a:ln>
-        </p:spPr>
-        <p:style>
-          <a:lnRef idx="1">
-            <a:schemeClr val="accent1"/>
-          </a:lnRef>
-          <a:fillRef idx="3">
-            <a:schemeClr val="accent1"/>
-          </a:fillRef>
-          <a:effectRef idx="2">
-            <a:schemeClr val="accent1"/>
-          </a:effectRef>
-          <a:fontRef idx="minor">
-            <a:schemeClr val="lt1"/>
-          </a:fontRef>
-        </p:style>
-        <p:txBody>
-          <a:bodyPr rtlCol="0" anchor="ctr"/>
-          <a:lstStyle/>
-          <a:p>
-            <a:pPr algn="ctr"/>
-          </a:p>
-        </p:txBody>
-      </p:sp>
-      <p:sp>
-        <p:nvSpPr>
-          <p:cNvPr id="18" name="TextBox 17"/>
+              <a:t>→  9.32 %  (2024)</a:t>
+            </a:r>
+          </a:p>
+        </p:txBody>
+      </p:sp>
+      <p:sp>
+        <p:nvSpPr>
+          <p:cNvPr id="17" name="TextBox 16"/>
           <p:cNvSpPr txBox="1"/>
           <p:nvPr/>
         </p:nvSpPr>
         <p:spPr>
           <a:xfrm>
-            <a:off x="6766560" y="3785616"/>
-            <a:ext cx="2103120" cy="320040"/>
+            <a:off x="6035040" y="1188720"/>
+            <a:ext cx="5943600" cy="320040"/>
           </a:xfrm>
           <a:prstGeom prst="rect">
             <a:avLst/>
@@ -5975,27 +6520,27 @@
           <a:p>
             <a:pPr algn="l"/>
             <a:r>
-              <a:rPr sz="900" b="0" i="0">
+              <a:rPr sz="900" b="1" i="0">
                 <a:solidFill>
                   <a:srgbClr val="B0BEC5"/>
                 </a:solidFill>
                 <a:latin typeface="Calibri"/>
               </a:rPr>
-              <a:t>FDI Inflows (% GDP)</a:t>
-            </a:r>
-          </a:p>
-        </p:txBody>
-      </p:sp>
-      <p:sp>
-        <p:nvSpPr>
-          <p:cNvPr id="19" name="TextBox 18"/>
+              <a:t>GDP GROWTH  (% annual)  2015 – 2024</a:t>
+            </a:r>
+          </a:p>
+        </p:txBody>
+      </p:sp>
+      <p:sp>
+        <p:nvSpPr>
+          <p:cNvPr id="18" name="TextBox 17"/>
           <p:cNvSpPr txBox="1"/>
           <p:nvPr/>
         </p:nvSpPr>
         <p:spPr>
           <a:xfrm>
-            <a:off x="6766560" y="4105656"/>
-            <a:ext cx="1828800" cy="320040"/>
+            <a:off x="6035040" y="1481328"/>
+            <a:ext cx="5029200" cy="256032"/>
           </a:xfrm>
           <a:prstGeom prst="rect">
             <a:avLst/>
@@ -6010,203 +6555,38 @@
           <a:p>
             <a:pPr algn="l"/>
             <a:r>
-              <a:rPr sz="1200" b="1" i="0">
-                <a:solidFill>
-                  <a:srgbClr val="E74C3C"/>
-                </a:solidFill>
-                <a:latin typeface="Calibri"/>
-              </a:rPr>
-              <a:t>1.8 %  (2020)</a:t>
-            </a:r>
-          </a:p>
-        </p:txBody>
-      </p:sp>
+              <a:rPr sz="800" b="0" i="0">
+                <a:solidFill>
+                  <a:srgbClr val="B0BEC5"/>
+                </a:solidFill>
+                <a:latin typeface="Calibri"/>
+              </a:rPr>
+              <a:t>Red = contraction  ·  Green = growth post-restructuring</a:t>
+            </a:r>
+          </a:p>
+        </p:txBody>
+      </p:sp>
+      <p:graphicFrame>
+        <p:nvGraphicFramePr>
+          <p:cNvPr id="19" name="Chart 18"/>
+          <p:cNvGraphicFramePr>
+            <a:graphicFrameLocks noGrp="1"/>
+          </p:cNvGraphicFramePr>
+          <p:nvPr/>
+        </p:nvGraphicFramePr>
+        <p:xfrm>
+          <a:off x="6035040" y="1737360"/>
+          <a:ext cx="5943600" cy="4160520"/>
+        </p:xfrm>
+        <a:graphic>
+          <a:graphicData uri="http://schemas.openxmlformats.org/drawingml/2006/chart">
+            <c:chart xmlns:c="http://schemas.openxmlformats.org/drawingml/2006/chart" r:id="rId2"/>
+          </a:graphicData>
+        </a:graphic>
+      </p:graphicFrame>
       <p:sp>
         <p:nvSpPr>
           <p:cNvPr id="20" name="TextBox 19"/>
-          <p:cNvSpPr txBox="1"/>
-          <p:nvPr/>
-        </p:nvSpPr>
-        <p:spPr>
-          <a:xfrm>
-            <a:off x="9326880" y="4105656"/>
-            <a:ext cx="2468880" cy="320040"/>
-          </a:xfrm>
-          <a:prstGeom prst="rect">
-            <a:avLst/>
-          </a:prstGeom>
-          <a:noFill/>
-        </p:spPr>
-        <p:txBody>
-          <a:bodyPr wrap="square">
-            <a:spAutoFit/>
-          </a:bodyPr>
-          <a:lstStyle/>
-          <a:p>
-            <a:pPr algn="l"/>
-            <a:r>
-              <a:rPr sz="1200" b="1" i="0">
-                <a:solidFill>
-                  <a:srgbClr val="2ECC71"/>
-                </a:solidFill>
-                <a:latin typeface="Calibri"/>
-              </a:rPr>
-              <a:t>→  9.32 %  (2024)</a:t>
-            </a:r>
-          </a:p>
-        </p:txBody>
-      </p:sp>
-      <p:sp>
-        <p:nvSpPr>
-          <p:cNvPr id="21" name="Rectangle 20"/>
-          <p:cNvSpPr/>
-          <p:nvPr/>
-        </p:nvSpPr>
-        <p:spPr>
-          <a:xfrm>
-            <a:off x="6675120" y="4581144"/>
-            <a:ext cx="5349240" cy="749808"/>
-          </a:xfrm>
-          <a:prstGeom prst="rect">
-            <a:avLst/>
-          </a:prstGeom>
-          <a:solidFill>
-            <a:srgbClr val="1E3A5F"/>
-          </a:solidFill>
-          <a:ln>
-            <a:noFill/>
-          </a:ln>
-        </p:spPr>
-        <p:style>
-          <a:lnRef idx="1">
-            <a:schemeClr val="accent1"/>
-          </a:lnRef>
-          <a:fillRef idx="3">
-            <a:schemeClr val="accent1"/>
-          </a:fillRef>
-          <a:effectRef idx="2">
-            <a:schemeClr val="accent1"/>
-          </a:effectRef>
-          <a:fontRef idx="minor">
-            <a:schemeClr val="lt1"/>
-          </a:fontRef>
-        </p:style>
-        <p:txBody>
-          <a:bodyPr rtlCol="0" anchor="ctr"/>
-          <a:lstStyle/>
-          <a:p>
-            <a:pPr algn="ctr"/>
-          </a:p>
-        </p:txBody>
-      </p:sp>
-      <p:sp>
-        <p:nvSpPr>
-          <p:cNvPr id="22" name="TextBox 21"/>
-          <p:cNvSpPr txBox="1"/>
-          <p:nvPr/>
-        </p:nvSpPr>
-        <p:spPr>
-          <a:xfrm>
-            <a:off x="6766560" y="4626864"/>
-            <a:ext cx="2103120" cy="320040"/>
-          </a:xfrm>
-          <a:prstGeom prst="rect">
-            <a:avLst/>
-          </a:prstGeom>
-          <a:noFill/>
-        </p:spPr>
-        <p:txBody>
-          <a:bodyPr wrap="square">
-            <a:spAutoFit/>
-          </a:bodyPr>
-          <a:lstStyle/>
-          <a:p>
-            <a:pPr algn="l"/>
-            <a:r>
-              <a:rPr sz="900" b="0" i="0">
-                <a:solidFill>
-                  <a:srgbClr val="B0BEC5"/>
-                </a:solidFill>
-                <a:latin typeface="Calibri"/>
-              </a:rPr>
-              <a:t>Investor Confidence</a:t>
-            </a:r>
-          </a:p>
-        </p:txBody>
-      </p:sp>
-      <p:sp>
-        <p:nvSpPr>
-          <p:cNvPr id="23" name="TextBox 22"/>
-          <p:cNvSpPr txBox="1"/>
-          <p:nvPr/>
-        </p:nvSpPr>
-        <p:spPr>
-          <a:xfrm>
-            <a:off x="6766560" y="4946904"/>
-            <a:ext cx="1828800" cy="320040"/>
-          </a:xfrm>
-          <a:prstGeom prst="rect">
-            <a:avLst/>
-          </a:prstGeom>
-          <a:noFill/>
-        </p:spPr>
-        <p:txBody>
-          <a:bodyPr wrap="square">
-            <a:spAutoFit/>
-          </a:bodyPr>
-          <a:lstStyle/>
-          <a:p>
-            <a:pPr algn="l"/>
-            <a:r>
-              <a:rPr sz="1200" b="1" i="0">
-                <a:solidFill>
-                  <a:srgbClr val="E74C3C"/>
-                </a:solidFill>
-                <a:latin typeface="Calibri"/>
-              </a:rPr>
-              <a:t>Eurobond default</a:t>
-            </a:r>
-          </a:p>
-        </p:txBody>
-      </p:sp>
-      <p:sp>
-        <p:nvSpPr>
-          <p:cNvPr id="24" name="TextBox 23"/>
-          <p:cNvSpPr txBox="1"/>
-          <p:nvPr/>
-        </p:nvSpPr>
-        <p:spPr>
-          <a:xfrm>
-            <a:off x="9326880" y="4946904"/>
-            <a:ext cx="2468880" cy="320040"/>
-          </a:xfrm>
-          <a:prstGeom prst="rect">
-            <a:avLst/>
-          </a:prstGeom>
-          <a:noFill/>
-        </p:spPr>
-        <p:txBody>
-          <a:bodyPr wrap="square">
-            <a:spAutoFit/>
-          </a:bodyPr>
-          <a:lstStyle/>
-          <a:p>
-            <a:pPr algn="l"/>
-            <a:r>
-              <a:rPr sz="1200" b="1" i="0">
-                <a:solidFill>
-                  <a:srgbClr val="2ECC71"/>
-                </a:solidFill>
-                <a:latin typeface="Calibri"/>
-              </a:rPr>
-              <a:t>→  Decade-high FDI</a:t>
-            </a:r>
-          </a:p>
-        </p:txBody>
-      </p:sp>
-      <p:sp>
-        <p:nvSpPr>
-          <p:cNvPr id="25" name="TextBox 24"/>
           <p:cNvSpPr txBox="1"/>
           <p:nvPr/>
         </p:nvSpPr>
@@ -6395,7 +6775,7 @@
         <p:spPr>
           <a:xfrm>
             <a:off x="457200" y="640080"/>
-            <a:ext cx="10972800" cy="1005840"/>
+            <a:ext cx="10972800" cy="822960"/>
           </a:xfrm>
           <a:prstGeom prst="rect">
             <a:avLst/>
@@ -6410,13 +6790,13 @@
           <a:p>
             <a:pPr algn="l"/>
             <a:r>
-              <a:rPr sz="2800" b="1">
+              <a:rPr sz="2600" b="1">
                 <a:solidFill>
                   <a:srgbClr val="F5F5F5"/>
                 </a:solidFill>
                 <a:latin typeface="Calibri"/>
               </a:rPr>
-              <a:t>The Numbers Confirm the Verdict</a:t>
+              <a:t>FDI &amp; Debt Service: The Recovery in Numbers</a:t>
             </a:r>
           </a:p>
         </p:txBody>
@@ -6429,7 +6809,7 @@
         </p:nvSpPr>
         <p:spPr>
           <a:xfrm>
-            <a:off x="457200" y="1600200"/>
+            <a:off x="457200" y="1508760"/>
             <a:ext cx="11430000" cy="19050"/>
           </a:xfrm>
           <a:prstGeom prst="rect">
@@ -6466,57 +6846,14 @@
       </p:sp>
       <p:sp>
         <p:nvSpPr>
-          <p:cNvPr id="7" name="Rectangle 6"/>
-          <p:cNvSpPr/>
-          <p:nvPr/>
-        </p:nvSpPr>
-        <p:spPr>
-          <a:xfrm>
-            <a:off x="457200" y="1874519"/>
-            <a:ext cx="3749039" cy="1417320"/>
-          </a:xfrm>
-          <a:prstGeom prst="rect">
-            <a:avLst/>
-          </a:prstGeom>
-          <a:solidFill>
-            <a:srgbClr val="1E3A5F"/>
-          </a:solidFill>
-          <a:ln>
-            <a:noFill/>
-          </a:ln>
-        </p:spPr>
-        <p:style>
-          <a:lnRef idx="1">
-            <a:schemeClr val="accent1"/>
-          </a:lnRef>
-          <a:fillRef idx="3">
-            <a:schemeClr val="accent1"/>
-          </a:fillRef>
-          <a:effectRef idx="2">
-            <a:schemeClr val="accent1"/>
-          </a:effectRef>
-          <a:fontRef idx="minor">
-            <a:schemeClr val="lt1"/>
-          </a:fontRef>
-        </p:style>
-        <p:txBody>
-          <a:bodyPr rtlCol="0" anchor="ctr"/>
-          <a:lstStyle/>
-          <a:p>
-            <a:pPr algn="ctr"/>
-          </a:p>
-        </p:txBody>
-      </p:sp>
-      <p:sp>
-        <p:nvSpPr>
-          <p:cNvPr id="8" name="TextBox 7"/>
+          <p:cNvPr id="7" name="TextBox 6"/>
           <p:cNvSpPr txBox="1"/>
           <p:nvPr/>
         </p:nvSpPr>
         <p:spPr>
           <a:xfrm>
-            <a:off x="548640" y="1984247"/>
-            <a:ext cx="3566159" cy="365760"/>
+            <a:off x="457200" y="1691640"/>
+            <a:ext cx="5669280" cy="292608"/>
           </a:xfrm>
           <a:prstGeom prst="rect">
             <a:avLst/>
@@ -6529,19 +6866,37 @@
           </a:bodyPr>
           <a:lstStyle/>
           <a:p>
-            <a:pPr algn="ctr"/>
-            <a:r>
-              <a:rPr sz="900" b="0" i="0">
+            <a:pPr algn="l"/>
+            <a:r>
+              <a:rPr sz="900" b="1" i="0">
                 <a:solidFill>
                   <a:srgbClr val="B0BEC5"/>
                 </a:solidFill>
                 <a:latin typeface="Calibri"/>
               </a:rPr>
-              <a:t>External Debt Peak</a:t>
-            </a:r>
-          </a:p>
-        </p:txBody>
-      </p:sp>
+              <a:t>FDI NET INFLOWS  (% of GDP)  2015 – 2024</a:t>
+            </a:r>
+          </a:p>
+        </p:txBody>
+      </p:sp>
+      <p:graphicFrame>
+        <p:nvGraphicFramePr>
+          <p:cNvPr id="8" name="Chart 7"/>
+          <p:cNvGraphicFramePr>
+            <a:graphicFrameLocks noGrp="1"/>
+          </p:cNvGraphicFramePr>
+          <p:nvPr/>
+        </p:nvGraphicFramePr>
+        <p:xfrm>
+          <a:off x="457200" y="1993392"/>
+          <a:ext cx="5669280" cy="4160520"/>
+        </p:xfrm>
+        <a:graphic>
+          <a:graphicData uri="http://schemas.openxmlformats.org/drawingml/2006/chart">
+            <c:chart xmlns:c="http://schemas.openxmlformats.org/drawingml/2006/chart" r:id="rId2"/>
+          </a:graphicData>
+        </a:graphic>
+      </p:graphicFrame>
       <p:sp>
         <p:nvSpPr>
           <p:cNvPr id="9" name="TextBox 8"/>
@@ -6550,8 +6905,8 @@
         </p:nvSpPr>
         <p:spPr>
           <a:xfrm>
-            <a:off x="502920" y="2313431"/>
-            <a:ext cx="3657599" cy="502920"/>
+            <a:off x="6492240" y="1691640"/>
+            <a:ext cx="5486400" cy="292608"/>
           </a:xfrm>
           <a:prstGeom prst="rect">
             <a:avLst/>
@@ -6564,29 +6919,47 @@
           </a:bodyPr>
           <a:lstStyle/>
           <a:p>
-            <a:pPr algn="ctr"/>
-            <a:r>
-              <a:rPr sz="2200" b="1" i="0">
-                <a:solidFill>
-                  <a:srgbClr val="E74C3C"/>
-                </a:solidFill>
-                <a:latin typeface="Calibri"/>
-              </a:rPr>
-              <a:t>$29.1 B</a:t>
-            </a:r>
-          </a:p>
-        </p:txBody>
-      </p:sp>
-      <p:sp>
-        <p:nvSpPr>
-          <p:cNvPr id="10" name="TextBox 9"/>
+            <a:pPr algn="l"/>
+            <a:r>
+              <a:rPr sz="900" b="1" i="0">
+                <a:solidFill>
+                  <a:srgbClr val="B0BEC5"/>
+                </a:solidFill>
+                <a:latin typeface="Calibri"/>
+              </a:rPr>
+              <a:t>PPG DEBT SERVICE  (% of exports)  BEFORE vs AFTER DEAL</a:t>
+            </a:r>
+          </a:p>
+        </p:txBody>
+      </p:sp>
+      <p:graphicFrame>
+        <p:nvGraphicFramePr>
+          <p:cNvPr id="10" name="Chart 9"/>
+          <p:cNvGraphicFramePr>
+            <a:graphicFrameLocks noGrp="1"/>
+          </p:cNvGraphicFramePr>
+          <p:nvPr/>
+        </p:nvGraphicFramePr>
+        <p:xfrm>
+          <a:off x="6492240" y="1993392"/>
+          <a:ext cx="5486400" cy="4160520"/>
+        </p:xfrm>
+        <a:graphic>
+          <a:graphicData uri="http://schemas.openxmlformats.org/drawingml/2006/chart">
+            <c:chart xmlns:c="http://schemas.openxmlformats.org/drawingml/2006/chart" r:id="rId3"/>
+          </a:graphicData>
+        </a:graphic>
+      </p:graphicFrame>
+      <p:sp>
+        <p:nvSpPr>
+          <p:cNvPr id="11" name="TextBox 10"/>
           <p:cNvSpPr txBox="1"/>
           <p:nvPr/>
         </p:nvSpPr>
         <p:spPr>
           <a:xfrm>
-            <a:off x="548640" y="2788919"/>
-            <a:ext cx="3566159" cy="365760"/>
+            <a:off x="457200" y="6236208"/>
+            <a:ext cx="10972800" cy="365760"/>
           </a:xfrm>
           <a:prstGeom prst="rect">
             <a:avLst/>
@@ -6599,7 +6972,7 @@
           </a:bodyPr>
           <a:lstStyle/>
           <a:p>
-            <a:pPr algn="ctr"/>
+            <a:pPr algn="l"/>
             <a:r>
               <a:rPr sz="800" b="0" i="0">
                 <a:solidFill>
@@ -6607,790 +6980,14 @@
                 </a:solidFill>
                 <a:latin typeface="Calibri"/>
               </a:rPr>
-              <a:t>2019  (tripled in 4 yrs)</a:t>
-            </a:r>
-          </a:p>
-        </p:txBody>
-      </p:sp>
-      <p:sp>
-        <p:nvSpPr>
-          <p:cNvPr id="11" name="Rectangle 10"/>
-          <p:cNvSpPr/>
-          <p:nvPr/>
-        </p:nvSpPr>
-        <p:spPr>
-          <a:xfrm>
-            <a:off x="4315967" y="1874519"/>
-            <a:ext cx="3749039" cy="1417320"/>
-          </a:xfrm>
-          <a:prstGeom prst="rect">
-            <a:avLst/>
-          </a:prstGeom>
-          <a:solidFill>
-            <a:srgbClr val="1E3A5F"/>
-          </a:solidFill>
-          <a:ln>
-            <a:noFill/>
-          </a:ln>
-        </p:spPr>
-        <p:style>
-          <a:lnRef idx="1">
-            <a:schemeClr val="accent1"/>
-          </a:lnRef>
-          <a:fillRef idx="3">
-            <a:schemeClr val="accent1"/>
-          </a:fillRef>
-          <a:effectRef idx="2">
-            <a:schemeClr val="accent1"/>
-          </a:effectRef>
-          <a:fontRef idx="minor">
-            <a:schemeClr val="lt1"/>
-          </a:fontRef>
-        </p:style>
-        <p:txBody>
-          <a:bodyPr rtlCol="0" anchor="ctr"/>
-          <a:lstStyle/>
-          <a:p>
-            <a:pPr algn="ctr"/>
+              <a:t>Sources: World Bank WDI · IMF WEO · Bank of Zambia · Ministry of Finance — Report on the Economy 2025</a:t>
+            </a:r>
           </a:p>
         </p:txBody>
       </p:sp>
       <p:sp>
         <p:nvSpPr>
           <p:cNvPr id="12" name="TextBox 11"/>
-          <p:cNvSpPr txBox="1"/>
-          <p:nvPr/>
-        </p:nvSpPr>
-        <p:spPr>
-          <a:xfrm>
-            <a:off x="4407407" y="1984247"/>
-            <a:ext cx="3566159" cy="365760"/>
-          </a:xfrm>
-          <a:prstGeom prst="rect">
-            <a:avLst/>
-          </a:prstGeom>
-          <a:noFill/>
-        </p:spPr>
-        <p:txBody>
-          <a:bodyPr wrap="square">
-            <a:spAutoFit/>
-          </a:bodyPr>
-          <a:lstStyle/>
-          <a:p>
-            <a:pPr algn="ctr"/>
-            <a:r>
-              <a:rPr sz="900" b="0" i="0">
-                <a:solidFill>
-                  <a:srgbClr val="B0BEC5"/>
-                </a:solidFill>
-                <a:latin typeface="Calibri"/>
-              </a:rPr>
-              <a:t>Current Account Swing</a:t>
-            </a:r>
-          </a:p>
-        </p:txBody>
-      </p:sp>
-      <p:sp>
-        <p:nvSpPr>
-          <p:cNvPr id="13" name="TextBox 12"/>
-          <p:cNvSpPr txBox="1"/>
-          <p:nvPr/>
-        </p:nvSpPr>
-        <p:spPr>
-          <a:xfrm>
-            <a:off x="4361687" y="2313431"/>
-            <a:ext cx="3657599" cy="502920"/>
-          </a:xfrm>
-          <a:prstGeom prst="rect">
-            <a:avLst/>
-          </a:prstGeom>
-          <a:noFill/>
-        </p:spPr>
-        <p:txBody>
-          <a:bodyPr wrap="square">
-            <a:spAutoFit/>
-          </a:bodyPr>
-          <a:lstStyle/>
-          <a:p>
-            <a:pPr algn="ctr"/>
-            <a:r>
-              <a:rPr sz="2200" b="1" i="0">
-                <a:solidFill>
-                  <a:srgbClr val="2ECC71"/>
-                </a:solidFill>
-                <a:latin typeface="Calibri"/>
-              </a:rPr>
-              <a:t>+15.5 pp</a:t>
-            </a:r>
-          </a:p>
-        </p:txBody>
-      </p:sp>
-      <p:sp>
-        <p:nvSpPr>
-          <p:cNvPr id="14" name="TextBox 13"/>
-          <p:cNvSpPr txBox="1"/>
-          <p:nvPr/>
-        </p:nvSpPr>
-        <p:spPr>
-          <a:xfrm>
-            <a:off x="4407407" y="2788919"/>
-            <a:ext cx="3566159" cy="365760"/>
-          </a:xfrm>
-          <a:prstGeom prst="rect">
-            <a:avLst/>
-          </a:prstGeom>
-          <a:noFill/>
-        </p:spPr>
-        <p:txBody>
-          <a:bodyPr wrap="square">
-            <a:spAutoFit/>
-          </a:bodyPr>
-          <a:lstStyle/>
-          <a:p>
-            <a:pPr algn="ctr"/>
-            <a:r>
-              <a:rPr sz="800" b="0" i="0">
-                <a:solidFill>
-                  <a:srgbClr val="B0BEC5"/>
-                </a:solidFill>
-                <a:latin typeface="Calibri"/>
-              </a:rPr>
-              <a:t>from -3.6% to +11.9% GDP</a:t>
-            </a:r>
-          </a:p>
-        </p:txBody>
-      </p:sp>
-      <p:sp>
-        <p:nvSpPr>
-          <p:cNvPr id="15" name="Rectangle 14"/>
-          <p:cNvSpPr/>
-          <p:nvPr/>
-        </p:nvSpPr>
-        <p:spPr>
-          <a:xfrm>
-            <a:off x="8174734" y="1874519"/>
-            <a:ext cx="3749039" cy="1417320"/>
-          </a:xfrm>
-          <a:prstGeom prst="rect">
-            <a:avLst/>
-          </a:prstGeom>
-          <a:solidFill>
-            <a:srgbClr val="1E3A5F"/>
-          </a:solidFill>
-          <a:ln>
-            <a:noFill/>
-          </a:ln>
-        </p:spPr>
-        <p:style>
-          <a:lnRef idx="1">
-            <a:schemeClr val="accent1"/>
-          </a:lnRef>
-          <a:fillRef idx="3">
-            <a:schemeClr val="accent1"/>
-          </a:fillRef>
-          <a:effectRef idx="2">
-            <a:schemeClr val="accent1"/>
-          </a:effectRef>
-          <a:fontRef idx="minor">
-            <a:schemeClr val="lt1"/>
-          </a:fontRef>
-        </p:style>
-        <p:txBody>
-          <a:bodyPr rtlCol="0" anchor="ctr"/>
-          <a:lstStyle/>
-          <a:p>
-            <a:pPr algn="ctr"/>
-          </a:p>
-        </p:txBody>
-      </p:sp>
-      <p:sp>
-        <p:nvSpPr>
-          <p:cNvPr id="16" name="TextBox 15"/>
-          <p:cNvSpPr txBox="1"/>
-          <p:nvPr/>
-        </p:nvSpPr>
-        <p:spPr>
-          <a:xfrm>
-            <a:off x="8266174" y="1984247"/>
-            <a:ext cx="3566159" cy="365760"/>
-          </a:xfrm>
-          <a:prstGeom prst="rect">
-            <a:avLst/>
-          </a:prstGeom>
-          <a:noFill/>
-        </p:spPr>
-        <p:txBody>
-          <a:bodyPr wrap="square">
-            <a:spAutoFit/>
-          </a:bodyPr>
-          <a:lstStyle/>
-          <a:p>
-            <a:pPr algn="ctr"/>
-            <a:r>
-              <a:rPr sz="900" b="0" i="0">
-                <a:solidFill>
-                  <a:srgbClr val="B0BEC5"/>
-                </a:solidFill>
-                <a:latin typeface="Calibri"/>
-              </a:rPr>
-              <a:t>IMF ECF Approved</a:t>
-            </a:r>
-          </a:p>
-        </p:txBody>
-      </p:sp>
-      <p:sp>
-        <p:nvSpPr>
-          <p:cNvPr id="17" name="TextBox 16"/>
-          <p:cNvSpPr txBox="1"/>
-          <p:nvPr/>
-        </p:nvSpPr>
-        <p:spPr>
-          <a:xfrm>
-            <a:off x="8220454" y="2313431"/>
-            <a:ext cx="3657599" cy="502920"/>
-          </a:xfrm>
-          <a:prstGeom prst="rect">
-            <a:avLst/>
-          </a:prstGeom>
-          <a:noFill/>
-        </p:spPr>
-        <p:txBody>
-          <a:bodyPr wrap="square">
-            <a:spAutoFit/>
-          </a:bodyPr>
-          <a:lstStyle/>
-          <a:p>
-            <a:pPr algn="ctr"/>
-            <a:r>
-              <a:rPr sz="2200" b="1" i="0">
-                <a:solidFill>
-                  <a:srgbClr val="E88C00"/>
-                </a:solidFill>
-                <a:latin typeface="Calibri"/>
-              </a:rPr>
-              <a:t>$1.3 B</a:t>
-            </a:r>
-          </a:p>
-        </p:txBody>
-      </p:sp>
-      <p:sp>
-        <p:nvSpPr>
-          <p:cNvPr id="18" name="TextBox 17"/>
-          <p:cNvSpPr txBox="1"/>
-          <p:nvPr/>
-        </p:nvSpPr>
-        <p:spPr>
-          <a:xfrm>
-            <a:off x="8266174" y="2788919"/>
-            <a:ext cx="3566159" cy="365760"/>
-          </a:xfrm>
-          <a:prstGeom prst="rect">
-            <a:avLst/>
-          </a:prstGeom>
-          <a:noFill/>
-        </p:spPr>
-        <p:txBody>
-          <a:bodyPr wrap="square">
-            <a:spAutoFit/>
-          </a:bodyPr>
-          <a:lstStyle/>
-          <a:p>
-            <a:pPr algn="ctr"/>
-            <a:r>
-              <a:rPr sz="800" b="0" i="0">
-                <a:solidFill>
-                  <a:srgbClr val="B0BEC5"/>
-                </a:solidFill>
-                <a:latin typeface="Calibri"/>
-              </a:rPr>
-              <a:t>2022 facility</a:t>
-            </a:r>
-          </a:p>
-        </p:txBody>
-      </p:sp>
-      <p:sp>
-        <p:nvSpPr>
-          <p:cNvPr id="19" name="Rectangle 18"/>
-          <p:cNvSpPr/>
-          <p:nvPr/>
-        </p:nvSpPr>
-        <p:spPr>
-          <a:xfrm>
-            <a:off x="457200" y="3566159"/>
-            <a:ext cx="3749039" cy="1417320"/>
-          </a:xfrm>
-          <a:prstGeom prst="rect">
-            <a:avLst/>
-          </a:prstGeom>
-          <a:solidFill>
-            <a:srgbClr val="1E3A5F"/>
-          </a:solidFill>
-          <a:ln>
-            <a:noFill/>
-          </a:ln>
-        </p:spPr>
-        <p:style>
-          <a:lnRef idx="1">
-            <a:schemeClr val="accent1"/>
-          </a:lnRef>
-          <a:fillRef idx="3">
-            <a:schemeClr val="accent1"/>
-          </a:fillRef>
-          <a:effectRef idx="2">
-            <a:schemeClr val="accent1"/>
-          </a:effectRef>
-          <a:fontRef idx="minor">
-            <a:schemeClr val="lt1"/>
-          </a:fontRef>
-        </p:style>
-        <p:txBody>
-          <a:bodyPr rtlCol="0" anchor="ctr"/>
-          <a:lstStyle/>
-          <a:p>
-            <a:pPr algn="ctr"/>
-          </a:p>
-        </p:txBody>
-      </p:sp>
-      <p:sp>
-        <p:nvSpPr>
-          <p:cNvPr id="20" name="TextBox 19"/>
-          <p:cNvSpPr txBox="1"/>
-          <p:nvPr/>
-        </p:nvSpPr>
-        <p:spPr>
-          <a:xfrm>
-            <a:off x="548640" y="3675887"/>
-            <a:ext cx="3566159" cy="365760"/>
-          </a:xfrm>
-          <a:prstGeom prst="rect">
-            <a:avLst/>
-          </a:prstGeom>
-          <a:noFill/>
-        </p:spPr>
-        <p:txBody>
-          <a:bodyPr wrap="square">
-            <a:spAutoFit/>
-          </a:bodyPr>
-          <a:lstStyle/>
-          <a:p>
-            <a:pPr algn="ctr"/>
-            <a:r>
-              <a:rPr sz="900" b="0" i="0">
-                <a:solidFill>
-                  <a:srgbClr val="B0BEC5"/>
-                </a:solidFill>
-                <a:latin typeface="Calibri"/>
-              </a:rPr>
-              <a:t>PPG Debt Service
-(post-deal)</a:t>
-            </a:r>
-          </a:p>
-        </p:txBody>
-      </p:sp>
-      <p:sp>
-        <p:nvSpPr>
-          <p:cNvPr id="21" name="TextBox 20"/>
-          <p:cNvSpPr txBox="1"/>
-          <p:nvPr/>
-        </p:nvSpPr>
-        <p:spPr>
-          <a:xfrm>
-            <a:off x="502920" y="4005071"/>
-            <a:ext cx="3657599" cy="502920"/>
-          </a:xfrm>
-          <a:prstGeom prst="rect">
-            <a:avLst/>
-          </a:prstGeom>
-          <a:noFill/>
-        </p:spPr>
-        <p:txBody>
-          <a:bodyPr wrap="square">
-            <a:spAutoFit/>
-          </a:bodyPr>
-          <a:lstStyle/>
-          <a:p>
-            <a:pPr algn="ctr"/>
-            <a:r>
-              <a:rPr sz="2200" b="1" i="0">
-                <a:solidFill>
-                  <a:srgbClr val="2ECC71"/>
-                </a:solidFill>
-                <a:latin typeface="Calibri"/>
-              </a:rPr>
-              <a:t>3.0 %</a:t>
-            </a:r>
-          </a:p>
-        </p:txBody>
-      </p:sp>
-      <p:sp>
-        <p:nvSpPr>
-          <p:cNvPr id="22" name="TextBox 21"/>
-          <p:cNvSpPr txBox="1"/>
-          <p:nvPr/>
-        </p:nvSpPr>
-        <p:spPr>
-          <a:xfrm>
-            <a:off x="548640" y="4480559"/>
-            <a:ext cx="3566159" cy="365760"/>
-          </a:xfrm>
-          <a:prstGeom prst="rect">
-            <a:avLst/>
-          </a:prstGeom>
-          <a:noFill/>
-        </p:spPr>
-        <p:txBody>
-          <a:bodyPr wrap="square">
-            <a:spAutoFit/>
-          </a:bodyPr>
-          <a:lstStyle/>
-          <a:p>
-            <a:pPr algn="ctr"/>
-            <a:r>
-              <a:rPr sz="800" b="0" i="0">
-                <a:solidFill>
-                  <a:srgbClr val="B0BEC5"/>
-                </a:solidFill>
-                <a:latin typeface="Calibri"/>
-              </a:rPr>
-              <a:t>down from 12.5% of exports</a:t>
-            </a:r>
-          </a:p>
-        </p:txBody>
-      </p:sp>
-      <p:sp>
-        <p:nvSpPr>
-          <p:cNvPr id="23" name="Rectangle 22"/>
-          <p:cNvSpPr/>
-          <p:nvPr/>
-        </p:nvSpPr>
-        <p:spPr>
-          <a:xfrm>
-            <a:off x="4315967" y="3566159"/>
-            <a:ext cx="3749039" cy="1417320"/>
-          </a:xfrm>
-          <a:prstGeom prst="rect">
-            <a:avLst/>
-          </a:prstGeom>
-          <a:solidFill>
-            <a:srgbClr val="1E3A5F"/>
-          </a:solidFill>
-          <a:ln>
-            <a:noFill/>
-          </a:ln>
-        </p:spPr>
-        <p:style>
-          <a:lnRef idx="1">
-            <a:schemeClr val="accent1"/>
-          </a:lnRef>
-          <a:fillRef idx="3">
-            <a:schemeClr val="accent1"/>
-          </a:fillRef>
-          <a:effectRef idx="2">
-            <a:schemeClr val="accent1"/>
-          </a:effectRef>
-          <a:fontRef idx="minor">
-            <a:schemeClr val="lt1"/>
-          </a:fontRef>
-        </p:style>
-        <p:txBody>
-          <a:bodyPr rtlCol="0" anchor="ctr"/>
-          <a:lstStyle/>
-          <a:p>
-            <a:pPr algn="ctr"/>
-          </a:p>
-        </p:txBody>
-      </p:sp>
-      <p:sp>
-        <p:nvSpPr>
-          <p:cNvPr id="24" name="TextBox 23"/>
-          <p:cNvSpPr txBox="1"/>
-          <p:nvPr/>
-        </p:nvSpPr>
-        <p:spPr>
-          <a:xfrm>
-            <a:off x="4407407" y="3675887"/>
-            <a:ext cx="3566159" cy="365760"/>
-          </a:xfrm>
-          <a:prstGeom prst="rect">
-            <a:avLst/>
-          </a:prstGeom>
-          <a:noFill/>
-        </p:spPr>
-        <p:txBody>
-          <a:bodyPr wrap="square">
-            <a:spAutoFit/>
-          </a:bodyPr>
-          <a:lstStyle/>
-          <a:p>
-            <a:pPr algn="ctr"/>
-            <a:r>
-              <a:rPr sz="900" b="0" i="0">
-                <a:solidFill>
-                  <a:srgbClr val="B0BEC5"/>
-                </a:solidFill>
-                <a:latin typeface="Calibri"/>
-              </a:rPr>
-              <a:t>GDP Growth (2024)</a:t>
-            </a:r>
-          </a:p>
-        </p:txBody>
-      </p:sp>
-      <p:sp>
-        <p:nvSpPr>
-          <p:cNvPr id="25" name="TextBox 24"/>
-          <p:cNvSpPr txBox="1"/>
-          <p:nvPr/>
-        </p:nvSpPr>
-        <p:spPr>
-          <a:xfrm>
-            <a:off x="4361687" y="4005071"/>
-            <a:ext cx="3657599" cy="502920"/>
-          </a:xfrm>
-          <a:prstGeom prst="rect">
-            <a:avLst/>
-          </a:prstGeom>
-          <a:noFill/>
-        </p:spPr>
-        <p:txBody>
-          <a:bodyPr wrap="square">
-            <a:spAutoFit/>
-          </a:bodyPr>
-          <a:lstStyle/>
-          <a:p>
-            <a:pPr algn="ctr"/>
-            <a:r>
-              <a:rPr sz="2200" b="1" i="0">
-                <a:solidFill>
-                  <a:srgbClr val="2ECC71"/>
-                </a:solidFill>
-                <a:latin typeface="Calibri"/>
-              </a:rPr>
-              <a:t>5.3 %</a:t>
-            </a:r>
-          </a:p>
-        </p:txBody>
-      </p:sp>
-      <p:sp>
-        <p:nvSpPr>
-          <p:cNvPr id="26" name="TextBox 25"/>
-          <p:cNvSpPr txBox="1"/>
-          <p:nvPr/>
-        </p:nvSpPr>
-        <p:spPr>
-          <a:xfrm>
-            <a:off x="4407407" y="4480559"/>
-            <a:ext cx="3566159" cy="365760"/>
-          </a:xfrm>
-          <a:prstGeom prst="rect">
-            <a:avLst/>
-          </a:prstGeom>
-          <a:noFill/>
-        </p:spPr>
-        <p:txBody>
-          <a:bodyPr wrap="square">
-            <a:spAutoFit/>
-          </a:bodyPr>
-          <a:lstStyle/>
-          <a:p>
-            <a:pPr algn="ctr"/>
-            <a:r>
-              <a:rPr sz="800" b="0" i="0">
-                <a:solidFill>
-                  <a:srgbClr val="B0BEC5"/>
-                </a:solidFill>
-                <a:latin typeface="Calibri"/>
-              </a:rPr>
-              <a:t>sustained as Cu prices cooled</a:t>
-            </a:r>
-          </a:p>
-        </p:txBody>
-      </p:sp>
-      <p:sp>
-        <p:nvSpPr>
-          <p:cNvPr id="27" name="Rectangle 26"/>
-          <p:cNvSpPr/>
-          <p:nvPr/>
-        </p:nvSpPr>
-        <p:spPr>
-          <a:xfrm>
-            <a:off x="8174734" y="3566159"/>
-            <a:ext cx="3749039" cy="1417320"/>
-          </a:xfrm>
-          <a:prstGeom prst="rect">
-            <a:avLst/>
-          </a:prstGeom>
-          <a:solidFill>
-            <a:srgbClr val="1E3A5F"/>
-          </a:solidFill>
-          <a:ln>
-            <a:noFill/>
-          </a:ln>
-        </p:spPr>
-        <p:style>
-          <a:lnRef idx="1">
-            <a:schemeClr val="accent1"/>
-          </a:lnRef>
-          <a:fillRef idx="3">
-            <a:schemeClr val="accent1"/>
-          </a:fillRef>
-          <a:effectRef idx="2">
-            <a:schemeClr val="accent1"/>
-          </a:effectRef>
-          <a:fontRef idx="minor">
-            <a:schemeClr val="lt1"/>
-          </a:fontRef>
-        </p:style>
-        <p:txBody>
-          <a:bodyPr rtlCol="0" anchor="ctr"/>
-          <a:lstStyle/>
-          <a:p>
-            <a:pPr algn="ctr"/>
-          </a:p>
-        </p:txBody>
-      </p:sp>
-      <p:sp>
-        <p:nvSpPr>
-          <p:cNvPr id="28" name="TextBox 27"/>
-          <p:cNvSpPr txBox="1"/>
-          <p:nvPr/>
-        </p:nvSpPr>
-        <p:spPr>
-          <a:xfrm>
-            <a:off x="8266174" y="3675887"/>
-            <a:ext cx="3566159" cy="365760"/>
-          </a:xfrm>
-          <a:prstGeom prst="rect">
-            <a:avLst/>
-          </a:prstGeom>
-          <a:noFill/>
-        </p:spPr>
-        <p:txBody>
-          <a:bodyPr wrap="square">
-            <a:spAutoFit/>
-          </a:bodyPr>
-          <a:lstStyle/>
-          <a:p>
-            <a:pPr algn="ctr"/>
-            <a:r>
-              <a:rPr sz="900" b="0" i="0">
-                <a:solidFill>
-                  <a:srgbClr val="B0BEC5"/>
-                </a:solidFill>
-                <a:latin typeface="Calibri"/>
-              </a:rPr>
-              <a:t>FDI Inflows (2024)</a:t>
-            </a:r>
-          </a:p>
-        </p:txBody>
-      </p:sp>
-      <p:sp>
-        <p:nvSpPr>
-          <p:cNvPr id="29" name="TextBox 28"/>
-          <p:cNvSpPr txBox="1"/>
-          <p:nvPr/>
-        </p:nvSpPr>
-        <p:spPr>
-          <a:xfrm>
-            <a:off x="8220454" y="4005071"/>
-            <a:ext cx="3657599" cy="502920"/>
-          </a:xfrm>
-          <a:prstGeom prst="rect">
-            <a:avLst/>
-          </a:prstGeom>
-          <a:noFill/>
-        </p:spPr>
-        <p:txBody>
-          <a:bodyPr wrap="square">
-            <a:spAutoFit/>
-          </a:bodyPr>
-          <a:lstStyle/>
-          <a:p>
-            <a:pPr algn="ctr"/>
-            <a:r>
-              <a:rPr sz="2200" b="1" i="0">
-                <a:solidFill>
-                  <a:srgbClr val="E88C00"/>
-                </a:solidFill>
-                <a:latin typeface="Calibri"/>
-              </a:rPr>
-              <a:t>9.32 %</a:t>
-            </a:r>
-          </a:p>
-        </p:txBody>
-      </p:sp>
-      <p:sp>
-        <p:nvSpPr>
-          <p:cNvPr id="30" name="TextBox 29"/>
-          <p:cNvSpPr txBox="1"/>
-          <p:nvPr/>
-        </p:nvSpPr>
-        <p:spPr>
-          <a:xfrm>
-            <a:off x="8266174" y="4480559"/>
-            <a:ext cx="3566159" cy="365760"/>
-          </a:xfrm>
-          <a:prstGeom prst="rect">
-            <a:avLst/>
-          </a:prstGeom>
-          <a:noFill/>
-        </p:spPr>
-        <p:txBody>
-          <a:bodyPr wrap="square">
-            <a:spAutoFit/>
-          </a:bodyPr>
-          <a:lstStyle/>
-          <a:p>
-            <a:pPr algn="ctr"/>
-            <a:r>
-              <a:rPr sz="800" b="0" i="0">
-                <a:solidFill>
-                  <a:srgbClr val="B0BEC5"/>
-                </a:solidFill>
-                <a:latin typeface="Calibri"/>
-              </a:rPr>
-              <a:t>decade high, % of GDP</a:t>
-            </a:r>
-          </a:p>
-        </p:txBody>
-      </p:sp>
-      <p:sp>
-        <p:nvSpPr>
-          <p:cNvPr id="31" name="TextBox 30"/>
-          <p:cNvSpPr txBox="1"/>
-          <p:nvPr/>
-        </p:nvSpPr>
-        <p:spPr>
-          <a:xfrm>
-            <a:off x="457200" y="5989320"/>
-            <a:ext cx="10972800" cy="502920"/>
-          </a:xfrm>
-          <a:prstGeom prst="rect">
-            <a:avLst/>
-          </a:prstGeom>
-          <a:noFill/>
-        </p:spPr>
-        <p:txBody>
-          <a:bodyPr wrap="square">
-            <a:spAutoFit/>
-          </a:bodyPr>
-          <a:lstStyle/>
-          <a:p>
-            <a:pPr algn="l"/>
-            <a:r>
-              <a:rPr sz="800" b="0" i="0">
-                <a:solidFill>
-                  <a:srgbClr val="B0BEC5"/>
-                </a:solidFill>
-                <a:latin typeface="Calibri"/>
-              </a:rPr>
-              <a:t>Sources: World Bank WDI · IMF World Economic Outlook · Bank of Zambia · Ministry of Finance — Report on the Economy 2025</a:t>
-            </a:r>
-          </a:p>
-        </p:txBody>
-      </p:sp>
-      <p:sp>
-        <p:nvSpPr>
-          <p:cNvPr id="32" name="TextBox 31"/>
           <p:cNvSpPr txBox="1"/>
           <p:nvPr/>
         </p:nvSpPr>
@@ -7464,7 +7061,7 @@
             <a:avLst/>
           </a:prstGeom>
           <a:solidFill>
-            <a:srgbClr val="2ECC71"/>
+            <a:srgbClr val="E88C00"/>
           </a:solidFill>
           <a:ln>
             <a:noFill/>
@@ -7561,11 +7158,11 @@
             <a:r>
               <a:rPr sz="900" b="1" i="0">
                 <a:solidFill>
-                  <a:srgbClr val="2ECC71"/>
-                </a:solidFill>
-                <a:latin typeface="Calibri"/>
-              </a:rPr>
-              <a:t>CONCLUSION  ·  THE VERDICT</a:t>
+                  <a:srgbClr val="E88C00"/>
+                </a:solidFill>
+                <a:latin typeface="Calibri"/>
+              </a:rPr>
+              <a:t>KEY METRICS  ·  THE NUMBERS AT A GLANCE</a:t>
             </a:r>
           </a:p>
         </p:txBody>
@@ -7579,7 +7176,7 @@
         <p:spPr>
           <a:xfrm>
             <a:off x="457200" y="640080"/>
-            <a:ext cx="11430000" cy="1097280"/>
+            <a:ext cx="10972800" cy="822960"/>
           </a:xfrm>
           <a:prstGeom prst="rect">
             <a:avLst/>
@@ -7600,7 +7197,7 @@
                 </a:solidFill>
                 <a:latin typeface="Calibri"/>
               </a:rPr>
-              <a:t>Both Were Necessary — Neither Was Sufficient Alone</a:t>
+              <a:t>The Numbers Confirm the Verdict</a:t>
             </a:r>
           </a:p>
         </p:txBody>
@@ -7613,14 +7210,14 @@
         </p:nvSpPr>
         <p:spPr>
           <a:xfrm>
-            <a:off x="457200" y="1691640"/>
-            <a:ext cx="11247120" cy="19050"/>
+            <a:off x="457200" y="1508760"/>
+            <a:ext cx="11430000" cy="19050"/>
           </a:xfrm>
           <a:prstGeom prst="rect">
             <a:avLst/>
           </a:prstGeom>
           <a:solidFill>
-            <a:srgbClr val="2ECC71"/>
+            <a:srgbClr val="E88C00"/>
           </a:solidFill>
           <a:ln>
             <a:noFill/>
@@ -7650,156 +7247,14 @@
       </p:sp>
       <p:sp>
         <p:nvSpPr>
-          <p:cNvPr id="7" name="TextBox 6"/>
-          <p:cNvSpPr txBox="1"/>
-          <p:nvPr/>
-        </p:nvSpPr>
-        <p:spPr>
-          <a:xfrm>
-            <a:off x="457200" y="1920240"/>
-            <a:ext cx="5486400" cy="411480"/>
-          </a:xfrm>
-          <a:prstGeom prst="rect">
-            <a:avLst/>
-          </a:prstGeom>
-          <a:noFill/>
-        </p:spPr>
-        <p:txBody>
-          <a:bodyPr wrap="square">
-            <a:spAutoFit/>
-          </a:bodyPr>
-          <a:lstStyle/>
-          <a:p>
-            <a:pPr algn="l"/>
-            <a:r>
-              <a:rPr sz="1100" b="1" i="0">
-                <a:solidFill>
-                  <a:srgbClr val="E88C00"/>
-                </a:solidFill>
-                <a:latin typeface="Calibri"/>
-              </a:rPr>
-              <a:t>COPPER PROVIDED THE WINDFALL</a:t>
-            </a:r>
-          </a:p>
-        </p:txBody>
-      </p:sp>
-      <p:sp>
-        <p:nvSpPr>
-          <p:cNvPr id="8" name="TextBox 7"/>
-          <p:cNvSpPr txBox="1"/>
-          <p:nvPr/>
-        </p:nvSpPr>
-        <p:spPr>
-          <a:xfrm>
-            <a:off x="457200" y="2377440"/>
-            <a:ext cx="5623560" cy="2743200"/>
-          </a:xfrm>
-          <a:prstGeom prst="rect">
-            <a:avLst/>
-          </a:prstGeom>
-          <a:noFill/>
-        </p:spPr>
-        <p:txBody>
-          <a:bodyPr wrap="square">
-            <a:spAutoFit/>
-          </a:bodyPr>
-          <a:lstStyle/>
-          <a:p>
-            <a:pPr algn="l"/>
-            <a:r>
-              <a:rPr sz="1100" b="0" i="0">
-                <a:solidFill>
-                  <a:srgbClr val="F5F5F5"/>
-                </a:solidFill>
-                <a:latin typeface="Calibri"/>
-              </a:rPr>
-              <a:t>The global copper price supercycle of 2021 handed Zambia a fiscal windfall: the current account swung by +15.5 percentage points and exports surged. This created the fiscal space that made restructuring politically viable and economically credible.
-Without the copper boom, there would have been nothing to restructure toward — and no creditors willing to take a haircut on a country with no revenue trajectory.</a:t>
-            </a:r>
-          </a:p>
-        </p:txBody>
-      </p:sp>
-      <p:sp>
-        <p:nvSpPr>
-          <p:cNvPr id="9" name="TextBox 8"/>
-          <p:cNvSpPr txBox="1"/>
-          <p:nvPr/>
-        </p:nvSpPr>
-        <p:spPr>
-          <a:xfrm>
-            <a:off x="6400800" y="1920240"/>
-            <a:ext cx="5486400" cy="411480"/>
-          </a:xfrm>
-          <a:prstGeom prst="rect">
-            <a:avLst/>
-          </a:prstGeom>
-          <a:noFill/>
-        </p:spPr>
-        <p:txBody>
-          <a:bodyPr wrap="square">
-            <a:spAutoFit/>
-          </a:bodyPr>
-          <a:lstStyle/>
-          <a:p>
-            <a:pPr algn="l"/>
-            <a:r>
-              <a:rPr sz="1100" b="1" i="0">
-                <a:solidFill>
-                  <a:srgbClr val="2ECC71"/>
-                </a:solidFill>
-                <a:latin typeface="Calibri"/>
-              </a:rPr>
-              <a:t>RESTRUCTURING MADE IT DURABLE</a:t>
-            </a:r>
-          </a:p>
-        </p:txBody>
-      </p:sp>
-      <p:sp>
-        <p:nvSpPr>
-          <p:cNvPr id="10" name="TextBox 9"/>
-          <p:cNvSpPr txBox="1"/>
-          <p:nvPr/>
-        </p:nvSpPr>
-        <p:spPr>
-          <a:xfrm>
-            <a:off x="6400800" y="2377440"/>
-            <a:ext cx="5623560" cy="2743200"/>
-          </a:xfrm>
-          <a:prstGeom prst="rect">
-            <a:avLst/>
-          </a:prstGeom>
-          <a:noFill/>
-        </p:spPr>
-        <p:txBody>
-          <a:bodyPr wrap="square">
-            <a:spAutoFit/>
-          </a:bodyPr>
-          <a:lstStyle/>
-          <a:p>
-            <a:pPr algn="l"/>
-            <a:r>
-              <a:rPr sz="1100" b="0" i="0">
-                <a:solidFill>
-                  <a:srgbClr val="F5F5F5"/>
-                </a:solidFill>
-                <a:latin typeface="Calibri"/>
-              </a:rPr>
-              <a:t>The G20 Common Framework deal converted a temporary commodity windfall into a permanent reduction in debt service obligations. PPG debt service fell from 12.5 % to 3 % of exports — freeing fiscal resources for productive investment.
-GDP growth of 5.2–5.4 % persisted even as copper prices moderated, and FDI inflows hit a decade-high of 9.32 % of GDP — confirming that investors saw institutional, not just commodity, credibility.</a:t>
-            </a:r>
-          </a:p>
-        </p:txBody>
-      </p:sp>
-      <p:sp>
-        <p:nvSpPr>
-          <p:cNvPr id="11" name="Rectangle 10"/>
+          <p:cNvPr id="7" name="Rectangle 6"/>
           <p:cNvSpPr/>
           <p:nvPr/>
         </p:nvSpPr>
         <p:spPr>
           <a:xfrm>
-            <a:off x="5989320" y="1828800"/>
-            <a:ext cx="36576" cy="3291840"/>
+            <a:off x="457200" y="1874519"/>
+            <a:ext cx="3749039" cy="1417320"/>
           </a:xfrm>
           <a:prstGeom prst="rect">
             <a:avLst/>
@@ -7835,14 +7290,119 @@
       </p:sp>
       <p:sp>
         <p:nvSpPr>
-          <p:cNvPr id="12" name="Rectangle 11"/>
+          <p:cNvPr id="8" name="TextBox 7"/>
+          <p:cNvSpPr txBox="1"/>
+          <p:nvPr/>
+        </p:nvSpPr>
+        <p:spPr>
+          <a:xfrm>
+            <a:off x="548640" y="1984247"/>
+            <a:ext cx="3566159" cy="365760"/>
+          </a:xfrm>
+          <a:prstGeom prst="rect">
+            <a:avLst/>
+          </a:prstGeom>
+          <a:noFill/>
+        </p:spPr>
+        <p:txBody>
+          <a:bodyPr wrap="square">
+            <a:spAutoFit/>
+          </a:bodyPr>
+          <a:lstStyle/>
+          <a:p>
+            <a:pPr algn="ctr"/>
+            <a:r>
+              <a:rPr sz="900" b="0" i="0">
+                <a:solidFill>
+                  <a:srgbClr val="B0BEC5"/>
+                </a:solidFill>
+                <a:latin typeface="Calibri"/>
+              </a:rPr>
+              <a:t>External Debt Peak</a:t>
+            </a:r>
+          </a:p>
+        </p:txBody>
+      </p:sp>
+      <p:sp>
+        <p:nvSpPr>
+          <p:cNvPr id="9" name="TextBox 8"/>
+          <p:cNvSpPr txBox="1"/>
+          <p:nvPr/>
+        </p:nvSpPr>
+        <p:spPr>
+          <a:xfrm>
+            <a:off x="502920" y="2313431"/>
+            <a:ext cx="3657599" cy="502920"/>
+          </a:xfrm>
+          <a:prstGeom prst="rect">
+            <a:avLst/>
+          </a:prstGeom>
+          <a:noFill/>
+        </p:spPr>
+        <p:txBody>
+          <a:bodyPr wrap="square">
+            <a:spAutoFit/>
+          </a:bodyPr>
+          <a:lstStyle/>
+          <a:p>
+            <a:pPr algn="ctr"/>
+            <a:r>
+              <a:rPr sz="2200" b="1" i="0">
+                <a:solidFill>
+                  <a:srgbClr val="E74C3C"/>
+                </a:solidFill>
+                <a:latin typeface="Calibri"/>
+              </a:rPr>
+              <a:t>$29.1 B</a:t>
+            </a:r>
+          </a:p>
+        </p:txBody>
+      </p:sp>
+      <p:sp>
+        <p:nvSpPr>
+          <p:cNvPr id="10" name="TextBox 9"/>
+          <p:cNvSpPr txBox="1"/>
+          <p:nvPr/>
+        </p:nvSpPr>
+        <p:spPr>
+          <a:xfrm>
+            <a:off x="548640" y="2788919"/>
+            <a:ext cx="3566159" cy="365760"/>
+          </a:xfrm>
+          <a:prstGeom prst="rect">
+            <a:avLst/>
+          </a:prstGeom>
+          <a:noFill/>
+        </p:spPr>
+        <p:txBody>
+          <a:bodyPr wrap="square">
+            <a:spAutoFit/>
+          </a:bodyPr>
+          <a:lstStyle/>
+          <a:p>
+            <a:pPr algn="ctr"/>
+            <a:r>
+              <a:rPr sz="800" b="0" i="0">
+                <a:solidFill>
+                  <a:srgbClr val="B0BEC5"/>
+                </a:solidFill>
+                <a:latin typeface="Calibri"/>
+              </a:rPr>
+              <a:t>2019  (tripled in 4 years)</a:t>
+            </a:r>
+          </a:p>
+        </p:txBody>
+      </p:sp>
+      <p:sp>
+        <p:nvSpPr>
+          <p:cNvPr id="11" name="Rectangle 10"/>
           <p:cNvSpPr/>
           <p:nvPr/>
         </p:nvSpPr>
         <p:spPr>
           <a:xfrm>
-            <a:off x="457200" y="5303520"/>
-            <a:ext cx="11247120" cy="960120"/>
+            <a:off x="4315967" y="1874519"/>
+            <a:ext cx="3749039" cy="1417320"/>
           </a:xfrm>
           <a:prstGeom prst="rect">
             <a:avLst/>
@@ -7878,14 +7438,14 @@
       </p:sp>
       <p:sp>
         <p:nvSpPr>
-          <p:cNvPr id="13" name="TextBox 12"/>
+          <p:cNvPr id="12" name="TextBox 11"/>
           <p:cNvSpPr txBox="1"/>
           <p:nvPr/>
         </p:nvSpPr>
         <p:spPr>
           <a:xfrm>
-            <a:off x="594360" y="5367528"/>
-            <a:ext cx="1097280" cy="292608"/>
+            <a:off x="4407407" y="1984247"/>
+            <a:ext cx="3566159" cy="365760"/>
           </a:xfrm>
           <a:prstGeom prst="rect">
             <a:avLst/>
@@ -7898,29 +7458,29 @@
           </a:bodyPr>
           <a:lstStyle/>
           <a:p>
-            <a:pPr algn="l"/>
-            <a:r>
-              <a:rPr sz="800" b="1" i="0">
-                <a:solidFill>
-                  <a:srgbClr val="E88C00"/>
-                </a:solidFill>
-                <a:latin typeface="Calibri"/>
-              </a:rPr>
-              <a:t>BIG IDEA</a:t>
-            </a:r>
-          </a:p>
-        </p:txBody>
-      </p:sp>
-      <p:sp>
-        <p:nvSpPr>
-          <p:cNvPr id="14" name="TextBox 13"/>
+            <a:pPr algn="ctr"/>
+            <a:r>
+              <a:rPr sz="900" b="0" i="0">
+                <a:solidFill>
+                  <a:srgbClr val="B0BEC5"/>
+                </a:solidFill>
+                <a:latin typeface="Calibri"/>
+              </a:rPr>
+              <a:t>Current Account Swing</a:t>
+            </a:r>
+          </a:p>
+        </p:txBody>
+      </p:sp>
+      <p:sp>
+        <p:nvSpPr>
+          <p:cNvPr id="13" name="TextBox 12"/>
           <p:cNvSpPr txBox="1"/>
           <p:nvPr/>
         </p:nvSpPr>
         <p:spPr>
           <a:xfrm>
-            <a:off x="594360" y="5641848"/>
-            <a:ext cx="10972800" cy="502920"/>
+            <a:off x="4361687" y="2313431"/>
+            <a:ext cx="3657599" cy="502920"/>
           </a:xfrm>
           <a:prstGeom prst="rect">
             <a:avLst/>
@@ -7933,22 +7493,684 @@
           </a:bodyPr>
           <a:lstStyle/>
           <a:p>
+            <a:pPr algn="ctr"/>
+            <a:r>
+              <a:rPr sz="2200" b="1" i="0">
+                <a:solidFill>
+                  <a:srgbClr val="2ECC71"/>
+                </a:solidFill>
+                <a:latin typeface="Calibri"/>
+              </a:rPr>
+              <a:t>+15.5 pp</a:t>
+            </a:r>
+          </a:p>
+        </p:txBody>
+      </p:sp>
+      <p:sp>
+        <p:nvSpPr>
+          <p:cNvPr id="14" name="TextBox 13"/>
+          <p:cNvSpPr txBox="1"/>
+          <p:nvPr/>
+        </p:nvSpPr>
+        <p:spPr>
+          <a:xfrm>
+            <a:off x="4407407" y="2788919"/>
+            <a:ext cx="3566159" cy="365760"/>
+          </a:xfrm>
+          <a:prstGeom prst="rect">
+            <a:avLst/>
+          </a:prstGeom>
+          <a:noFill/>
+        </p:spPr>
+        <p:txBody>
+          <a:bodyPr wrap="square">
+            <a:spAutoFit/>
+          </a:bodyPr>
+          <a:lstStyle/>
+          <a:p>
+            <a:pPr algn="ctr"/>
+            <a:r>
+              <a:rPr sz="800" b="0" i="0">
+                <a:solidFill>
+                  <a:srgbClr val="B0BEC5"/>
+                </a:solidFill>
+                <a:latin typeface="Calibri"/>
+              </a:rPr>
+              <a:t>-3.6 % → +11.9 % of GDP</a:t>
+            </a:r>
+          </a:p>
+        </p:txBody>
+      </p:sp>
+      <p:sp>
+        <p:nvSpPr>
+          <p:cNvPr id="15" name="Rectangle 14"/>
+          <p:cNvSpPr/>
+          <p:nvPr/>
+        </p:nvSpPr>
+        <p:spPr>
+          <a:xfrm>
+            <a:off x="8174734" y="1874519"/>
+            <a:ext cx="3749039" cy="1417320"/>
+          </a:xfrm>
+          <a:prstGeom prst="rect">
+            <a:avLst/>
+          </a:prstGeom>
+          <a:solidFill>
+            <a:srgbClr val="1E3A5F"/>
+          </a:solidFill>
+          <a:ln>
+            <a:noFill/>
+          </a:ln>
+        </p:spPr>
+        <p:style>
+          <a:lnRef idx="1">
+            <a:schemeClr val="accent1"/>
+          </a:lnRef>
+          <a:fillRef idx="3">
+            <a:schemeClr val="accent1"/>
+          </a:fillRef>
+          <a:effectRef idx="2">
+            <a:schemeClr val="accent1"/>
+          </a:effectRef>
+          <a:fontRef idx="minor">
+            <a:schemeClr val="lt1"/>
+          </a:fontRef>
+        </p:style>
+        <p:txBody>
+          <a:bodyPr rtlCol="0" anchor="ctr"/>
+          <a:lstStyle/>
+          <a:p>
+            <a:pPr algn="ctr"/>
+          </a:p>
+        </p:txBody>
+      </p:sp>
+      <p:sp>
+        <p:nvSpPr>
+          <p:cNvPr id="16" name="TextBox 15"/>
+          <p:cNvSpPr txBox="1"/>
+          <p:nvPr/>
+        </p:nvSpPr>
+        <p:spPr>
+          <a:xfrm>
+            <a:off x="8266174" y="1984247"/>
+            <a:ext cx="3566159" cy="365760"/>
+          </a:xfrm>
+          <a:prstGeom prst="rect">
+            <a:avLst/>
+          </a:prstGeom>
+          <a:noFill/>
+        </p:spPr>
+        <p:txBody>
+          <a:bodyPr wrap="square">
+            <a:spAutoFit/>
+          </a:bodyPr>
+          <a:lstStyle/>
+          <a:p>
+            <a:pPr algn="ctr"/>
+            <a:r>
+              <a:rPr sz="900" b="0" i="0">
+                <a:solidFill>
+                  <a:srgbClr val="B0BEC5"/>
+                </a:solidFill>
+                <a:latin typeface="Calibri"/>
+              </a:rPr>
+              <a:t>IMF ECF Approved</a:t>
+            </a:r>
+          </a:p>
+        </p:txBody>
+      </p:sp>
+      <p:sp>
+        <p:nvSpPr>
+          <p:cNvPr id="17" name="TextBox 16"/>
+          <p:cNvSpPr txBox="1"/>
+          <p:nvPr/>
+        </p:nvSpPr>
+        <p:spPr>
+          <a:xfrm>
+            <a:off x="8220454" y="2313431"/>
+            <a:ext cx="3657599" cy="502920"/>
+          </a:xfrm>
+          <a:prstGeom prst="rect">
+            <a:avLst/>
+          </a:prstGeom>
+          <a:noFill/>
+        </p:spPr>
+        <p:txBody>
+          <a:bodyPr wrap="square">
+            <a:spAutoFit/>
+          </a:bodyPr>
+          <a:lstStyle/>
+          <a:p>
+            <a:pPr algn="ctr"/>
+            <a:r>
+              <a:rPr sz="2200" b="1" i="0">
+                <a:solidFill>
+                  <a:srgbClr val="E88C00"/>
+                </a:solidFill>
+                <a:latin typeface="Calibri"/>
+              </a:rPr>
+              <a:t>$1.3 B</a:t>
+            </a:r>
+          </a:p>
+        </p:txBody>
+      </p:sp>
+      <p:sp>
+        <p:nvSpPr>
+          <p:cNvPr id="18" name="TextBox 17"/>
+          <p:cNvSpPr txBox="1"/>
+          <p:nvPr/>
+        </p:nvSpPr>
+        <p:spPr>
+          <a:xfrm>
+            <a:off x="8266174" y="2788919"/>
+            <a:ext cx="3566159" cy="365760"/>
+          </a:xfrm>
+          <a:prstGeom prst="rect">
+            <a:avLst/>
+          </a:prstGeom>
+          <a:noFill/>
+        </p:spPr>
+        <p:txBody>
+          <a:bodyPr wrap="square">
+            <a:spAutoFit/>
+          </a:bodyPr>
+          <a:lstStyle/>
+          <a:p>
+            <a:pPr algn="ctr"/>
+            <a:r>
+              <a:rPr sz="800" b="0" i="0">
+                <a:solidFill>
+                  <a:srgbClr val="B0BEC5"/>
+                </a:solidFill>
+                <a:latin typeface="Calibri"/>
+              </a:rPr>
+              <a:t>2022 facility</a:t>
+            </a:r>
+          </a:p>
+        </p:txBody>
+      </p:sp>
+      <p:sp>
+        <p:nvSpPr>
+          <p:cNvPr id="19" name="Rectangle 18"/>
+          <p:cNvSpPr/>
+          <p:nvPr/>
+        </p:nvSpPr>
+        <p:spPr>
+          <a:xfrm>
+            <a:off x="457200" y="3566159"/>
+            <a:ext cx="3749039" cy="1417320"/>
+          </a:xfrm>
+          <a:prstGeom prst="rect">
+            <a:avLst/>
+          </a:prstGeom>
+          <a:solidFill>
+            <a:srgbClr val="1E3A5F"/>
+          </a:solidFill>
+          <a:ln>
+            <a:noFill/>
+          </a:ln>
+        </p:spPr>
+        <p:style>
+          <a:lnRef idx="1">
+            <a:schemeClr val="accent1"/>
+          </a:lnRef>
+          <a:fillRef idx="3">
+            <a:schemeClr val="accent1"/>
+          </a:fillRef>
+          <a:effectRef idx="2">
+            <a:schemeClr val="accent1"/>
+          </a:effectRef>
+          <a:fontRef idx="minor">
+            <a:schemeClr val="lt1"/>
+          </a:fontRef>
+        </p:style>
+        <p:txBody>
+          <a:bodyPr rtlCol="0" anchor="ctr"/>
+          <a:lstStyle/>
+          <a:p>
+            <a:pPr algn="ctr"/>
+          </a:p>
+        </p:txBody>
+      </p:sp>
+      <p:sp>
+        <p:nvSpPr>
+          <p:cNvPr id="20" name="TextBox 19"/>
+          <p:cNvSpPr txBox="1"/>
+          <p:nvPr/>
+        </p:nvSpPr>
+        <p:spPr>
+          <a:xfrm>
+            <a:off x="548640" y="3675887"/>
+            <a:ext cx="3566159" cy="365760"/>
+          </a:xfrm>
+          <a:prstGeom prst="rect">
+            <a:avLst/>
+          </a:prstGeom>
+          <a:noFill/>
+        </p:spPr>
+        <p:txBody>
+          <a:bodyPr wrap="square">
+            <a:spAutoFit/>
+          </a:bodyPr>
+          <a:lstStyle/>
+          <a:p>
+            <a:pPr algn="ctr"/>
+            <a:r>
+              <a:rPr sz="900" b="0" i="0">
+                <a:solidFill>
+                  <a:srgbClr val="B0BEC5"/>
+                </a:solidFill>
+                <a:latin typeface="Calibri"/>
+              </a:rPr>
+              <a:t>PPG Debt Service (post-deal)</a:t>
+            </a:r>
+          </a:p>
+        </p:txBody>
+      </p:sp>
+      <p:sp>
+        <p:nvSpPr>
+          <p:cNvPr id="21" name="TextBox 20"/>
+          <p:cNvSpPr txBox="1"/>
+          <p:nvPr/>
+        </p:nvSpPr>
+        <p:spPr>
+          <a:xfrm>
+            <a:off x="502920" y="4005071"/>
+            <a:ext cx="3657599" cy="502920"/>
+          </a:xfrm>
+          <a:prstGeom prst="rect">
+            <a:avLst/>
+          </a:prstGeom>
+          <a:noFill/>
+        </p:spPr>
+        <p:txBody>
+          <a:bodyPr wrap="square">
+            <a:spAutoFit/>
+          </a:bodyPr>
+          <a:lstStyle/>
+          <a:p>
+            <a:pPr algn="ctr"/>
+            <a:r>
+              <a:rPr sz="2200" b="1" i="0">
+                <a:solidFill>
+                  <a:srgbClr val="2ECC71"/>
+                </a:solidFill>
+                <a:latin typeface="Calibri"/>
+              </a:rPr>
+              <a:t>3.0 %</a:t>
+            </a:r>
+          </a:p>
+        </p:txBody>
+      </p:sp>
+      <p:sp>
+        <p:nvSpPr>
+          <p:cNvPr id="22" name="TextBox 21"/>
+          <p:cNvSpPr txBox="1"/>
+          <p:nvPr/>
+        </p:nvSpPr>
+        <p:spPr>
+          <a:xfrm>
+            <a:off x="548640" y="4480559"/>
+            <a:ext cx="3566159" cy="365760"/>
+          </a:xfrm>
+          <a:prstGeom prst="rect">
+            <a:avLst/>
+          </a:prstGeom>
+          <a:noFill/>
+        </p:spPr>
+        <p:txBody>
+          <a:bodyPr wrap="square">
+            <a:spAutoFit/>
+          </a:bodyPr>
+          <a:lstStyle/>
+          <a:p>
+            <a:pPr algn="ctr"/>
+            <a:r>
+              <a:rPr sz="800" b="0" i="0">
+                <a:solidFill>
+                  <a:srgbClr val="B0BEC5"/>
+                </a:solidFill>
+                <a:latin typeface="Calibri"/>
+              </a:rPr>
+              <a:t>down from 12.5 % of exports</a:t>
+            </a:r>
+          </a:p>
+        </p:txBody>
+      </p:sp>
+      <p:sp>
+        <p:nvSpPr>
+          <p:cNvPr id="23" name="Rectangle 22"/>
+          <p:cNvSpPr/>
+          <p:nvPr/>
+        </p:nvSpPr>
+        <p:spPr>
+          <a:xfrm>
+            <a:off x="4315967" y="3566159"/>
+            <a:ext cx="3749039" cy="1417320"/>
+          </a:xfrm>
+          <a:prstGeom prst="rect">
+            <a:avLst/>
+          </a:prstGeom>
+          <a:solidFill>
+            <a:srgbClr val="1E3A5F"/>
+          </a:solidFill>
+          <a:ln>
+            <a:noFill/>
+          </a:ln>
+        </p:spPr>
+        <p:style>
+          <a:lnRef idx="1">
+            <a:schemeClr val="accent1"/>
+          </a:lnRef>
+          <a:fillRef idx="3">
+            <a:schemeClr val="accent1"/>
+          </a:fillRef>
+          <a:effectRef idx="2">
+            <a:schemeClr val="accent1"/>
+          </a:effectRef>
+          <a:fontRef idx="minor">
+            <a:schemeClr val="lt1"/>
+          </a:fontRef>
+        </p:style>
+        <p:txBody>
+          <a:bodyPr rtlCol="0" anchor="ctr"/>
+          <a:lstStyle/>
+          <a:p>
+            <a:pPr algn="ctr"/>
+          </a:p>
+        </p:txBody>
+      </p:sp>
+      <p:sp>
+        <p:nvSpPr>
+          <p:cNvPr id="24" name="TextBox 23"/>
+          <p:cNvSpPr txBox="1"/>
+          <p:nvPr/>
+        </p:nvSpPr>
+        <p:spPr>
+          <a:xfrm>
+            <a:off x="4407407" y="3675887"/>
+            <a:ext cx="3566159" cy="365760"/>
+          </a:xfrm>
+          <a:prstGeom prst="rect">
+            <a:avLst/>
+          </a:prstGeom>
+          <a:noFill/>
+        </p:spPr>
+        <p:txBody>
+          <a:bodyPr wrap="square">
+            <a:spAutoFit/>
+          </a:bodyPr>
+          <a:lstStyle/>
+          <a:p>
+            <a:pPr algn="ctr"/>
+            <a:r>
+              <a:rPr sz="900" b="0" i="0">
+                <a:solidFill>
+                  <a:srgbClr val="B0BEC5"/>
+                </a:solidFill>
+                <a:latin typeface="Calibri"/>
+              </a:rPr>
+              <a:t>GDP Growth (2024)</a:t>
+            </a:r>
+          </a:p>
+        </p:txBody>
+      </p:sp>
+      <p:sp>
+        <p:nvSpPr>
+          <p:cNvPr id="25" name="TextBox 24"/>
+          <p:cNvSpPr txBox="1"/>
+          <p:nvPr/>
+        </p:nvSpPr>
+        <p:spPr>
+          <a:xfrm>
+            <a:off x="4361687" y="4005071"/>
+            <a:ext cx="3657599" cy="502920"/>
+          </a:xfrm>
+          <a:prstGeom prst="rect">
+            <a:avLst/>
+          </a:prstGeom>
+          <a:noFill/>
+        </p:spPr>
+        <p:txBody>
+          <a:bodyPr wrap="square">
+            <a:spAutoFit/>
+          </a:bodyPr>
+          <a:lstStyle/>
+          <a:p>
+            <a:pPr algn="ctr"/>
+            <a:r>
+              <a:rPr sz="2200" b="1" i="0">
+                <a:solidFill>
+                  <a:srgbClr val="2ECC71"/>
+                </a:solidFill>
+                <a:latin typeface="Calibri"/>
+              </a:rPr>
+              <a:t>5.3 %</a:t>
+            </a:r>
+          </a:p>
+        </p:txBody>
+      </p:sp>
+      <p:sp>
+        <p:nvSpPr>
+          <p:cNvPr id="26" name="TextBox 25"/>
+          <p:cNvSpPr txBox="1"/>
+          <p:nvPr/>
+        </p:nvSpPr>
+        <p:spPr>
+          <a:xfrm>
+            <a:off x="4407407" y="4480559"/>
+            <a:ext cx="3566159" cy="365760"/>
+          </a:xfrm>
+          <a:prstGeom prst="rect">
+            <a:avLst/>
+          </a:prstGeom>
+          <a:noFill/>
+        </p:spPr>
+        <p:txBody>
+          <a:bodyPr wrap="square">
+            <a:spAutoFit/>
+          </a:bodyPr>
+          <a:lstStyle/>
+          <a:p>
+            <a:pPr algn="ctr"/>
+            <a:r>
+              <a:rPr sz="800" b="0" i="0">
+                <a:solidFill>
+                  <a:srgbClr val="B0BEC5"/>
+                </a:solidFill>
+                <a:latin typeface="Calibri"/>
+              </a:rPr>
+              <a:t>sustained as Cu prices cooled</a:t>
+            </a:r>
+          </a:p>
+        </p:txBody>
+      </p:sp>
+      <p:sp>
+        <p:nvSpPr>
+          <p:cNvPr id="27" name="Rectangle 26"/>
+          <p:cNvSpPr/>
+          <p:nvPr/>
+        </p:nvSpPr>
+        <p:spPr>
+          <a:xfrm>
+            <a:off x="8174734" y="3566159"/>
+            <a:ext cx="3749039" cy="1417320"/>
+          </a:xfrm>
+          <a:prstGeom prst="rect">
+            <a:avLst/>
+          </a:prstGeom>
+          <a:solidFill>
+            <a:srgbClr val="1E3A5F"/>
+          </a:solidFill>
+          <a:ln>
+            <a:noFill/>
+          </a:ln>
+        </p:spPr>
+        <p:style>
+          <a:lnRef idx="1">
+            <a:schemeClr val="accent1"/>
+          </a:lnRef>
+          <a:fillRef idx="3">
+            <a:schemeClr val="accent1"/>
+          </a:fillRef>
+          <a:effectRef idx="2">
+            <a:schemeClr val="accent1"/>
+          </a:effectRef>
+          <a:fontRef idx="minor">
+            <a:schemeClr val="lt1"/>
+          </a:fontRef>
+        </p:style>
+        <p:txBody>
+          <a:bodyPr rtlCol="0" anchor="ctr"/>
+          <a:lstStyle/>
+          <a:p>
+            <a:pPr algn="ctr"/>
+          </a:p>
+        </p:txBody>
+      </p:sp>
+      <p:sp>
+        <p:nvSpPr>
+          <p:cNvPr id="28" name="TextBox 27"/>
+          <p:cNvSpPr txBox="1"/>
+          <p:nvPr/>
+        </p:nvSpPr>
+        <p:spPr>
+          <a:xfrm>
+            <a:off x="8266174" y="3675887"/>
+            <a:ext cx="3566159" cy="365760"/>
+          </a:xfrm>
+          <a:prstGeom prst="rect">
+            <a:avLst/>
+          </a:prstGeom>
+          <a:noFill/>
+        </p:spPr>
+        <p:txBody>
+          <a:bodyPr wrap="square">
+            <a:spAutoFit/>
+          </a:bodyPr>
+          <a:lstStyle/>
+          <a:p>
+            <a:pPr algn="ctr"/>
+            <a:r>
+              <a:rPr sz="900" b="0" i="0">
+                <a:solidFill>
+                  <a:srgbClr val="B0BEC5"/>
+                </a:solidFill>
+                <a:latin typeface="Calibri"/>
+              </a:rPr>
+              <a:t>FDI Inflows (2024)</a:t>
+            </a:r>
+          </a:p>
+        </p:txBody>
+      </p:sp>
+      <p:sp>
+        <p:nvSpPr>
+          <p:cNvPr id="29" name="TextBox 28"/>
+          <p:cNvSpPr txBox="1"/>
+          <p:nvPr/>
+        </p:nvSpPr>
+        <p:spPr>
+          <a:xfrm>
+            <a:off x="8220454" y="4005071"/>
+            <a:ext cx="3657599" cy="502920"/>
+          </a:xfrm>
+          <a:prstGeom prst="rect">
+            <a:avLst/>
+          </a:prstGeom>
+          <a:noFill/>
+        </p:spPr>
+        <p:txBody>
+          <a:bodyPr wrap="square">
+            <a:spAutoFit/>
+          </a:bodyPr>
+          <a:lstStyle/>
+          <a:p>
+            <a:pPr algn="ctr"/>
+            <a:r>
+              <a:rPr sz="2200" b="1" i="0">
+                <a:solidFill>
+                  <a:srgbClr val="E88C00"/>
+                </a:solidFill>
+                <a:latin typeface="Calibri"/>
+              </a:rPr>
+              <a:t>9.32 %</a:t>
+            </a:r>
+          </a:p>
+        </p:txBody>
+      </p:sp>
+      <p:sp>
+        <p:nvSpPr>
+          <p:cNvPr id="30" name="TextBox 29"/>
+          <p:cNvSpPr txBox="1"/>
+          <p:nvPr/>
+        </p:nvSpPr>
+        <p:spPr>
+          <a:xfrm>
+            <a:off x="8266174" y="4480559"/>
+            <a:ext cx="3566159" cy="365760"/>
+          </a:xfrm>
+          <a:prstGeom prst="rect">
+            <a:avLst/>
+          </a:prstGeom>
+          <a:noFill/>
+        </p:spPr>
+        <p:txBody>
+          <a:bodyPr wrap="square">
+            <a:spAutoFit/>
+          </a:bodyPr>
+          <a:lstStyle/>
+          <a:p>
+            <a:pPr algn="ctr"/>
+            <a:r>
+              <a:rPr sz="800" b="0" i="0">
+                <a:solidFill>
+                  <a:srgbClr val="B0BEC5"/>
+                </a:solidFill>
+                <a:latin typeface="Calibri"/>
+              </a:rPr>
+              <a:t>decade high  ·  % of GDP</a:t>
+            </a:r>
+          </a:p>
+        </p:txBody>
+      </p:sp>
+      <p:sp>
+        <p:nvSpPr>
+          <p:cNvPr id="31" name="TextBox 30"/>
+          <p:cNvSpPr txBox="1"/>
+          <p:nvPr/>
+        </p:nvSpPr>
+        <p:spPr>
+          <a:xfrm>
+            <a:off x="457200" y="5989320"/>
+            <a:ext cx="10972800" cy="365760"/>
+          </a:xfrm>
+          <a:prstGeom prst="rect">
+            <a:avLst/>
+          </a:prstGeom>
+          <a:noFill/>
+        </p:spPr>
+        <p:txBody>
+          <a:bodyPr wrap="square">
+            <a:spAutoFit/>
+          </a:bodyPr>
+          <a:lstStyle/>
+          <a:p>
             <a:pPr algn="l"/>
             <a:r>
-              <a:rPr sz="1300" b="1" i="1">
-                <a:solidFill>
-                  <a:srgbClr val="F5F5F5"/>
-                </a:solidFill>
-                <a:latin typeface="Calibri"/>
-              </a:rPr>
-              <a:t>Zambia's recovery proves that commodity luck and institutional reform are complements, not substitutes — copper created the window; the G20 deal made it a door.</a:t>
-            </a:r>
-          </a:p>
-        </p:txBody>
-      </p:sp>
-      <p:sp>
-        <p:nvSpPr>
-          <p:cNvPr id="15" name="TextBox 14"/>
+              <a:rPr sz="800" b="0" i="0">
+                <a:solidFill>
+                  <a:srgbClr val="B0BEC5"/>
+                </a:solidFill>
+                <a:latin typeface="Calibri"/>
+              </a:rPr>
+              <a:t>Sources: World Bank WDI · IMF WEO · Bank of Zambia · Ministry of Finance — Report on the Economy 2025</a:t>
+            </a:r>
+          </a:p>
+        </p:txBody>
+      </p:sp>
+      <p:sp>
+        <p:nvSpPr>
+          <p:cNvPr id="32" name="TextBox 31"/>
           <p:cNvSpPr txBox="1"/>
           <p:nvPr/>
         </p:nvSpPr>
@@ -8022,7 +8244,7 @@
             <a:avLst/>
           </a:prstGeom>
           <a:solidFill>
-            <a:srgbClr val="B0BEC5"/>
+            <a:srgbClr val="2ECC71"/>
           </a:solidFill>
           <a:ln>
             <a:noFill/>
@@ -8119,11 +8341,11 @@
             <a:r>
               <a:rPr sz="900" b="1" i="0">
                 <a:solidFill>
-                  <a:srgbClr val="B0BEC5"/>
-                </a:solidFill>
-                <a:latin typeface="Calibri"/>
-              </a:rPr>
-              <a:t>APPENDIX  ·  3-MINUTE STORY &amp; BIG IDEA</a:t>
+                  <a:srgbClr val="2ECC71"/>
+                </a:solidFill>
+                <a:latin typeface="Calibri"/>
+              </a:rPr>
+              <a:t>CONCLUSION  ·  THE VERDICT</a:t>
             </a:r>
           </a:p>
         </p:txBody>
@@ -8136,8 +8358,8 @@
         </p:nvSpPr>
         <p:spPr>
           <a:xfrm>
-            <a:off x="457200" y="594360"/>
-            <a:ext cx="10972800" cy="640080"/>
+            <a:off x="457200" y="640080"/>
+            <a:ext cx="11430000" cy="914400"/>
           </a:xfrm>
           <a:prstGeom prst="rect">
             <a:avLst/>
@@ -8152,13 +8374,13 @@
           <a:p>
             <a:pPr algn="l"/>
             <a:r>
-              <a:rPr sz="2000" b="1">
+              <a:rPr sz="2600" b="1">
                 <a:solidFill>
                   <a:srgbClr val="F5F5F5"/>
                 </a:solidFill>
                 <a:latin typeface="Calibri"/>
               </a:rPr>
-              <a:t>Storytelling with Data — Written Narrative</a:t>
+              <a:t>Both Were Necessary — Neither Was Sufficient Alone</a:t>
             </a:r>
           </a:p>
         </p:txBody>
@@ -8171,8 +8393,410 @@
         </p:nvSpPr>
         <p:spPr>
           <a:xfrm>
-            <a:off x="457200" y="1234440"/>
+            <a:off x="457200" y="1600200"/>
             <a:ext cx="11247120" cy="19050"/>
+          </a:xfrm>
+          <a:prstGeom prst="rect">
+            <a:avLst/>
+          </a:prstGeom>
+          <a:solidFill>
+            <a:srgbClr val="2ECC71"/>
+          </a:solidFill>
+          <a:ln>
+            <a:noFill/>
+          </a:ln>
+        </p:spPr>
+        <p:style>
+          <a:lnRef idx="1">
+            <a:schemeClr val="accent1"/>
+          </a:lnRef>
+          <a:fillRef idx="3">
+            <a:schemeClr val="accent1"/>
+          </a:fillRef>
+          <a:effectRef idx="2">
+            <a:schemeClr val="accent1"/>
+          </a:effectRef>
+          <a:fontRef idx="minor">
+            <a:schemeClr val="lt1"/>
+          </a:fontRef>
+        </p:style>
+        <p:txBody>
+          <a:bodyPr rtlCol="0" anchor="ctr"/>
+          <a:lstStyle/>
+          <a:p>
+            <a:pPr algn="ctr"/>
+          </a:p>
+        </p:txBody>
+      </p:sp>
+      <p:sp>
+        <p:nvSpPr>
+          <p:cNvPr id="7" name="TextBox 6"/>
+          <p:cNvSpPr txBox="1"/>
+          <p:nvPr/>
+        </p:nvSpPr>
+        <p:spPr>
+          <a:xfrm>
+            <a:off x="457200" y="1828800"/>
+            <a:ext cx="5486400" cy="365760"/>
+          </a:xfrm>
+          <a:prstGeom prst="rect">
+            <a:avLst/>
+          </a:prstGeom>
+          <a:noFill/>
+        </p:spPr>
+        <p:txBody>
+          <a:bodyPr wrap="square">
+            <a:spAutoFit/>
+          </a:bodyPr>
+          <a:lstStyle/>
+          <a:p>
+            <a:pPr algn="l"/>
+            <a:r>
+              <a:rPr sz="1100" b="1" i="0">
+                <a:solidFill>
+                  <a:srgbClr val="E88C00"/>
+                </a:solidFill>
+                <a:latin typeface="Calibri"/>
+              </a:rPr>
+              <a:t>COPPER PROVIDED THE WINDFALL</a:t>
+            </a:r>
+          </a:p>
+        </p:txBody>
+      </p:sp>
+      <p:sp>
+        <p:nvSpPr>
+          <p:cNvPr id="8" name="TextBox 7"/>
+          <p:cNvSpPr txBox="1"/>
+          <p:nvPr/>
+        </p:nvSpPr>
+        <p:spPr>
+          <a:xfrm>
+            <a:off x="457200" y="2286000"/>
+            <a:ext cx="5623560" cy="2743200"/>
+          </a:xfrm>
+          <a:prstGeom prst="rect">
+            <a:avLst/>
+          </a:prstGeom>
+          <a:noFill/>
+        </p:spPr>
+        <p:txBody>
+          <a:bodyPr wrap="square">
+            <a:spAutoFit/>
+          </a:bodyPr>
+          <a:lstStyle/>
+          <a:p>
+            <a:pPr algn="l"/>
+            <a:r>
+              <a:rPr sz="1100" b="0" i="0">
+                <a:solidFill>
+                  <a:srgbClr val="F5F5F5"/>
+                </a:solidFill>
+                <a:latin typeface="Calibri"/>
+              </a:rPr>
+              <a:t>The global copper price supercycle of 2021 handed Zambia a fiscal windfall: the current account swung by +15.5 pp and exports surged. This created the fiscal space that made restructuring politically viable and economically credible.
+Without the copper boom, there would have been nothing to restructure toward — and no creditors willing to take a haircut on a country with no revenue trajectory.</a:t>
+            </a:r>
+          </a:p>
+        </p:txBody>
+      </p:sp>
+      <p:sp>
+        <p:nvSpPr>
+          <p:cNvPr id="9" name="TextBox 8"/>
+          <p:cNvSpPr txBox="1"/>
+          <p:nvPr/>
+        </p:nvSpPr>
+        <p:spPr>
+          <a:xfrm>
+            <a:off x="6400800" y="1828800"/>
+            <a:ext cx="5486400" cy="365760"/>
+          </a:xfrm>
+          <a:prstGeom prst="rect">
+            <a:avLst/>
+          </a:prstGeom>
+          <a:noFill/>
+        </p:spPr>
+        <p:txBody>
+          <a:bodyPr wrap="square">
+            <a:spAutoFit/>
+          </a:bodyPr>
+          <a:lstStyle/>
+          <a:p>
+            <a:pPr algn="l"/>
+            <a:r>
+              <a:rPr sz="1100" b="1" i="0">
+                <a:solidFill>
+                  <a:srgbClr val="2ECC71"/>
+                </a:solidFill>
+                <a:latin typeface="Calibri"/>
+              </a:rPr>
+              <a:t>RESTRUCTURING MADE IT DURABLE</a:t>
+            </a:r>
+          </a:p>
+        </p:txBody>
+      </p:sp>
+      <p:sp>
+        <p:nvSpPr>
+          <p:cNvPr id="10" name="TextBox 9"/>
+          <p:cNvSpPr txBox="1"/>
+          <p:nvPr/>
+        </p:nvSpPr>
+        <p:spPr>
+          <a:xfrm>
+            <a:off x="6400800" y="2286000"/>
+            <a:ext cx="5623560" cy="2743200"/>
+          </a:xfrm>
+          <a:prstGeom prst="rect">
+            <a:avLst/>
+          </a:prstGeom>
+          <a:noFill/>
+        </p:spPr>
+        <p:txBody>
+          <a:bodyPr wrap="square">
+            <a:spAutoFit/>
+          </a:bodyPr>
+          <a:lstStyle/>
+          <a:p>
+            <a:pPr algn="l"/>
+            <a:r>
+              <a:rPr sz="1100" b="0" i="0">
+                <a:solidFill>
+                  <a:srgbClr val="F5F5F5"/>
+                </a:solidFill>
+                <a:latin typeface="Calibri"/>
+              </a:rPr>
+              <a:t>The G20 Common Framework deal converted a temporary commodity windfall into a permanent reduction in debt service obligations. PPG debt service fell from 12.5 % to 3 % of exports — freeing fiscal resources for productive investment.
+GDP growth of 5.2–5.4 % persisted even as copper prices moderated, and FDI inflows hit a decade-high of 9.32 % of GDP — confirming that investors saw institutional, not just commodity, credibility.</a:t>
+            </a:r>
+          </a:p>
+        </p:txBody>
+      </p:sp>
+      <p:sp>
+        <p:nvSpPr>
+          <p:cNvPr id="11" name="Rectangle 10"/>
+          <p:cNvSpPr/>
+          <p:nvPr/>
+        </p:nvSpPr>
+        <p:spPr>
+          <a:xfrm>
+            <a:off x="5989320" y="1737360"/>
+            <a:ext cx="36576" cy="3383280"/>
+          </a:xfrm>
+          <a:prstGeom prst="rect">
+            <a:avLst/>
+          </a:prstGeom>
+          <a:solidFill>
+            <a:srgbClr val="1E3A5F"/>
+          </a:solidFill>
+          <a:ln>
+            <a:noFill/>
+          </a:ln>
+        </p:spPr>
+        <p:style>
+          <a:lnRef idx="1">
+            <a:schemeClr val="accent1"/>
+          </a:lnRef>
+          <a:fillRef idx="3">
+            <a:schemeClr val="accent1"/>
+          </a:fillRef>
+          <a:effectRef idx="2">
+            <a:schemeClr val="accent1"/>
+          </a:effectRef>
+          <a:fontRef idx="minor">
+            <a:schemeClr val="lt1"/>
+          </a:fontRef>
+        </p:style>
+        <p:txBody>
+          <a:bodyPr rtlCol="0" anchor="ctr"/>
+          <a:lstStyle/>
+          <a:p>
+            <a:pPr algn="ctr"/>
+          </a:p>
+        </p:txBody>
+      </p:sp>
+      <p:sp>
+        <p:nvSpPr>
+          <p:cNvPr id="12" name="Rectangle 11"/>
+          <p:cNvSpPr/>
+          <p:nvPr/>
+        </p:nvSpPr>
+        <p:spPr>
+          <a:xfrm>
+            <a:off x="457200" y="5257800"/>
+            <a:ext cx="11247120" cy="960120"/>
+          </a:xfrm>
+          <a:prstGeom prst="rect">
+            <a:avLst/>
+          </a:prstGeom>
+          <a:solidFill>
+            <a:srgbClr val="1E3A5F"/>
+          </a:solidFill>
+          <a:ln>
+            <a:noFill/>
+          </a:ln>
+        </p:spPr>
+        <p:style>
+          <a:lnRef idx="1">
+            <a:schemeClr val="accent1"/>
+          </a:lnRef>
+          <a:fillRef idx="3">
+            <a:schemeClr val="accent1"/>
+          </a:fillRef>
+          <a:effectRef idx="2">
+            <a:schemeClr val="accent1"/>
+          </a:effectRef>
+          <a:fontRef idx="minor">
+            <a:schemeClr val="lt1"/>
+          </a:fontRef>
+        </p:style>
+        <p:txBody>
+          <a:bodyPr rtlCol="0" anchor="ctr"/>
+          <a:lstStyle/>
+          <a:p>
+            <a:pPr algn="ctr"/>
+          </a:p>
+        </p:txBody>
+      </p:sp>
+      <p:sp>
+        <p:nvSpPr>
+          <p:cNvPr id="13" name="TextBox 12"/>
+          <p:cNvSpPr txBox="1"/>
+          <p:nvPr/>
+        </p:nvSpPr>
+        <p:spPr>
+          <a:xfrm>
+            <a:off x="594360" y="5321808"/>
+            <a:ext cx="1097280" cy="274320"/>
+          </a:xfrm>
+          <a:prstGeom prst="rect">
+            <a:avLst/>
+          </a:prstGeom>
+          <a:noFill/>
+        </p:spPr>
+        <p:txBody>
+          <a:bodyPr wrap="square">
+            <a:spAutoFit/>
+          </a:bodyPr>
+          <a:lstStyle/>
+          <a:p>
+            <a:pPr algn="l"/>
+            <a:r>
+              <a:rPr sz="800" b="1" i="0">
+                <a:solidFill>
+                  <a:srgbClr val="E88C00"/>
+                </a:solidFill>
+                <a:latin typeface="Calibri"/>
+              </a:rPr>
+              <a:t>BIG IDEA</a:t>
+            </a:r>
+          </a:p>
+        </p:txBody>
+      </p:sp>
+      <p:sp>
+        <p:nvSpPr>
+          <p:cNvPr id="14" name="TextBox 13"/>
+          <p:cNvSpPr txBox="1"/>
+          <p:nvPr/>
+        </p:nvSpPr>
+        <p:spPr>
+          <a:xfrm>
+            <a:off x="594360" y="5596128"/>
+            <a:ext cx="10972800" cy="457200"/>
+          </a:xfrm>
+          <a:prstGeom prst="rect">
+            <a:avLst/>
+          </a:prstGeom>
+          <a:noFill/>
+        </p:spPr>
+        <p:txBody>
+          <a:bodyPr wrap="square">
+            <a:spAutoFit/>
+          </a:bodyPr>
+          <a:lstStyle/>
+          <a:p>
+            <a:pPr algn="l"/>
+            <a:r>
+              <a:rPr sz="1300" b="1" i="1">
+                <a:solidFill>
+                  <a:srgbClr val="F5F5F5"/>
+                </a:solidFill>
+                <a:latin typeface="Calibri"/>
+              </a:rPr>
+              <a:t>Zambia's recovery proves that commodity luck and institutional reform are complements, not substitutes — copper created the window; the G20 deal made it a door.</a:t>
+            </a:r>
+          </a:p>
+        </p:txBody>
+      </p:sp>
+      <p:sp>
+        <p:nvSpPr>
+          <p:cNvPr id="15" name="TextBox 14"/>
+          <p:cNvSpPr txBox="1"/>
+          <p:nvPr/>
+        </p:nvSpPr>
+        <p:spPr>
+          <a:xfrm>
+            <a:off x="11430000" y="6309360"/>
+            <a:ext cx="640080" cy="365760"/>
+          </a:xfrm>
+          <a:prstGeom prst="rect">
+            <a:avLst/>
+          </a:prstGeom>
+          <a:noFill/>
+        </p:spPr>
+        <p:txBody>
+          <a:bodyPr wrap="square">
+            <a:spAutoFit/>
+          </a:bodyPr>
+          <a:lstStyle/>
+          <a:p>
+            <a:pPr algn="r"/>
+            <a:r>
+              <a:rPr sz="900" b="0" i="0">
+                <a:solidFill>
+                  <a:srgbClr val="B0BEC5"/>
+                </a:solidFill>
+                <a:latin typeface="Calibri"/>
+              </a:rPr>
+              <a:t>07</a:t>
+            </a:r>
+          </a:p>
+        </p:txBody>
+      </p:sp>
+    </p:spTree>
+  </p:cSld>
+  <p:clrMapOvr>
+    <a:masterClrMapping/>
+  </p:clrMapOvr>
+</p:sld>
+</file>
+
+<file path=ppt/slides/slide8.xml><?xml version="1.0" encoding="utf-8"?>
+<p:sld xmlns:a="http://schemas.openxmlformats.org/drawingml/2006/main" xmlns:p="http://schemas.openxmlformats.org/presentationml/2006/main" xmlns:r="http://schemas.openxmlformats.org/officeDocument/2006/relationships">
+  <p:cSld>
+    <p:bg>
+      <p:bgPr>
+        <a:solidFill>
+          <a:srgbClr val="0D1B2A"/>
+        </a:solidFill>
+        <a:effectLst/>
+      </p:bgPr>
+    </p:bg>
+    <p:spTree>
+      <p:nvGrpSpPr>
+        <p:cNvPr id="1" name=""/>
+        <p:cNvGrpSpPr/>
+        <p:nvPr/>
+      </p:nvGrpSpPr>
+      <p:grpSpPr/>
+      <p:sp>
+        <p:nvSpPr>
+          <p:cNvPr id="2" name="Rectangle 1"/>
+          <p:cNvSpPr/>
+          <p:nvPr/>
+        </p:nvSpPr>
+        <p:spPr>
+          <a:xfrm>
+            <a:off x="0" y="0"/>
+            <a:ext cx="109728" cy="6858000"/>
           </a:xfrm>
           <a:prstGeom prst="rect">
             <a:avLst/>
@@ -8208,52 +8832,14 @@
       </p:sp>
       <p:sp>
         <p:nvSpPr>
-          <p:cNvPr id="7" name="TextBox 6"/>
-          <p:cNvSpPr txBox="1"/>
-          <p:nvPr/>
-        </p:nvSpPr>
-        <p:spPr>
-          <a:xfrm>
-            <a:off x="457200" y="1371600"/>
-            <a:ext cx="5669280" cy="4754880"/>
-          </a:xfrm>
-          <a:prstGeom prst="rect">
-            <a:avLst/>
-          </a:prstGeom>
-          <a:noFill/>
-        </p:spPr>
-        <p:txBody>
-          <a:bodyPr wrap="square">
-            <a:spAutoFit/>
-          </a:bodyPr>
-          <a:lstStyle/>
-          <a:p>
-            <a:pPr algn="l"/>
-            <a:r>
-              <a:rPr sz="1050" b="0" i="0">
-                <a:solidFill>
-                  <a:srgbClr val="F5F5F5"/>
-                </a:solidFill>
-                <a:latin typeface="Calibri"/>
-              </a:rPr>
-              <a:t>Between 2015 and 2019, Zambia borrowed heavily against future copper revenues, tripling its external debt from $12.3 B to $29.1 B. When COVID-19 struck in 2020, revenues collapsed and Zambia became the first African sovereign pandemic-era default. The question we needed to answer: was the recovery that followed real — and sustainable?
-In 2021, a global copper price supercycle delivered a fiscal windfall. The current account swung 15.5 percentage points — from a -3.6 % deficit to a +11.9 % surplus — before the restructuring deal had even been negotiated. Copper created the breathing room.
-But breathing room is not the same as structural reform. In November 2023, Zambia finalised the G20 Common Framework deal, becoming the first country to complete the process. The results were clear: PPG debt service fell from 12.5 % to 3 % of exports; GDP growth held at 5.2–5.4 % even as copper prices cooled; and FDI inflows reached a decade-high 9.32 % of GDP in 2024.
-The verdict: both were necessary. Commodity luck created the window. Institutional reform made it a door. Going forward, Zambia's challenge is to diversify beyond copper — into green energy, agriculture, and manufacturing — before the next commodity downcycle tests the depth of these institutional gains.</a:t>
-            </a:r>
-          </a:p>
-        </p:txBody>
-      </p:sp>
-      <p:sp>
-        <p:nvSpPr>
-          <p:cNvPr id="8" name="Rectangle 7"/>
+          <p:cNvPr id="3" name="Rectangle 2"/>
           <p:cNvSpPr/>
           <p:nvPr/>
         </p:nvSpPr>
         <p:spPr>
           <a:xfrm>
-            <a:off x="6400800" y="1371600"/>
-            <a:ext cx="5394960" cy="2194560"/>
+            <a:off x="109728" y="0"/>
+            <a:ext cx="12079224" cy="54864"/>
           </a:xfrm>
           <a:prstGeom prst="rect">
             <a:avLst/>
@@ -8289,14 +8875,14 @@
       </p:sp>
       <p:sp>
         <p:nvSpPr>
-          <p:cNvPr id="9" name="TextBox 8"/>
+          <p:cNvPr id="4" name="TextBox 3"/>
           <p:cNvSpPr txBox="1"/>
           <p:nvPr/>
         </p:nvSpPr>
         <p:spPr>
           <a:xfrm>
-            <a:off x="6537960" y="1463040"/>
-            <a:ext cx="2743200" cy="320040"/>
+            <a:off x="457200" y="228600"/>
+            <a:ext cx="8229600" cy="365760"/>
           </a:xfrm>
           <a:prstGeom prst="rect">
             <a:avLst/>
@@ -8313,25 +8899,25 @@
             <a:r>
               <a:rPr sz="900" b="1" i="0">
                 <a:solidFill>
-                  <a:srgbClr val="E88C00"/>
-                </a:solidFill>
-                <a:latin typeface="Calibri"/>
-              </a:rPr>
-              <a:t>BIG IDEA</a:t>
-            </a:r>
-          </a:p>
-        </p:txBody>
-      </p:sp>
-      <p:sp>
-        <p:nvSpPr>
-          <p:cNvPr id="10" name="TextBox 9"/>
+                  <a:srgbClr val="B0BEC5"/>
+                </a:solidFill>
+                <a:latin typeface="Calibri"/>
+              </a:rPr>
+              <a:t>APPENDIX  ·  3-MINUTE STORY &amp; BIG IDEA</a:t>
+            </a:r>
+          </a:p>
+        </p:txBody>
+      </p:sp>
+      <p:sp>
+        <p:nvSpPr>
+          <p:cNvPr id="5" name="TextBox 4"/>
           <p:cNvSpPr txBox="1"/>
           <p:nvPr/>
         </p:nvSpPr>
         <p:spPr>
           <a:xfrm>
-            <a:off x="6537960" y="1828800"/>
-            <a:ext cx="5120640" cy="1600200"/>
+            <a:off x="457200" y="594360"/>
+            <a:ext cx="10972800" cy="640080"/>
           </a:xfrm>
           <a:prstGeom prst="rect">
             <a:avLst/>
@@ -8346,27 +8932,70 @@
           <a:p>
             <a:pPr algn="l"/>
             <a:r>
-              <a:rPr sz="1100" b="0" i="1">
+              <a:rPr sz="2000" b="1">
                 <a:solidFill>
                   <a:srgbClr val="F5F5F5"/>
                 </a:solidFill>
                 <a:latin typeface="Calibri"/>
               </a:rPr>
-              <a:t>Zambia's G20 Common Framework debt restructuring converted a copper-driven fiscal windfall into a durable institutional framework — slashing PPG debt service from 12.5 % to 3 % of exports, sustaining 5 %+ GDP growth, and attracting record FDI of 9.32 % of GDP in 2024 — proving that commodity luck alone cannot anchor a recovery without credible institutional reform.</a:t>
-            </a:r>
-          </a:p>
-        </p:txBody>
-      </p:sp>
-      <p:sp>
-        <p:nvSpPr>
-          <p:cNvPr id="11" name="TextBox 10"/>
+              <a:t>Storytelling with Data — Written Narrative</a:t>
+            </a:r>
+          </a:p>
+        </p:txBody>
+      </p:sp>
+      <p:sp>
+        <p:nvSpPr>
+          <p:cNvPr id="6" name="Rectangle 5"/>
+          <p:cNvSpPr/>
+          <p:nvPr/>
+        </p:nvSpPr>
+        <p:spPr>
+          <a:xfrm>
+            <a:off x="457200" y="1234440"/>
+            <a:ext cx="11247120" cy="19050"/>
+          </a:xfrm>
+          <a:prstGeom prst="rect">
+            <a:avLst/>
+          </a:prstGeom>
+          <a:solidFill>
+            <a:srgbClr val="B0BEC5"/>
+          </a:solidFill>
+          <a:ln>
+            <a:noFill/>
+          </a:ln>
+        </p:spPr>
+        <p:style>
+          <a:lnRef idx="1">
+            <a:schemeClr val="accent1"/>
+          </a:lnRef>
+          <a:fillRef idx="3">
+            <a:schemeClr val="accent1"/>
+          </a:fillRef>
+          <a:effectRef idx="2">
+            <a:schemeClr val="accent1"/>
+          </a:effectRef>
+          <a:fontRef idx="minor">
+            <a:schemeClr val="lt1"/>
+          </a:fontRef>
+        </p:style>
+        <p:txBody>
+          <a:bodyPr rtlCol="0" anchor="ctr"/>
+          <a:lstStyle/>
+          <a:p>
+            <a:pPr algn="ctr"/>
+          </a:p>
+        </p:txBody>
+      </p:sp>
+      <p:sp>
+        <p:nvSpPr>
+          <p:cNvPr id="7" name="TextBox 6"/>
           <p:cNvSpPr txBox="1"/>
           <p:nvPr/>
         </p:nvSpPr>
         <p:spPr>
           <a:xfrm>
-            <a:off x="6537960" y="3703320"/>
-            <a:ext cx="5120640" cy="320040"/>
+            <a:off x="457200" y="1371600"/>
+            <a:ext cx="5669280" cy="4754880"/>
           </a:xfrm>
           <a:prstGeom prst="rect">
             <a:avLst/>
@@ -8381,27 +9010,73 @@
           <a:p>
             <a:pPr algn="l"/>
             <a:r>
-              <a:rPr sz="1000" b="1" i="0">
-                <a:solidFill>
-                  <a:srgbClr val="2ECC71"/>
-                </a:solidFill>
-                <a:latin typeface="Calibri"/>
-              </a:rPr>
-              <a:t>✓  Unique point of view</a:t>
-            </a:r>
-          </a:p>
-        </p:txBody>
-      </p:sp>
-      <p:sp>
-        <p:nvSpPr>
-          <p:cNvPr id="12" name="TextBox 11"/>
+              <a:rPr sz="1050" b="0" i="0">
+                <a:solidFill>
+                  <a:srgbClr val="F5F5F5"/>
+                </a:solidFill>
+                <a:latin typeface="Calibri"/>
+              </a:rPr>
+              <a:t>Between 2015 and 2019, Zambia borrowed heavily against future copper revenues, tripling its external debt from $12.3 B to $29.1 B. When COVID-19 struck in 2020, revenues collapsed and Zambia became the first African sovereign pandemic-era default. The question we needed to answer: was the recovery that followed real — and sustainable?
+In 2021, a global copper price supercycle delivered a fiscal windfall. The current account swung 15.5 percentage points — from -3.6 % to +11.9 % of GDP — before the restructuring deal had even been negotiated. Copper created the breathing room.
+But breathing room is not the same as structural reform. In November 2023, Zambia finalised the G20 Common Framework deal, becoming the first country to complete the process. PPG debt service fell from 12.5 % to 3 % of exports; GDP growth held at 5.2–5.4 % even as copper prices cooled; FDI reached a decade-high 9.32 % of GDP.
+The verdict: both were necessary. Commodity luck created the window. Institutional reform made it a door. Zambia's challenge now is to diversify beyond copper — into green energy, agriculture, and manufacturing — before the next downcycle.</a:t>
+            </a:r>
+          </a:p>
+        </p:txBody>
+      </p:sp>
+      <p:sp>
+        <p:nvSpPr>
+          <p:cNvPr id="8" name="Rectangle 7"/>
+          <p:cNvSpPr/>
+          <p:nvPr/>
+        </p:nvSpPr>
+        <p:spPr>
+          <a:xfrm>
+            <a:off x="6400800" y="1371600"/>
+            <a:ext cx="5394960" cy="2194560"/>
+          </a:xfrm>
+          <a:prstGeom prst="rect">
+            <a:avLst/>
+          </a:prstGeom>
+          <a:solidFill>
+            <a:srgbClr val="1E3A5F"/>
+          </a:solidFill>
+          <a:ln>
+            <a:noFill/>
+          </a:ln>
+        </p:spPr>
+        <p:style>
+          <a:lnRef idx="1">
+            <a:schemeClr val="accent1"/>
+          </a:lnRef>
+          <a:fillRef idx="3">
+            <a:schemeClr val="accent1"/>
+          </a:fillRef>
+          <a:effectRef idx="2">
+            <a:schemeClr val="accent1"/>
+          </a:effectRef>
+          <a:fontRef idx="minor">
+            <a:schemeClr val="lt1"/>
+          </a:fontRef>
+        </p:style>
+        <p:txBody>
+          <a:bodyPr rtlCol="0" anchor="ctr"/>
+          <a:lstStyle/>
+          <a:p>
+            <a:pPr algn="ctr"/>
+          </a:p>
+        </p:txBody>
+      </p:sp>
+      <p:sp>
+        <p:nvSpPr>
+          <p:cNvPr id="9" name="TextBox 8"/>
           <p:cNvSpPr txBox="1"/>
           <p:nvPr/>
         </p:nvSpPr>
         <p:spPr>
           <a:xfrm>
-            <a:off x="6537960" y="4050792"/>
-            <a:ext cx="5120640" cy="320040"/>
+            <a:off x="6537960" y="1463040"/>
+            <a:ext cx="2743200" cy="292608"/>
           </a:xfrm>
           <a:prstGeom prst="rect">
             <a:avLst/>
@@ -8416,27 +9091,27 @@
           <a:p>
             <a:pPr algn="l"/>
             <a:r>
-              <a:rPr sz="1000" b="1" i="0">
-                <a:solidFill>
-                  <a:srgbClr val="2ECC71"/>
-                </a:solidFill>
-                <a:latin typeface="Calibri"/>
-              </a:rPr>
-              <a:t>✓  Conveys what's at stake</a:t>
-            </a:r>
-          </a:p>
-        </p:txBody>
-      </p:sp>
-      <p:sp>
-        <p:nvSpPr>
-          <p:cNvPr id="13" name="TextBox 12"/>
+              <a:rPr sz="900" b="1" i="0">
+                <a:solidFill>
+                  <a:srgbClr val="E88C00"/>
+                </a:solidFill>
+                <a:latin typeface="Calibri"/>
+              </a:rPr>
+              <a:t>BIG IDEA</a:t>
+            </a:r>
+          </a:p>
+        </p:txBody>
+      </p:sp>
+      <p:sp>
+        <p:nvSpPr>
+          <p:cNvPr id="10" name="TextBox 9"/>
           <p:cNvSpPr txBox="1"/>
           <p:nvPr/>
         </p:nvSpPr>
         <p:spPr>
           <a:xfrm>
-            <a:off x="6537960" y="4398264"/>
-            <a:ext cx="5120640" cy="320040"/>
+            <a:off x="6537960" y="1828800"/>
+            <a:ext cx="5120640" cy="1600200"/>
           </a:xfrm>
           <a:prstGeom prst="rect">
             <a:avLst/>
@@ -8451,27 +9126,27 @@
           <a:p>
             <a:pPr algn="l"/>
             <a:r>
-              <a:rPr sz="1000" b="1" i="0">
-                <a:solidFill>
-                  <a:srgbClr val="2ECC71"/>
-                </a:solidFill>
-                <a:latin typeface="Calibri"/>
-              </a:rPr>
-              <a:t>✓  Complete sentence</a:t>
-            </a:r>
-          </a:p>
-        </p:txBody>
-      </p:sp>
-      <p:sp>
-        <p:nvSpPr>
-          <p:cNvPr id="14" name="TextBox 13"/>
+              <a:rPr sz="1100" b="0" i="1">
+                <a:solidFill>
+                  <a:srgbClr val="F5F5F5"/>
+                </a:solidFill>
+                <a:latin typeface="Calibri"/>
+              </a:rPr>
+              <a:t>Zambia's G20 Common Framework debt restructuring converted a copper-driven fiscal windfall into a durable institutional framework — slashing PPG debt service from 12.5 % to 3 % of exports, sustaining 5 %+ GDP growth, and attracting record FDI of 9.32 % of GDP in 2024 — proving that commodity luck alone cannot anchor a recovery without credible institutional reform.</a:t>
+            </a:r>
+          </a:p>
+        </p:txBody>
+      </p:sp>
+      <p:sp>
+        <p:nvSpPr>
+          <p:cNvPr id="11" name="TextBox 10"/>
           <p:cNvSpPr txBox="1"/>
           <p:nvPr/>
         </p:nvSpPr>
         <p:spPr>
           <a:xfrm>
-            <a:off x="11430000" y="6309360"/>
-            <a:ext cx="640080" cy="365760"/>
+            <a:off x="6537960" y="3703320"/>
+            <a:ext cx="5120640" cy="320040"/>
           </a:xfrm>
           <a:prstGeom prst="rect">
             <a:avLst/>
@@ -8484,6 +9159,111 @@
           </a:bodyPr>
           <a:lstStyle/>
           <a:p>
+            <a:pPr algn="l"/>
+            <a:r>
+              <a:rPr sz="1000" b="1" i="0">
+                <a:solidFill>
+                  <a:srgbClr val="2ECC71"/>
+                </a:solidFill>
+                <a:latin typeface="Calibri"/>
+              </a:rPr>
+              <a:t>✓  Unique point of view</a:t>
+            </a:r>
+          </a:p>
+        </p:txBody>
+      </p:sp>
+      <p:sp>
+        <p:nvSpPr>
+          <p:cNvPr id="12" name="TextBox 11"/>
+          <p:cNvSpPr txBox="1"/>
+          <p:nvPr/>
+        </p:nvSpPr>
+        <p:spPr>
+          <a:xfrm>
+            <a:off x="6537960" y="4050792"/>
+            <a:ext cx="5120640" cy="320040"/>
+          </a:xfrm>
+          <a:prstGeom prst="rect">
+            <a:avLst/>
+          </a:prstGeom>
+          <a:noFill/>
+        </p:spPr>
+        <p:txBody>
+          <a:bodyPr wrap="square">
+            <a:spAutoFit/>
+          </a:bodyPr>
+          <a:lstStyle/>
+          <a:p>
+            <a:pPr algn="l"/>
+            <a:r>
+              <a:rPr sz="1000" b="1" i="0">
+                <a:solidFill>
+                  <a:srgbClr val="2ECC71"/>
+                </a:solidFill>
+                <a:latin typeface="Calibri"/>
+              </a:rPr>
+              <a:t>✓  Conveys what's at stake</a:t>
+            </a:r>
+          </a:p>
+        </p:txBody>
+      </p:sp>
+      <p:sp>
+        <p:nvSpPr>
+          <p:cNvPr id="13" name="TextBox 12"/>
+          <p:cNvSpPr txBox="1"/>
+          <p:nvPr/>
+        </p:nvSpPr>
+        <p:spPr>
+          <a:xfrm>
+            <a:off x="6537960" y="4398264"/>
+            <a:ext cx="5120640" cy="320040"/>
+          </a:xfrm>
+          <a:prstGeom prst="rect">
+            <a:avLst/>
+          </a:prstGeom>
+          <a:noFill/>
+        </p:spPr>
+        <p:txBody>
+          <a:bodyPr wrap="square">
+            <a:spAutoFit/>
+          </a:bodyPr>
+          <a:lstStyle/>
+          <a:p>
+            <a:pPr algn="l"/>
+            <a:r>
+              <a:rPr sz="1000" b="1" i="0">
+                <a:solidFill>
+                  <a:srgbClr val="2ECC71"/>
+                </a:solidFill>
+                <a:latin typeface="Calibri"/>
+              </a:rPr>
+              <a:t>✓  Complete sentence</a:t>
+            </a:r>
+          </a:p>
+        </p:txBody>
+      </p:sp>
+      <p:sp>
+        <p:nvSpPr>
+          <p:cNvPr id="14" name="TextBox 13"/>
+          <p:cNvSpPr txBox="1"/>
+          <p:nvPr/>
+        </p:nvSpPr>
+        <p:spPr>
+          <a:xfrm>
+            <a:off x="11430000" y="6309360"/>
+            <a:ext cx="640080" cy="365760"/>
+          </a:xfrm>
+          <a:prstGeom prst="rect">
+            <a:avLst/>
+          </a:prstGeom>
+          <a:noFill/>
+        </p:spPr>
+        <p:txBody>
+          <a:bodyPr wrap="square">
+            <a:spAutoFit/>
+          </a:bodyPr>
+          <a:lstStyle/>
+          <a:p>
             <a:pPr algn="r"/>
             <a:r>
               <a:rPr sz="900" b="0" i="0">
@@ -8492,7 +9272,7 @@
                 </a:solidFill>
                 <a:latin typeface="Calibri"/>
               </a:rPr>
-              <a:t>07</a:t>
+              <a:t>08</a:t>
             </a:r>
           </a:p>
         </p:txBody>

--- a/Zambia_Economic_Recovery_Presentation.pptx
+++ b/Zambia_Economic_Recovery_Presentation.pptx
@@ -260,7 +260,7 @@
           <a:lstStyle/>
           <a:p>
             <a:pPr>
-              <a:defRPr sz="800" b="0">
+              <a:defRPr sz="700">
                 <a:latin typeface="Calibri"/>
               </a:defRPr>
             </a:pPr>
@@ -287,7 +287,7 @@
           <a:lstStyle/>
           <a:p>
             <a:pPr>
-              <a:defRPr sz="800" b="0">
+              <a:defRPr sz="700">
                 <a:latin typeface="Calibri"/>
               </a:defRPr>
             </a:pPr>
@@ -339,9 +339,6 @@
             </c:strRef>
           </c:tx>
           <c:spPr>
-            <a:solidFill>
-              <a:srgbClr val="2ECC71"/>
-            </a:solidFill>
             <a:ln w="25400">
               <a:solidFill>
                 <a:srgbClr val="2ECC71"/>
@@ -350,16 +347,6 @@
           </c:spPr>
           <c:marker>
             <c:symbol val="none"/>
-            <c:spPr>
-              <a:solidFill>
-                <a:srgbClr val="2ECC71"/>
-              </a:solidFill>
-              <a:ln>
-                <a:solidFill>
-                  <a:srgbClr val="2ECC71"/>
-                </a:solidFill>
-              </a:ln>
-            </c:spPr>
           </c:marker>
           <c:cat>
             <c:strRef>
@@ -460,7 +447,7 @@
           <a:lstStyle/>
           <a:p>
             <a:pPr>
-              <a:defRPr sz="800" b="0">
+              <a:defRPr sz="700">
                 <a:latin typeface="Calibri"/>
               </a:defRPr>
             </a:pPr>
@@ -487,7 +474,7 @@
           <a:lstStyle/>
           <a:p>
             <a:pPr>
-              <a:defRPr sz="800" b="0">
+              <a:defRPr sz="700">
                 <a:latin typeface="Calibri"/>
               </a:defRPr>
             </a:pPr>
@@ -695,7 +682,7 @@
           <a:lstStyle/>
           <a:p>
             <a:pPr>
-              <a:defRPr sz="800" b="0">
+              <a:defRPr sz="700">
                 <a:latin typeface="Calibri"/>
               </a:defRPr>
             </a:pPr>
@@ -722,7 +709,7 @@
           <a:lstStyle/>
           <a:p>
             <a:pPr>
-              <a:defRPr sz="800" b="0">
+              <a:defRPr sz="700">
                 <a:latin typeface="Calibri"/>
               </a:defRPr>
             </a:pPr>
@@ -896,7 +883,7 @@
           <a:lstStyle/>
           <a:p>
             <a:pPr>
-              <a:defRPr sz="800" b="0">
+              <a:defRPr sz="700">
                 <a:latin typeface="Calibri"/>
               </a:defRPr>
             </a:pPr>
@@ -923,162 +910,7 @@
           <a:lstStyle/>
           <a:p>
             <a:pPr>
-              <a:defRPr sz="800" b="0">
-                <a:latin typeface="Calibri"/>
-              </a:defRPr>
-            </a:pPr>
-          </a:p>
-        </c:txPr>
-        <c:crossAx val="-2068027336"/>
-        <c:crosses val="autoZero"/>
-      </c:valAx>
-    </c:plotArea>
-    <c:dispBlanksAs val="gap"/>
-  </c:chart>
-  <c:txPr>
-    <a:bodyPr/>
-    <a:lstStyle/>
-    <a:p>
-      <a:pPr>
-        <a:defRPr sz="1800"/>
-      </a:pPr>
-      <a:endParaRPr lang="en-US"/>
-    </a:p>
-  </c:txPr>
-  <c:externalData r:id="rId1">
-    <c:autoUpdate val="0"/>
-  </c:externalData>
-</c:chartSpace>
-</file>
-
-<file path=ppt/charts/chart5.xml><?xml version="1.0" encoding="utf-8"?>
-<c:chartSpace xmlns:c="http://schemas.openxmlformats.org/drawingml/2006/chart" xmlns:a="http://schemas.openxmlformats.org/drawingml/2006/main" xmlns:r="http://schemas.openxmlformats.org/officeDocument/2006/relationships">
-  <c:date1904 val="0"/>
-  <c:chart>
-    <c:autoTitleDeleted val="0"/>
-    <c:plotArea>
-      <c:barChart>
-        <c:barDir val="col"/>
-        <c:grouping val="clustered"/>
-        <c:ser>
-          <c:idx val="0"/>
-          <c:order val="0"/>
-          <c:tx>
-            <c:strRef>
-              <c:f>Sheet1!$B$1</c:f>
-              <c:strCache>
-                <c:ptCount val="1"/>
-                <c:pt idx="0">
-                  <c:v>Debt Service % Exports</c:v>
-                </c:pt>
-              </c:strCache>
-            </c:strRef>
-          </c:tx>
-          <c:spPr>
-            <a:solidFill>
-              <a:srgbClr val="E88C00"/>
-            </a:solidFill>
-            <a:ln>
-              <a:solidFill>
-                <a:srgbClr val="E88C00"/>
-              </a:solidFill>
-            </a:ln>
-          </c:spPr>
-          <c:dPt>
-            <c:idx val="0"/>
-            <c:spPr>
-              <a:solidFill>
-                <a:srgbClr val="E74C3C"/>
-              </a:solidFill>
-            </c:spPr>
-          </c:dPt>
-          <c:dPt>
-            <c:idx val="1"/>
-            <c:spPr>
-              <a:solidFill>
-                <a:srgbClr val="2ECC71"/>
-              </a:solidFill>
-            </c:spPr>
-          </c:dPt>
-          <c:cat>
-            <c:strRef>
-              <c:f>Sheet1!$A$2:$A$3</c:f>
-              <c:strCache>
-                <c:ptCount val="2"/>
-                <c:pt idx="0">
-                  <c:v>Pre-restructuring
-(2020)</c:v>
-                </c:pt>
-                <c:pt idx="1">
-                  <c:v>Post-restructuring
-(2024)</c:v>
-                </c:pt>
-              </c:strCache>
-            </c:strRef>
-          </c:cat>
-          <c:val>
-            <c:numRef>
-              <c:f>Sheet1!$B$2:$B$3</c:f>
-              <c:numCache>
-                <c:formatCode>General</c:formatCode>
-                <c:ptCount val="2"/>
-                <c:pt idx="0">
-                  <c:v>12.5</c:v>
-                </c:pt>
-                <c:pt idx="1">
-                  <c:v>3.0</c:v>
-                </c:pt>
-              </c:numCache>
-            </c:numRef>
-          </c:val>
-        </c:ser>
-        <c:gapWidth val="100"/>
-        <c:axId val="-2068027336"/>
-        <c:axId val="-2113994440"/>
-      </c:barChart>
-      <c:catAx>
-        <c:axId val="-2068027336"/>
-        <c:scaling>
-          <c:orientation val="minMax"/>
-        </c:scaling>
-        <c:delete val="0"/>
-        <c:axPos val="b"/>
-        <c:majorTickMark val="out"/>
-        <c:minorTickMark val="none"/>
-        <c:tickLblPos val="nextTo"/>
-        <c:txPr>
-          <a:bodyPr/>
-          <a:lstStyle/>
-          <a:p>
-            <a:pPr>
-              <a:defRPr sz="800" b="0">
-                <a:latin typeface="Calibri"/>
-              </a:defRPr>
-            </a:pPr>
-          </a:p>
-        </c:txPr>
-        <c:crossAx val="-2113994440"/>
-        <c:crosses val="autoZero"/>
-        <c:auto val="1"/>
-        <c:lblAlgn val="ctr"/>
-        <c:lblOffset val="100"/>
-        <c:noMultiLvlLbl val="0"/>
-      </c:catAx>
-      <c:valAx>
-        <c:axId val="-2113994440"/>
-        <c:scaling/>
-        <c:delete val="0"/>
-        <c:axPos val="l"/>
-        <c:majorGridlines/>
-        <c:majorTickMark val="out"/>
-        <c:minorTickMark val="none"/>
-        <c:tickLblPos val="nextTo"/>
-        <c:txPr>
-          <a:bodyPr/>
-          <a:lstStyle/>
-          <a:p>
-            <a:pPr>
-              <a:defRPr sz="800" b="0">
+              <a:defRPr sz="700">
                 <a:latin typeface="Calibri"/>
               </a:defRPr>
             </a:pPr>
@@ -4614,7 +4446,7 @@
         <p:spPr>
           <a:xfrm>
             <a:off x="457200" y="640080"/>
-            <a:ext cx="10972800" cy="822960"/>
+            <a:ext cx="10972800" cy="1005840"/>
           </a:xfrm>
           <a:prstGeom prst="rect">
             <a:avLst/>
@@ -4629,7 +4461,7 @@
           <a:p>
             <a:pPr algn="l"/>
             <a:r>
-              <a:rPr sz="2600" b="1">
+              <a:rPr sz="2800" b="1">
                 <a:solidFill>
                   <a:srgbClr val="F5F5F5"/>
                 </a:solidFill>
@@ -4648,7 +4480,7 @@
         </p:nvSpPr>
         <p:spPr>
           <a:xfrm>
-            <a:off x="457200" y="1508760"/>
+            <a:off x="457200" y="1600200"/>
             <a:ext cx="5029200" cy="19050"/>
           </a:xfrm>
           <a:prstGeom prst="rect">
@@ -4691,8 +4523,8 @@
         </p:nvSpPr>
         <p:spPr>
           <a:xfrm>
-            <a:off x="457200" y="1645920"/>
-            <a:ext cx="5486400" cy="2560320"/>
+            <a:off x="457200" y="1828800"/>
+            <a:ext cx="5486400" cy="2743200"/>
           </a:xfrm>
           <a:prstGeom prst="rect">
             <a:avLst/>
@@ -4707,19 +4539,19 @@
           <a:p>
             <a:pPr algn="l"/>
             <a:r>
-              <a:rPr sz="1100" b="0">
+              <a:rPr sz="1200" b="0">
                 <a:solidFill>
                   <a:srgbClr val="F5F5F5"/>
                 </a:solidFill>
                 <a:latin typeface="Calibri"/>
               </a:rPr>
-              <a:t>Between 2015 and 2019, Zambia's external debt tripled — from $12.3 B to $29.1 B — as the government borrowed against future copper revenues. When COVID-19 struck in 2020, revenues collapsed. In November 2020 Zambia became the first African sovereign pandemic-era default, missing a $42.5 M Eurobond coupon payment.</a:t>
+              <a:t>Between 2015 and 2019, Zambia's external debt tripled — from $12.3 B to $29.1 B — as the government borrowed heavily against future copper revenues. When COVID-19 struck in 2020, the fiscal position collapsed. In November 2020, Zambia became the first African sovereign to default during the pandemic era, missing a $42.5 M Eurobond coupon payment.</a:t>
             </a:r>
           </a:p>
           <a:p>
             <a:pPr algn="l"/>
             <a:r>
-              <a:rPr sz="1100" b="0">
+              <a:rPr sz="1200" b="0">
                 <a:solidFill>
                   <a:srgbClr val="F5F5F5"/>
                 </a:solidFill>
@@ -4731,82 +4563,51 @@
           <a:p>
             <a:pPr algn="l"/>
             <a:r>
-              <a:rPr sz="1100" b="0">
+              <a:rPr sz="1200" b="0">
                 <a:solidFill>
                   <a:srgbClr val="B0BEC5"/>
                 </a:solidFill>
                 <a:latin typeface="Calibri"/>
               </a:rPr>
-              <a:t>  •  Copper-dependent export base: no buffer against price shocks</a:t>
+              <a:t>Two structural vulnerabilities converged:</a:t>
             </a:r>
           </a:p>
           <a:p>
             <a:pPr algn="l"/>
             <a:r>
-              <a:rPr sz="1100" b="0">
+              <a:rPr sz="1200" b="0">
                 <a:solidFill>
                   <a:srgbClr val="B0BEC5"/>
                 </a:solidFill>
                 <a:latin typeface="Calibri"/>
               </a:rPr>
-              <a:t>  •  Debt service consumed 12.5 % of all export earnings</a:t>
-            </a:r>
-          </a:p>
-        </p:txBody>
-      </p:sp>
-      <p:sp>
-        <p:nvSpPr>
-          <p:cNvPr id="8" name="Rectangle 7"/>
-          <p:cNvSpPr/>
-          <p:nvPr/>
-        </p:nvSpPr>
-        <p:spPr>
-          <a:xfrm>
-            <a:off x="457200" y="4754880"/>
-            <a:ext cx="5303520" cy="868680"/>
-          </a:xfrm>
-          <a:prstGeom prst="rect">
-            <a:avLst/>
-          </a:prstGeom>
-          <a:solidFill>
-            <a:srgbClr val="1E3A5F"/>
-          </a:solidFill>
-          <a:ln>
-            <a:noFill/>
-          </a:ln>
-        </p:spPr>
-        <p:style>
-          <a:lnRef idx="1">
-            <a:schemeClr val="accent1"/>
-          </a:lnRef>
-          <a:fillRef idx="3">
-            <a:schemeClr val="accent1"/>
-          </a:fillRef>
-          <a:effectRef idx="2">
-            <a:schemeClr val="accent1"/>
-          </a:effectRef>
-          <a:fontRef idx="minor">
-            <a:schemeClr val="lt1"/>
-          </a:fontRef>
-        </p:style>
-        <p:txBody>
-          <a:bodyPr rtlCol="0" anchor="ctr"/>
-          <a:lstStyle/>
-          <a:p>
-            <a:pPr algn="ctr"/>
-          </a:p>
-        </p:txBody>
-      </p:sp>
-      <p:sp>
-        <p:nvSpPr>
-          <p:cNvPr id="9" name="TextBox 8"/>
+              <a:t>  •  A copper-dependent export base unable to absorb a commodity price shock</a:t>
+            </a:r>
+          </a:p>
+          <a:p>
+            <a:pPr algn="l"/>
+            <a:r>
+              <a:rPr sz="1200" b="0">
+                <a:solidFill>
+                  <a:srgbClr val="B0BEC5"/>
+                </a:solidFill>
+                <a:latin typeface="Calibri"/>
+              </a:rPr>
+              <a:t>  •  Debt service obligations that consumed 12.5 % of all export earnings</a:t>
+            </a:r>
+          </a:p>
+        </p:txBody>
+      </p:sp>
+      <p:sp>
+        <p:nvSpPr>
+          <p:cNvPr id="8" name="TextBox 7"/>
           <p:cNvSpPr txBox="1"/>
           <p:nvPr/>
         </p:nvSpPr>
         <p:spPr>
           <a:xfrm>
-            <a:off x="594360" y="4846320"/>
-            <a:ext cx="5029200" cy="320040"/>
+            <a:off x="6583680" y="1508760"/>
+            <a:ext cx="5212080" cy="274320"/>
           </a:xfrm>
           <a:prstGeom prst="rect">
             <a:avLst/>
@@ -4821,133 +4622,28 @@
           <a:p>
             <a:pPr algn="l"/>
             <a:r>
-              <a:rPr sz="900" b="0" i="0">
+              <a:rPr sz="800" b="1" i="0">
                 <a:solidFill>
                   <a:srgbClr val="B0BEC5"/>
                 </a:solidFill>
                 <a:latin typeface="Calibri"/>
               </a:rPr>
-              <a:t>PPG DEBT SERVICE AT PEAK</a:t>
-            </a:r>
-          </a:p>
-        </p:txBody>
-      </p:sp>
-      <p:sp>
-        <p:nvSpPr>
-          <p:cNvPr id="10" name="TextBox 9"/>
-          <p:cNvSpPr txBox="1"/>
-          <p:nvPr/>
-        </p:nvSpPr>
-        <p:spPr>
-          <a:xfrm>
-            <a:off x="594360" y="5166360"/>
-            <a:ext cx="1828800" cy="365760"/>
-          </a:xfrm>
-          <a:prstGeom prst="rect">
-            <a:avLst/>
-          </a:prstGeom>
-          <a:noFill/>
-        </p:spPr>
-        <p:txBody>
-          <a:bodyPr wrap="square">
-            <a:spAutoFit/>
-          </a:bodyPr>
-          <a:lstStyle/>
-          <a:p>
-            <a:pPr algn="l"/>
-            <a:r>
-              <a:rPr sz="2000" b="1" i="0">
-                <a:solidFill>
-                  <a:srgbClr val="E74C3C"/>
-                </a:solidFill>
-                <a:latin typeface="Calibri"/>
-              </a:rPr>
-              <a:t>12.5%</a:t>
-            </a:r>
-          </a:p>
-        </p:txBody>
-      </p:sp>
-      <p:sp>
-        <p:nvSpPr>
-          <p:cNvPr id="11" name="TextBox 10"/>
-          <p:cNvSpPr txBox="1"/>
-          <p:nvPr/>
-        </p:nvSpPr>
-        <p:spPr>
-          <a:xfrm>
-            <a:off x="2560320" y="5230368"/>
-            <a:ext cx="2926080" cy="292608"/>
-          </a:xfrm>
-          <a:prstGeom prst="rect">
-            <a:avLst/>
-          </a:prstGeom>
-          <a:noFill/>
-        </p:spPr>
-        <p:txBody>
-          <a:bodyPr wrap="square">
-            <a:spAutoFit/>
-          </a:bodyPr>
-          <a:lstStyle/>
-          <a:p>
-            <a:pPr algn="l"/>
-            <a:r>
-              <a:rPr sz="1000" b="0" i="0">
-                <a:solidFill>
-                  <a:srgbClr val="B0BEC5"/>
-                </a:solidFill>
-                <a:latin typeface="Calibri"/>
-              </a:rPr>
-              <a:t>of total export earnings</a:t>
-            </a:r>
-          </a:p>
-        </p:txBody>
-      </p:sp>
-      <p:sp>
-        <p:nvSpPr>
-          <p:cNvPr id="12" name="TextBox 11"/>
-          <p:cNvSpPr txBox="1"/>
-          <p:nvPr/>
-        </p:nvSpPr>
-        <p:spPr>
-          <a:xfrm>
-            <a:off x="6035040" y="1188720"/>
-            <a:ext cx="5943600" cy="320040"/>
-          </a:xfrm>
-          <a:prstGeom prst="rect">
-            <a:avLst/>
-          </a:prstGeom>
-          <a:noFill/>
-        </p:spPr>
-        <p:txBody>
-          <a:bodyPr wrap="square">
-            <a:spAutoFit/>
-          </a:bodyPr>
-          <a:lstStyle/>
-          <a:p>
-            <a:pPr algn="l"/>
-            <a:r>
-              <a:rPr sz="900" b="1" i="0">
-                <a:solidFill>
-                  <a:srgbClr val="B0BEC5"/>
-                </a:solidFill>
-                <a:latin typeface="Calibri"/>
-              </a:rPr>
-              <a:t>EXTERNAL DEBT  ($ billions)  2015 – 2024</a:t>
+              <a:t>EXTERNAL DEBT  ($ billions)  ·  2015–2024</a:t>
             </a:r>
           </a:p>
         </p:txBody>
       </p:sp>
       <p:graphicFrame>
         <p:nvGraphicFramePr>
-          <p:cNvPr id="13" name="Chart 12"/>
+          <p:cNvPr id="9" name="Chart 8"/>
           <p:cNvGraphicFramePr>
             <a:graphicFrameLocks noGrp="1"/>
           </p:cNvGraphicFramePr>
           <p:nvPr/>
         </p:nvGraphicFramePr>
         <p:xfrm>
-          <a:off x="6035040" y="1508760"/>
-          <a:ext cx="5943600" cy="4389120"/>
+          <a:off x="6583680" y="1783080"/>
+          <a:ext cx="5349240" cy="2834640"/>
         </p:xfrm>
         <a:graphic>
           <a:graphicData uri="http://schemas.openxmlformats.org/drawingml/2006/chart">
@@ -4955,6 +4651,154 @@
           </a:graphicData>
         </a:graphic>
       </p:graphicFrame>
+      <p:sp>
+        <p:nvSpPr>
+          <p:cNvPr id="10" name="Rectangle 9"/>
+          <p:cNvSpPr/>
+          <p:nvPr/>
+        </p:nvSpPr>
+        <p:spPr>
+          <a:xfrm>
+            <a:off x="457200" y="4846320"/>
+            <a:ext cx="5303520" cy="914400"/>
+          </a:xfrm>
+          <a:prstGeom prst="rect">
+            <a:avLst/>
+          </a:prstGeom>
+          <a:solidFill>
+            <a:srgbClr val="1E3A5F"/>
+          </a:solidFill>
+          <a:ln>
+            <a:noFill/>
+          </a:ln>
+        </p:spPr>
+        <p:style>
+          <a:lnRef idx="1">
+            <a:schemeClr val="accent1"/>
+          </a:lnRef>
+          <a:fillRef idx="3">
+            <a:schemeClr val="accent1"/>
+          </a:fillRef>
+          <a:effectRef idx="2">
+            <a:schemeClr val="accent1"/>
+          </a:effectRef>
+          <a:fontRef idx="minor">
+            <a:schemeClr val="lt1"/>
+          </a:fontRef>
+        </p:style>
+        <p:txBody>
+          <a:bodyPr rtlCol="0" anchor="ctr"/>
+          <a:lstStyle/>
+          <a:p>
+            <a:pPr algn="ctr"/>
+          </a:p>
+        </p:txBody>
+      </p:sp>
+      <p:sp>
+        <p:nvSpPr>
+          <p:cNvPr id="11" name="TextBox 10"/>
+          <p:cNvSpPr txBox="1"/>
+          <p:nvPr/>
+        </p:nvSpPr>
+        <p:spPr>
+          <a:xfrm>
+            <a:off x="594360" y="4937760"/>
+            <a:ext cx="5029200" cy="365760"/>
+          </a:xfrm>
+          <a:prstGeom prst="rect">
+            <a:avLst/>
+          </a:prstGeom>
+          <a:noFill/>
+        </p:spPr>
+        <p:txBody>
+          <a:bodyPr wrap="square">
+            <a:spAutoFit/>
+          </a:bodyPr>
+          <a:lstStyle/>
+          <a:p>
+            <a:pPr algn="l"/>
+            <a:r>
+              <a:rPr sz="900" b="0" i="0">
+                <a:solidFill>
+                  <a:srgbClr val="B0BEC5"/>
+                </a:solidFill>
+                <a:latin typeface="Calibri"/>
+              </a:rPr>
+              <a:t>PPG DEBT SERVICE AT PEAK</a:t>
+            </a:r>
+          </a:p>
+        </p:txBody>
+      </p:sp>
+      <p:sp>
+        <p:nvSpPr>
+          <p:cNvPr id="12" name="TextBox 11"/>
+          <p:cNvSpPr txBox="1"/>
+          <p:nvPr/>
+        </p:nvSpPr>
+        <p:spPr>
+          <a:xfrm>
+            <a:off x="594360" y="5257800"/>
+            <a:ext cx="2286000" cy="411480"/>
+          </a:xfrm>
+          <a:prstGeom prst="rect">
+            <a:avLst/>
+          </a:prstGeom>
+          <a:noFill/>
+        </p:spPr>
+        <p:txBody>
+          <a:bodyPr wrap="square">
+            <a:spAutoFit/>
+          </a:bodyPr>
+          <a:lstStyle/>
+          <a:p>
+            <a:pPr algn="l"/>
+            <a:r>
+              <a:rPr sz="2200" b="1" i="0">
+                <a:solidFill>
+                  <a:srgbClr val="E74C3C"/>
+                </a:solidFill>
+                <a:latin typeface="Calibri"/>
+              </a:rPr>
+              <a:t>12.5%</a:t>
+            </a:r>
+          </a:p>
+        </p:txBody>
+      </p:sp>
+      <p:sp>
+        <p:nvSpPr>
+          <p:cNvPr id="13" name="TextBox 12"/>
+          <p:cNvSpPr txBox="1"/>
+          <p:nvPr/>
+        </p:nvSpPr>
+        <p:spPr>
+          <a:xfrm>
+            <a:off x="2743200" y="5349240"/>
+            <a:ext cx="2743200" cy="320040"/>
+          </a:xfrm>
+          <a:prstGeom prst="rect">
+            <a:avLst/>
+          </a:prstGeom>
+          <a:noFill/>
+        </p:spPr>
+        <p:txBody>
+          <a:bodyPr wrap="square">
+            <a:spAutoFit/>
+          </a:bodyPr>
+          <a:lstStyle/>
+          <a:p>
+            <a:pPr algn="l"/>
+            <a:r>
+              <a:rPr sz="1100" b="0" i="0">
+                <a:solidFill>
+                  <a:srgbClr val="B0BEC5"/>
+                </a:solidFill>
+                <a:latin typeface="Calibri"/>
+              </a:rPr>
+              <a:t>of total export earnings</a:t>
+            </a:r>
+          </a:p>
+        </p:txBody>
+      </p:sp>
       <p:sp>
         <p:nvSpPr>
           <p:cNvPr id="14" name="TextBox 13"/>
@@ -5146,7 +4990,7 @@
         <p:spPr>
           <a:xfrm>
             <a:off x="457200" y="640080"/>
-            <a:ext cx="10972800" cy="822960"/>
+            <a:ext cx="10972800" cy="1005840"/>
           </a:xfrm>
           <a:prstGeom prst="rect">
             <a:avLst/>
@@ -5161,7 +5005,7 @@
           <a:p>
             <a:pPr algn="l"/>
             <a:r>
-              <a:rPr sz="2600" b="1">
+              <a:rPr sz="2800" b="1">
                 <a:solidFill>
                   <a:srgbClr val="F5F5F5"/>
                 </a:solidFill>
@@ -5180,7 +5024,7 @@
         </p:nvSpPr>
         <p:spPr>
           <a:xfrm>
-            <a:off x="457200" y="1508760"/>
+            <a:off x="457200" y="1600200"/>
             <a:ext cx="5029200" cy="19050"/>
           </a:xfrm>
           <a:prstGeom prst="rect">
@@ -5223,8 +5067,8 @@
         </p:nvSpPr>
         <p:spPr>
           <a:xfrm>
-            <a:off x="457200" y="1645920"/>
-            <a:ext cx="5486400" cy="2743200"/>
+            <a:off x="457200" y="1828800"/>
+            <a:ext cx="5669280" cy="3200400"/>
           </a:xfrm>
           <a:prstGeom prst="rect">
             <a:avLst/>
@@ -5239,7 +5083,7 @@
           <a:p>
             <a:pPr algn="l"/>
             <a:r>
-              <a:rPr sz="1100" b="0">
+              <a:rPr sz="1200" b="0">
                 <a:solidFill>
                   <a:srgbClr val="F5F5F5"/>
                 </a:solidFill>
@@ -5251,7 +5095,7 @@
           <a:p>
             <a:pPr algn="l"/>
             <a:r>
-              <a:rPr sz="1100" b="0">
+              <a:rPr sz="1200" b="0">
                 <a:solidFill>
                   <a:srgbClr val="F5F5F5"/>
                 </a:solidFill>
@@ -5263,19 +5107,19 @@
           <a:p>
             <a:pPr algn="l"/>
             <a:r>
-              <a:rPr sz="1100" b="0">
+              <a:rPr sz="1200" b="0">
                 <a:solidFill>
                   <a:srgbClr val="F5F5F5"/>
                 </a:solidFill>
                 <a:latin typeface="Calibri"/>
               </a:rPr>
-              <a:t>Simultaneously, the IMF approved a $1.3 B Extended Credit Facility (ECF) programme, providing a credible fiscal anchor.</a:t>
+              <a:t>Simultaneously, the IMF approved a $1.3 B Extended Credit Facility (ECF) programme, giving the government a credible fiscal anchor and unlocking multilateral support.</a:t>
             </a:r>
           </a:p>
           <a:p>
             <a:pPr algn="l"/>
             <a:r>
-              <a:rPr sz="1100" b="0">
+              <a:rPr sz="1200" b="0">
                 <a:solidFill>
                   <a:srgbClr val="F5F5F5"/>
                 </a:solidFill>
@@ -5287,7 +5131,7 @@
           <a:p>
             <a:pPr algn="l"/>
             <a:r>
-              <a:rPr sz="1100" b="1">
+              <a:rPr sz="1200" b="1">
                 <a:solidFill>
                   <a:srgbClr val="E88C00"/>
                 </a:solidFill>
@@ -5306,8 +5150,8 @@
         </p:nvSpPr>
         <p:spPr>
           <a:xfrm>
-            <a:off x="457200" y="4754880"/>
-            <a:ext cx="1691640" cy="1234440"/>
+            <a:off x="6675120" y="1645920"/>
+            <a:ext cx="1691640" cy="1463040"/>
           </a:xfrm>
           <a:prstGeom prst="rect">
             <a:avLst/>
@@ -5349,7 +5193,7 @@
         </p:nvSpPr>
         <p:spPr>
           <a:xfrm>
-            <a:off x="548640" y="4864608"/>
+            <a:off x="6766560" y="1755648"/>
             <a:ext cx="1508760" cy="365760"/>
           </a:xfrm>
           <a:prstGeom prst="rect">
@@ -5385,7 +5229,7 @@
         </p:nvSpPr>
         <p:spPr>
           <a:xfrm>
-            <a:off x="502920" y="5193792"/>
+            <a:off x="6720840" y="2084832"/>
             <a:ext cx="1600200" cy="502920"/>
           </a:xfrm>
           <a:prstGeom prst="rect">
@@ -5420,7 +5264,7 @@
         </p:nvSpPr>
         <p:spPr>
           <a:xfrm>
-            <a:off x="548640" y="5669280"/>
+            <a:off x="6766560" y="2560320"/>
             <a:ext cx="1508760" cy="365760"/>
           </a:xfrm>
           <a:prstGeom prst="rect">
@@ -5442,7 +5286,7 @@
                 </a:solidFill>
                 <a:latin typeface="Calibri"/>
               </a:rPr>
-              <a:t>% of GDP  (deficit)</a:t>
+              <a:t>of GDP  (deficit)</a:t>
             </a:r>
           </a:p>
         </p:txBody>
@@ -5455,8 +5299,8 @@
         </p:nvSpPr>
         <p:spPr>
           <a:xfrm>
-            <a:off x="2286000" y="4754880"/>
-            <a:ext cx="1691640" cy="1234440"/>
+            <a:off x="8503920" y="1645920"/>
+            <a:ext cx="1691640" cy="1463040"/>
           </a:xfrm>
           <a:prstGeom prst="rect">
             <a:avLst/>
@@ -5498,7 +5342,7 @@
         </p:nvSpPr>
         <p:spPr>
           <a:xfrm>
-            <a:off x="2377440" y="4864608"/>
+            <a:off x="8595360" y="1755648"/>
             <a:ext cx="1508760" cy="365760"/>
           </a:xfrm>
           <a:prstGeom prst="rect">
@@ -5534,7 +5378,7 @@
         </p:nvSpPr>
         <p:spPr>
           <a:xfrm>
-            <a:off x="2331720" y="5193792"/>
+            <a:off x="8549640" y="2084832"/>
             <a:ext cx="1600200" cy="502920"/>
           </a:xfrm>
           <a:prstGeom prst="rect">
@@ -5569,7 +5413,7 @@
         </p:nvSpPr>
         <p:spPr>
           <a:xfrm>
-            <a:off x="2377440" y="5669280"/>
+            <a:off x="8595360" y="2560320"/>
             <a:ext cx="1508760" cy="365760"/>
           </a:xfrm>
           <a:prstGeom prst="rect">
@@ -5591,7 +5435,7 @@
                 </a:solidFill>
                 <a:latin typeface="Calibri"/>
               </a:rPr>
-              <a:t>% of GDP  (surplus)</a:t>
+              <a:t>of GDP  (surplus)</a:t>
             </a:r>
           </a:p>
         </p:txBody>
@@ -5604,8 +5448,8 @@
         </p:nvSpPr>
         <p:spPr>
           <a:xfrm>
-            <a:off x="4114800" y="4754880"/>
-            <a:ext cx="1691640" cy="1234440"/>
+            <a:off x="10332720" y="1645920"/>
+            <a:ext cx="1691640" cy="1463040"/>
           </a:xfrm>
           <a:prstGeom prst="rect">
             <a:avLst/>
@@ -5647,7 +5491,7 @@
         </p:nvSpPr>
         <p:spPr>
           <a:xfrm>
-            <a:off x="4206240" y="4864608"/>
+            <a:off x="10424160" y="1755648"/>
             <a:ext cx="1508760" cy="365760"/>
           </a:xfrm>
           <a:prstGeom prst="rect">
@@ -5670,7 +5514,7 @@
                 <a:latin typeface="Calibri"/>
               </a:rPr>
               <a:t>IMF ECF
-Approved</a:t>
+Programme</a:t>
             </a:r>
           </a:p>
         </p:txBody>
@@ -5683,7 +5527,7 @@
         </p:nvSpPr>
         <p:spPr>
           <a:xfrm>
-            <a:off x="4160520" y="5193792"/>
+            <a:off x="10378440" y="2084832"/>
             <a:ext cx="1600200" cy="502920"/>
           </a:xfrm>
           <a:prstGeom prst="rect">
@@ -5718,7 +5562,7 @@
         </p:nvSpPr>
         <p:spPr>
           <a:xfrm>
-            <a:off x="4206240" y="5669280"/>
+            <a:off x="10424160" y="2560320"/>
             <a:ext cx="1508760" cy="365760"/>
           </a:xfrm>
           <a:prstGeom prst="rect">
@@ -5740,7 +5584,7 @@
                 </a:solidFill>
                 <a:latin typeface="Calibri"/>
               </a:rPr>
-              <a:t>2022 facility</a:t>
+              <a:t>approved 2022</a:t>
             </a:r>
           </a:p>
         </p:txBody>
@@ -5753,8 +5597,8 @@
         </p:nvSpPr>
         <p:spPr>
           <a:xfrm>
-            <a:off x="6035040" y="1188720"/>
-            <a:ext cx="5943600" cy="320040"/>
+            <a:off x="6675120" y="3337560"/>
+            <a:ext cx="5349240" cy="274320"/>
           </a:xfrm>
           <a:prstGeom prst="rect">
             <a:avLst/>
@@ -5769,13 +5613,13 @@
           <a:p>
             <a:pPr algn="l"/>
             <a:r>
-              <a:rPr sz="900" b="1" i="0">
+              <a:rPr sz="800" b="1" i="0">
                 <a:solidFill>
                   <a:srgbClr val="B0BEC5"/>
                 </a:solidFill>
                 <a:latin typeface="Calibri"/>
               </a:rPr>
-              <a:t>CURRENT ACCOUNT BALANCE  (% of GDP)  2015 – 2024</a:t>
+              <a:t>CURRENT ACCOUNT BALANCE  (% of GDP)  ·  2015–2024</a:t>
             </a:r>
           </a:p>
         </p:txBody>
@@ -5789,8 +5633,8 @@
           <p:nvPr/>
         </p:nvGraphicFramePr>
         <p:xfrm>
-          <a:off x="6035040" y="1508760"/>
-          <a:ext cx="5943600" cy="4389120"/>
+          <a:off x="6675120" y="3611880"/>
+          <a:ext cx="5349240" cy="2514600"/>
         </p:xfrm>
         <a:graphic>
           <a:graphicData uri="http://schemas.openxmlformats.org/drawingml/2006/chart">
@@ -5989,7 +5833,7 @@
         <p:spPr>
           <a:xfrm>
             <a:off x="457200" y="640080"/>
-            <a:ext cx="10972800" cy="822960"/>
+            <a:ext cx="10972800" cy="1005840"/>
           </a:xfrm>
           <a:prstGeom prst="rect">
             <a:avLst/>
@@ -6004,7 +5848,7 @@
           <a:p>
             <a:pPr algn="l"/>
             <a:r>
-              <a:rPr sz="2600" b="1">
+              <a:rPr sz="2800" b="1">
                 <a:solidFill>
                   <a:srgbClr val="F5F5F5"/>
                 </a:solidFill>
@@ -6023,7 +5867,7 @@
         </p:nvSpPr>
         <p:spPr>
           <a:xfrm>
-            <a:off x="457200" y="1508760"/>
+            <a:off x="457200" y="1600200"/>
             <a:ext cx="5029200" cy="19050"/>
           </a:xfrm>
           <a:prstGeom prst="rect">
@@ -6066,8 +5910,8 @@
         </p:nvSpPr>
         <p:spPr>
           <a:xfrm>
-            <a:off x="457200" y="1645920"/>
-            <a:ext cx="5486400" cy="3200400"/>
+            <a:off x="457200" y="1828800"/>
+            <a:ext cx="5669280" cy="3474720"/>
           </a:xfrm>
           <a:prstGeom prst="rect">
             <a:avLst/>
@@ -6082,19 +5926,19 @@
           <a:p>
             <a:pPr algn="l"/>
             <a:r>
-              <a:rPr sz="1100" b="0">
+              <a:rPr sz="1200" b="0">
                 <a:solidFill>
                   <a:srgbClr val="F5F5F5"/>
                 </a:solidFill>
                 <a:latin typeface="Calibri"/>
               </a:rPr>
-              <a:t>In November 2023, Zambia finalised the G20 Common Framework restructuring deal — the first successful completion under this framework.</a:t>
+              <a:t>In November 2023, Zambia finalised its G20 Common Framework restructuring deal — the first successful completion under this framework. Bilateral creditor agreements were implemented through 2024.</a:t>
             </a:r>
           </a:p>
           <a:p>
             <a:pPr algn="l"/>
             <a:r>
-              <a:rPr sz="1100" b="0">
+              <a:rPr sz="1200" b="0">
                 <a:solidFill>
                   <a:srgbClr val="F5F5F5"/>
                 </a:solidFill>
@@ -6106,43 +5950,55 @@
           <a:p>
             <a:pPr algn="l"/>
             <a:r>
-              <a:rPr sz="1100" b="0">
+              <a:rPr sz="1200" b="0">
+                <a:solidFill>
+                  <a:srgbClr val="B0BEC5"/>
+                </a:solidFill>
+                <a:latin typeface="Calibri"/>
+              </a:rPr>
+              <a:t>The structural impact was immediate and measurable:</a:t>
+            </a:r>
+          </a:p>
+          <a:p>
+            <a:pPr algn="l"/>
+            <a:r>
+              <a:rPr sz="1200" b="0">
                 <a:solidFill>
                   <a:srgbClr val="2ECC71"/>
                 </a:solidFill>
                 <a:latin typeface="Calibri"/>
               </a:rPr>
-              <a:t>  •  PPG debt service: 12.5 % → 3 % of exports</a:t>
+              <a:t>  •  PPG debt service fell from 12.5 % → 3 % of exports</a:t>
             </a:r>
           </a:p>
           <a:p>
             <a:pPr algn="l"/>
             <a:r>
-              <a:rPr sz="1100" b="0">
+              <a:rPr sz="1200" b="0">
                 <a:solidFill>
                   <a:srgbClr val="2ECC71"/>
                 </a:solidFill>
                 <a:latin typeface="Calibri"/>
               </a:rPr>
-              <a:t>  •  GDP growth held at 5.2–5.4 % as copper prices cooled</a:t>
+              <a:t>  •  GDP growth held at 5.2–5.4 % even as copper prices cooled</a:t>
             </a:r>
           </a:p>
           <a:p>
             <a:pPr algn="l"/>
             <a:r>
-              <a:rPr sz="1100" b="0">
+              <a:rPr sz="1200" b="0">
                 <a:solidFill>
                   <a:srgbClr val="2ECC71"/>
                 </a:solidFill>
                 <a:latin typeface="Calibri"/>
               </a:rPr>
-              <a:t>  •  FDI hit a decade-high of 9.32 % of GDP in 2024</a:t>
+              <a:t>  •  FDI inflows hit a decade-high of 9.32 % of GDP in 2024</a:t>
             </a:r>
           </a:p>
           <a:p>
             <a:pPr algn="l"/>
             <a:r>
-              <a:rPr sz="1100" b="0">
+              <a:rPr sz="1200" b="0">
                 <a:solidFill>
                   <a:srgbClr val="F5F5F5"/>
                 </a:solidFill>
@@ -6154,13 +6010,13 @@
           <a:p>
             <a:pPr algn="l"/>
             <a:r>
-              <a:rPr sz="1100" b="1">
+              <a:rPr sz="1200" b="1">
                 <a:solidFill>
                   <a:srgbClr val="F5F5F5"/>
                 </a:solidFill>
                 <a:latin typeface="Calibri"/>
               </a:rPr>
-              <a:t>Key distinction: copper created fiscal space; restructuring institutionalised it.</a:t>
+              <a:t>This is the key distinction: copper created fiscal space; restructuring institutionalised it.</a:t>
             </a:r>
           </a:p>
         </p:txBody>
@@ -6173,8 +6029,8 @@
         </p:nvSpPr>
         <p:spPr>
           <a:xfrm>
-            <a:off x="457200" y="4754880"/>
-            <a:ext cx="5394960" cy="274320"/>
+            <a:off x="6675120" y="1645920"/>
+            <a:ext cx="5303520" cy="320040"/>
           </a:xfrm>
           <a:prstGeom prst="rect">
             <a:avLst/>
@@ -6195,7 +6051,7 @@
                 </a:solidFill>
                 <a:latin typeface="Calibri"/>
               </a:rPr>
-              <a:t>BEFORE  →  AFTER RESTRUCTURING</a:t>
+              <a:t>BEFORE vs AFTER RESTRUCTURING</a:t>
             </a:r>
           </a:p>
         </p:txBody>
@@ -6208,8 +6064,8 @@
         </p:nvSpPr>
         <p:spPr>
           <a:xfrm>
-            <a:off x="457200" y="5074920"/>
-            <a:ext cx="5349240" cy="384048"/>
+            <a:off x="6675120" y="2057400"/>
+            <a:ext cx="5349240" cy="749808"/>
           </a:xfrm>
           <a:prstGeom prst="rect">
             <a:avLst/>
@@ -6251,8 +6107,8 @@
         </p:nvSpPr>
         <p:spPr>
           <a:xfrm>
-            <a:off x="548640" y="5120640"/>
-            <a:ext cx="2011680" cy="274320"/>
+            <a:off x="6766560" y="2103120"/>
+            <a:ext cx="2103120" cy="320040"/>
           </a:xfrm>
           <a:prstGeom prst="rect">
             <a:avLst/>
@@ -6267,7 +6123,7 @@
           <a:p>
             <a:pPr algn="l"/>
             <a:r>
-              <a:rPr sz="800" b="0" i="0">
+              <a:rPr sz="900" b="0" i="0">
                 <a:solidFill>
                   <a:srgbClr val="B0BEC5"/>
                 </a:solidFill>
@@ -6286,8 +6142,8 @@
         </p:nvSpPr>
         <p:spPr>
           <a:xfrm>
-            <a:off x="2606040" y="5120640"/>
-            <a:ext cx="1097280" cy="274320"/>
+            <a:off x="6766560" y="2423160"/>
+            <a:ext cx="1828800" cy="320040"/>
           </a:xfrm>
           <a:prstGeom prst="rect">
             <a:avLst/>
@@ -6302,7 +6158,7 @@
           <a:p>
             <a:pPr algn="l"/>
             <a:r>
-              <a:rPr sz="1000" b="1" i="0">
+              <a:rPr sz="1200" b="1" i="0">
                 <a:solidFill>
                   <a:srgbClr val="E74C3C"/>
                 </a:solidFill>
@@ -6321,8 +6177,8 @@
         </p:nvSpPr>
         <p:spPr>
           <a:xfrm>
-            <a:off x="3749039" y="5120640"/>
-            <a:ext cx="1920240" cy="274320"/>
+            <a:off x="9326880" y="2423160"/>
+            <a:ext cx="2468880" cy="320040"/>
           </a:xfrm>
           <a:prstGeom prst="rect">
             <a:avLst/>
@@ -6337,7 +6193,7 @@
           <a:p>
             <a:pPr algn="l"/>
             <a:r>
-              <a:rPr sz="1000" b="1" i="0">
+              <a:rPr sz="1200" b="1" i="0">
                 <a:solidFill>
                   <a:srgbClr val="2ECC71"/>
                 </a:solidFill>
@@ -6356,8 +6212,8 @@
         </p:nvSpPr>
         <p:spPr>
           <a:xfrm>
-            <a:off x="457200" y="5513832"/>
-            <a:ext cx="5349240" cy="384048"/>
+            <a:off x="6675120" y="2898648"/>
+            <a:ext cx="5349240" cy="749808"/>
           </a:xfrm>
           <a:prstGeom prst="rect">
             <a:avLst/>
@@ -6399,8 +6255,8 @@
         </p:nvSpPr>
         <p:spPr>
           <a:xfrm>
-            <a:off x="548640" y="5559552"/>
-            <a:ext cx="2011680" cy="274320"/>
+            <a:off x="6766560" y="2944368"/>
+            <a:ext cx="2103120" cy="320040"/>
           </a:xfrm>
           <a:prstGeom prst="rect">
             <a:avLst/>
@@ -6415,13 +6271,13 @@
           <a:p>
             <a:pPr algn="l"/>
             <a:r>
-              <a:rPr sz="800" b="0" i="0">
+              <a:rPr sz="900" b="0" i="0">
                 <a:solidFill>
                   <a:srgbClr val="B0BEC5"/>
                 </a:solidFill>
                 <a:latin typeface="Calibri"/>
               </a:rPr>
-              <a:t>FDI Inflows (% GDP)</a:t>
+              <a:t>GDP Growth</a:t>
             </a:r>
           </a:p>
         </p:txBody>
@@ -6434,8 +6290,8 @@
         </p:nvSpPr>
         <p:spPr>
           <a:xfrm>
-            <a:off x="2606040" y="5559552"/>
-            <a:ext cx="1097280" cy="274320"/>
+            <a:off x="6766560" y="3264408"/>
+            <a:ext cx="1828800" cy="320040"/>
           </a:xfrm>
           <a:prstGeom prst="rect">
             <a:avLst/>
@@ -6450,13 +6306,13 @@
           <a:p>
             <a:pPr algn="l"/>
             <a:r>
-              <a:rPr sz="1000" b="1" i="0">
+              <a:rPr sz="1200" b="1" i="0">
                 <a:solidFill>
                   <a:srgbClr val="E74C3C"/>
                 </a:solidFill>
                 <a:latin typeface="Calibri"/>
               </a:rPr>
-              <a:t>1.8 %  (2020)</a:t>
+              <a:t>-2.8 %  (2020)</a:t>
             </a:r>
           </a:p>
         </p:txBody>
@@ -6469,8 +6325,8 @@
         </p:nvSpPr>
         <p:spPr>
           <a:xfrm>
-            <a:off x="3749039" y="5559552"/>
-            <a:ext cx="1920240" cy="274320"/>
+            <a:off x="9326880" y="3264408"/>
+            <a:ext cx="2468880" cy="320040"/>
           </a:xfrm>
           <a:prstGeom prst="rect">
             <a:avLst/>
@@ -6485,27 +6341,70 @@
           <a:p>
             <a:pPr algn="l"/>
             <a:r>
-              <a:rPr sz="1000" b="1" i="0">
+              <a:rPr sz="1200" b="1" i="0">
                 <a:solidFill>
                   <a:srgbClr val="2ECC71"/>
                 </a:solidFill>
                 <a:latin typeface="Calibri"/>
               </a:rPr>
-              <a:t>→  9.32 %  (2024)</a:t>
-            </a:r>
-          </a:p>
-        </p:txBody>
-      </p:sp>
-      <p:sp>
-        <p:nvSpPr>
-          <p:cNvPr id="17" name="TextBox 16"/>
+              <a:t>→  5.3 %  (2024)</a:t>
+            </a:r>
+          </a:p>
+        </p:txBody>
+      </p:sp>
+      <p:sp>
+        <p:nvSpPr>
+          <p:cNvPr id="17" name="Rectangle 16"/>
+          <p:cNvSpPr/>
+          <p:nvPr/>
+        </p:nvSpPr>
+        <p:spPr>
+          <a:xfrm>
+            <a:off x="6675120" y="3739896"/>
+            <a:ext cx="5349240" cy="749808"/>
+          </a:xfrm>
+          <a:prstGeom prst="rect">
+            <a:avLst/>
+          </a:prstGeom>
+          <a:solidFill>
+            <a:srgbClr val="1E3A5F"/>
+          </a:solidFill>
+          <a:ln>
+            <a:noFill/>
+          </a:ln>
+        </p:spPr>
+        <p:style>
+          <a:lnRef idx="1">
+            <a:schemeClr val="accent1"/>
+          </a:lnRef>
+          <a:fillRef idx="3">
+            <a:schemeClr val="accent1"/>
+          </a:fillRef>
+          <a:effectRef idx="2">
+            <a:schemeClr val="accent1"/>
+          </a:effectRef>
+          <a:fontRef idx="minor">
+            <a:schemeClr val="lt1"/>
+          </a:fontRef>
+        </p:style>
+        <p:txBody>
+          <a:bodyPr rtlCol="0" anchor="ctr"/>
+          <a:lstStyle/>
+          <a:p>
+            <a:pPr algn="ctr"/>
+          </a:p>
+        </p:txBody>
+      </p:sp>
+      <p:sp>
+        <p:nvSpPr>
+          <p:cNvPr id="18" name="TextBox 17"/>
           <p:cNvSpPr txBox="1"/>
           <p:nvPr/>
         </p:nvSpPr>
         <p:spPr>
           <a:xfrm>
-            <a:off x="6035040" y="1188720"/>
-            <a:ext cx="5943600" cy="320040"/>
+            <a:off x="6766560" y="3785616"/>
+            <a:ext cx="2103120" cy="320040"/>
           </a:xfrm>
           <a:prstGeom prst="rect">
             <a:avLst/>
@@ -6520,27 +6419,27 @@
           <a:p>
             <a:pPr algn="l"/>
             <a:r>
-              <a:rPr sz="900" b="1" i="0">
+              <a:rPr sz="900" b="0" i="0">
                 <a:solidFill>
                   <a:srgbClr val="B0BEC5"/>
                 </a:solidFill>
                 <a:latin typeface="Calibri"/>
               </a:rPr>
-              <a:t>GDP GROWTH  (% annual)  2015 – 2024</a:t>
-            </a:r>
-          </a:p>
-        </p:txBody>
-      </p:sp>
-      <p:sp>
-        <p:nvSpPr>
-          <p:cNvPr id="18" name="TextBox 17"/>
+              <a:t>FDI Inflows (% GDP)</a:t>
+            </a:r>
+          </a:p>
+        </p:txBody>
+      </p:sp>
+      <p:sp>
+        <p:nvSpPr>
+          <p:cNvPr id="19" name="TextBox 18"/>
           <p:cNvSpPr txBox="1"/>
           <p:nvPr/>
         </p:nvSpPr>
         <p:spPr>
           <a:xfrm>
-            <a:off x="6035040" y="1481328"/>
-            <a:ext cx="5029200" cy="256032"/>
+            <a:off x="6766560" y="4105656"/>
+            <a:ext cx="1828800" cy="320040"/>
           </a:xfrm>
           <a:prstGeom prst="rect">
             <a:avLst/>
@@ -6555,38 +6454,203 @@
           <a:p>
             <a:pPr algn="l"/>
             <a:r>
-              <a:rPr sz="800" b="0" i="0">
+              <a:rPr sz="1200" b="1" i="0">
+                <a:solidFill>
+                  <a:srgbClr val="E74C3C"/>
+                </a:solidFill>
+                <a:latin typeface="Calibri"/>
+              </a:rPr>
+              <a:t>1.8 %  (2020)</a:t>
+            </a:r>
+          </a:p>
+        </p:txBody>
+      </p:sp>
+      <p:sp>
+        <p:nvSpPr>
+          <p:cNvPr id="20" name="TextBox 19"/>
+          <p:cNvSpPr txBox="1"/>
+          <p:nvPr/>
+        </p:nvSpPr>
+        <p:spPr>
+          <a:xfrm>
+            <a:off x="9326880" y="4105656"/>
+            <a:ext cx="2468880" cy="320040"/>
+          </a:xfrm>
+          <a:prstGeom prst="rect">
+            <a:avLst/>
+          </a:prstGeom>
+          <a:noFill/>
+        </p:spPr>
+        <p:txBody>
+          <a:bodyPr wrap="square">
+            <a:spAutoFit/>
+          </a:bodyPr>
+          <a:lstStyle/>
+          <a:p>
+            <a:pPr algn="l"/>
+            <a:r>
+              <a:rPr sz="1200" b="1" i="0">
+                <a:solidFill>
+                  <a:srgbClr val="2ECC71"/>
+                </a:solidFill>
+                <a:latin typeface="Calibri"/>
+              </a:rPr>
+              <a:t>→  9.32 %  (2024)</a:t>
+            </a:r>
+          </a:p>
+        </p:txBody>
+      </p:sp>
+      <p:sp>
+        <p:nvSpPr>
+          <p:cNvPr id="21" name="Rectangle 20"/>
+          <p:cNvSpPr/>
+          <p:nvPr/>
+        </p:nvSpPr>
+        <p:spPr>
+          <a:xfrm>
+            <a:off x="6675120" y="4581144"/>
+            <a:ext cx="5349240" cy="749808"/>
+          </a:xfrm>
+          <a:prstGeom prst="rect">
+            <a:avLst/>
+          </a:prstGeom>
+          <a:solidFill>
+            <a:srgbClr val="1E3A5F"/>
+          </a:solidFill>
+          <a:ln>
+            <a:noFill/>
+          </a:ln>
+        </p:spPr>
+        <p:style>
+          <a:lnRef idx="1">
+            <a:schemeClr val="accent1"/>
+          </a:lnRef>
+          <a:fillRef idx="3">
+            <a:schemeClr val="accent1"/>
+          </a:fillRef>
+          <a:effectRef idx="2">
+            <a:schemeClr val="accent1"/>
+          </a:effectRef>
+          <a:fontRef idx="minor">
+            <a:schemeClr val="lt1"/>
+          </a:fontRef>
+        </p:style>
+        <p:txBody>
+          <a:bodyPr rtlCol="0" anchor="ctr"/>
+          <a:lstStyle/>
+          <a:p>
+            <a:pPr algn="ctr"/>
+          </a:p>
+        </p:txBody>
+      </p:sp>
+      <p:sp>
+        <p:nvSpPr>
+          <p:cNvPr id="22" name="TextBox 21"/>
+          <p:cNvSpPr txBox="1"/>
+          <p:nvPr/>
+        </p:nvSpPr>
+        <p:spPr>
+          <a:xfrm>
+            <a:off x="6766560" y="4626864"/>
+            <a:ext cx="2103120" cy="320040"/>
+          </a:xfrm>
+          <a:prstGeom prst="rect">
+            <a:avLst/>
+          </a:prstGeom>
+          <a:noFill/>
+        </p:spPr>
+        <p:txBody>
+          <a:bodyPr wrap="square">
+            <a:spAutoFit/>
+          </a:bodyPr>
+          <a:lstStyle/>
+          <a:p>
+            <a:pPr algn="l"/>
+            <a:r>
+              <a:rPr sz="900" b="0" i="0">
                 <a:solidFill>
                   <a:srgbClr val="B0BEC5"/>
                 </a:solidFill>
                 <a:latin typeface="Calibri"/>
               </a:rPr>
-              <a:t>Red = contraction  ·  Green = growth post-restructuring</a:t>
-            </a:r>
-          </a:p>
-        </p:txBody>
-      </p:sp>
-      <p:graphicFrame>
-        <p:nvGraphicFramePr>
-          <p:cNvPr id="19" name="Chart 18"/>
-          <p:cNvGraphicFramePr>
-            <a:graphicFrameLocks noGrp="1"/>
-          </p:cNvGraphicFramePr>
-          <p:nvPr/>
-        </p:nvGraphicFramePr>
-        <p:xfrm>
-          <a:off x="6035040" y="1737360"/>
-          <a:ext cx="5943600" cy="4160520"/>
-        </p:xfrm>
-        <a:graphic>
-          <a:graphicData uri="http://schemas.openxmlformats.org/drawingml/2006/chart">
-            <c:chart xmlns:c="http://schemas.openxmlformats.org/drawingml/2006/chart" r:id="rId2"/>
-          </a:graphicData>
-        </a:graphic>
-      </p:graphicFrame>
-      <p:sp>
-        <p:nvSpPr>
-          <p:cNvPr id="20" name="TextBox 19"/>
+              <a:t>Investor Confidence</a:t>
+            </a:r>
+          </a:p>
+        </p:txBody>
+      </p:sp>
+      <p:sp>
+        <p:nvSpPr>
+          <p:cNvPr id="23" name="TextBox 22"/>
+          <p:cNvSpPr txBox="1"/>
+          <p:nvPr/>
+        </p:nvSpPr>
+        <p:spPr>
+          <a:xfrm>
+            <a:off x="6766560" y="4946904"/>
+            <a:ext cx="1828800" cy="320040"/>
+          </a:xfrm>
+          <a:prstGeom prst="rect">
+            <a:avLst/>
+          </a:prstGeom>
+          <a:noFill/>
+        </p:spPr>
+        <p:txBody>
+          <a:bodyPr wrap="square">
+            <a:spAutoFit/>
+          </a:bodyPr>
+          <a:lstStyle/>
+          <a:p>
+            <a:pPr algn="l"/>
+            <a:r>
+              <a:rPr sz="1200" b="1" i="0">
+                <a:solidFill>
+                  <a:srgbClr val="E74C3C"/>
+                </a:solidFill>
+                <a:latin typeface="Calibri"/>
+              </a:rPr>
+              <a:t>Eurobond default</a:t>
+            </a:r>
+          </a:p>
+        </p:txBody>
+      </p:sp>
+      <p:sp>
+        <p:nvSpPr>
+          <p:cNvPr id="24" name="TextBox 23"/>
+          <p:cNvSpPr txBox="1"/>
+          <p:nvPr/>
+        </p:nvSpPr>
+        <p:spPr>
+          <a:xfrm>
+            <a:off x="9326880" y="4946904"/>
+            <a:ext cx="2468880" cy="320040"/>
+          </a:xfrm>
+          <a:prstGeom prst="rect">
+            <a:avLst/>
+          </a:prstGeom>
+          <a:noFill/>
+        </p:spPr>
+        <p:txBody>
+          <a:bodyPr wrap="square">
+            <a:spAutoFit/>
+          </a:bodyPr>
+          <a:lstStyle/>
+          <a:p>
+            <a:pPr algn="l"/>
+            <a:r>
+              <a:rPr sz="1200" b="1" i="0">
+                <a:solidFill>
+                  <a:srgbClr val="2ECC71"/>
+                </a:solidFill>
+                <a:latin typeface="Calibri"/>
+              </a:rPr>
+              <a:t>→  Decade-high FDI</a:t>
+            </a:r>
+          </a:p>
+        </p:txBody>
+      </p:sp>
+      <p:sp>
+        <p:nvSpPr>
+          <p:cNvPr id="25" name="TextBox 24"/>
           <p:cNvSpPr txBox="1"/>
           <p:nvPr/>
         </p:nvSpPr>
@@ -6775,7 +6839,7 @@
         <p:spPr>
           <a:xfrm>
             <a:off x="457200" y="640080"/>
-            <a:ext cx="10972800" cy="822960"/>
+            <a:ext cx="10972800" cy="1005840"/>
           </a:xfrm>
           <a:prstGeom prst="rect">
             <a:avLst/>
@@ -6790,13 +6854,13 @@
           <a:p>
             <a:pPr algn="l"/>
             <a:r>
-              <a:rPr sz="2600" b="1">
+              <a:rPr sz="2800" b="1">
                 <a:solidFill>
                   <a:srgbClr val="F5F5F5"/>
                 </a:solidFill>
                 <a:latin typeface="Calibri"/>
               </a:rPr>
-              <a:t>FDI &amp; Debt Service: The Recovery in Numbers</a:t>
+              <a:t>The Numbers Confirm the Verdict</a:t>
             </a:r>
           </a:p>
         </p:txBody>
@@ -6809,7 +6873,7 @@
         </p:nvSpPr>
         <p:spPr>
           <a:xfrm>
-            <a:off x="457200" y="1508760"/>
+            <a:off x="457200" y="1600200"/>
             <a:ext cx="11430000" cy="19050"/>
           </a:xfrm>
           <a:prstGeom prst="rect">
@@ -6846,14 +6910,57 @@
       </p:sp>
       <p:sp>
         <p:nvSpPr>
-          <p:cNvPr id="7" name="TextBox 6"/>
+          <p:cNvPr id="7" name="Rectangle 6"/>
+          <p:cNvSpPr/>
+          <p:nvPr/>
+        </p:nvSpPr>
+        <p:spPr>
+          <a:xfrm>
+            <a:off x="457200" y="1874519"/>
+            <a:ext cx="3749039" cy="1417320"/>
+          </a:xfrm>
+          <a:prstGeom prst="rect">
+            <a:avLst/>
+          </a:prstGeom>
+          <a:solidFill>
+            <a:srgbClr val="1E3A5F"/>
+          </a:solidFill>
+          <a:ln>
+            <a:noFill/>
+          </a:ln>
+        </p:spPr>
+        <p:style>
+          <a:lnRef idx="1">
+            <a:schemeClr val="accent1"/>
+          </a:lnRef>
+          <a:fillRef idx="3">
+            <a:schemeClr val="accent1"/>
+          </a:fillRef>
+          <a:effectRef idx="2">
+            <a:schemeClr val="accent1"/>
+          </a:effectRef>
+          <a:fontRef idx="minor">
+            <a:schemeClr val="lt1"/>
+          </a:fontRef>
+        </p:style>
+        <p:txBody>
+          <a:bodyPr rtlCol="0" anchor="ctr"/>
+          <a:lstStyle/>
+          <a:p>
+            <a:pPr algn="ctr"/>
+          </a:p>
+        </p:txBody>
+      </p:sp>
+      <p:sp>
+        <p:nvSpPr>
+          <p:cNvPr id="8" name="TextBox 7"/>
           <p:cNvSpPr txBox="1"/>
           <p:nvPr/>
         </p:nvSpPr>
         <p:spPr>
           <a:xfrm>
-            <a:off x="457200" y="1691640"/>
-            <a:ext cx="5669280" cy="292608"/>
+            <a:off x="548640" y="1984247"/>
+            <a:ext cx="3566159" cy="365760"/>
           </a:xfrm>
           <a:prstGeom prst="rect">
             <a:avLst/>
@@ -6866,37 +6973,19 @@
           </a:bodyPr>
           <a:lstStyle/>
           <a:p>
-            <a:pPr algn="l"/>
-            <a:r>
-              <a:rPr sz="900" b="1" i="0">
+            <a:pPr algn="ctr"/>
+            <a:r>
+              <a:rPr sz="900" b="0" i="0">
                 <a:solidFill>
                   <a:srgbClr val="B0BEC5"/>
                 </a:solidFill>
                 <a:latin typeface="Calibri"/>
               </a:rPr>
-              <a:t>FDI NET INFLOWS  (% of GDP)  2015 – 2024</a:t>
-            </a:r>
-          </a:p>
-        </p:txBody>
-      </p:sp>
-      <p:graphicFrame>
-        <p:nvGraphicFramePr>
-          <p:cNvPr id="8" name="Chart 7"/>
-          <p:cNvGraphicFramePr>
-            <a:graphicFrameLocks noGrp="1"/>
-          </p:cNvGraphicFramePr>
-          <p:nvPr/>
-        </p:nvGraphicFramePr>
-        <p:xfrm>
-          <a:off x="457200" y="1993392"/>
-          <a:ext cx="5669280" cy="4160520"/>
-        </p:xfrm>
-        <a:graphic>
-          <a:graphicData uri="http://schemas.openxmlformats.org/drawingml/2006/chart">
-            <c:chart xmlns:c="http://schemas.openxmlformats.org/drawingml/2006/chart" r:id="rId2"/>
-          </a:graphicData>
-        </a:graphic>
-      </p:graphicFrame>
+              <a:t>External Debt Peak</a:t>
+            </a:r>
+          </a:p>
+        </p:txBody>
+      </p:sp>
       <p:sp>
         <p:nvSpPr>
           <p:cNvPr id="9" name="TextBox 8"/>
@@ -6905,8 +6994,8 @@
         </p:nvSpPr>
         <p:spPr>
           <a:xfrm>
-            <a:off x="6492240" y="1691640"/>
-            <a:ext cx="5486400" cy="292608"/>
+            <a:off x="502920" y="2313431"/>
+            <a:ext cx="3657599" cy="502920"/>
           </a:xfrm>
           <a:prstGeom prst="rect">
             <a:avLst/>
@@ -6919,47 +7008,29 @@
           </a:bodyPr>
           <a:lstStyle/>
           <a:p>
-            <a:pPr algn="l"/>
-            <a:r>
-              <a:rPr sz="900" b="1" i="0">
-                <a:solidFill>
-                  <a:srgbClr val="B0BEC5"/>
-                </a:solidFill>
-                <a:latin typeface="Calibri"/>
-              </a:rPr>
-              <a:t>PPG DEBT SERVICE  (% of exports)  BEFORE vs AFTER DEAL</a:t>
-            </a:r>
-          </a:p>
-        </p:txBody>
-      </p:sp>
-      <p:graphicFrame>
-        <p:nvGraphicFramePr>
-          <p:cNvPr id="10" name="Chart 9"/>
-          <p:cNvGraphicFramePr>
-            <a:graphicFrameLocks noGrp="1"/>
-          </p:cNvGraphicFramePr>
-          <p:nvPr/>
-        </p:nvGraphicFramePr>
-        <p:xfrm>
-          <a:off x="6492240" y="1993392"/>
-          <a:ext cx="5486400" cy="4160520"/>
-        </p:xfrm>
-        <a:graphic>
-          <a:graphicData uri="http://schemas.openxmlformats.org/drawingml/2006/chart">
-            <c:chart xmlns:c="http://schemas.openxmlformats.org/drawingml/2006/chart" r:id="rId3"/>
-          </a:graphicData>
-        </a:graphic>
-      </p:graphicFrame>
-      <p:sp>
-        <p:nvSpPr>
-          <p:cNvPr id="11" name="TextBox 10"/>
+            <a:pPr algn="ctr"/>
+            <a:r>
+              <a:rPr sz="2200" b="1" i="0">
+                <a:solidFill>
+                  <a:srgbClr val="E74C3C"/>
+                </a:solidFill>
+                <a:latin typeface="Calibri"/>
+              </a:rPr>
+              <a:t>$29.1 B</a:t>
+            </a:r>
+          </a:p>
+        </p:txBody>
+      </p:sp>
+      <p:sp>
+        <p:nvSpPr>
+          <p:cNvPr id="10" name="TextBox 9"/>
           <p:cNvSpPr txBox="1"/>
           <p:nvPr/>
         </p:nvSpPr>
         <p:spPr>
           <a:xfrm>
-            <a:off x="457200" y="6236208"/>
-            <a:ext cx="10972800" cy="365760"/>
+            <a:off x="548640" y="2788919"/>
+            <a:ext cx="3566159" cy="365760"/>
           </a:xfrm>
           <a:prstGeom prst="rect">
             <a:avLst/>
@@ -6972,6 +7043,782 @@
           </a:bodyPr>
           <a:lstStyle/>
           <a:p>
+            <a:pPr algn="ctr"/>
+            <a:r>
+              <a:rPr sz="800" b="0" i="0">
+                <a:solidFill>
+                  <a:srgbClr val="B0BEC5"/>
+                </a:solidFill>
+                <a:latin typeface="Calibri"/>
+              </a:rPr>
+              <a:t>2019  (tripled in 4 yrs)</a:t>
+            </a:r>
+          </a:p>
+        </p:txBody>
+      </p:sp>
+      <p:sp>
+        <p:nvSpPr>
+          <p:cNvPr id="11" name="Rectangle 10"/>
+          <p:cNvSpPr/>
+          <p:nvPr/>
+        </p:nvSpPr>
+        <p:spPr>
+          <a:xfrm>
+            <a:off x="4315967" y="1874519"/>
+            <a:ext cx="3749039" cy="1417320"/>
+          </a:xfrm>
+          <a:prstGeom prst="rect">
+            <a:avLst/>
+          </a:prstGeom>
+          <a:solidFill>
+            <a:srgbClr val="1E3A5F"/>
+          </a:solidFill>
+          <a:ln>
+            <a:noFill/>
+          </a:ln>
+        </p:spPr>
+        <p:style>
+          <a:lnRef idx="1">
+            <a:schemeClr val="accent1"/>
+          </a:lnRef>
+          <a:fillRef idx="3">
+            <a:schemeClr val="accent1"/>
+          </a:fillRef>
+          <a:effectRef idx="2">
+            <a:schemeClr val="accent1"/>
+          </a:effectRef>
+          <a:fontRef idx="minor">
+            <a:schemeClr val="lt1"/>
+          </a:fontRef>
+        </p:style>
+        <p:txBody>
+          <a:bodyPr rtlCol="0" anchor="ctr"/>
+          <a:lstStyle/>
+          <a:p>
+            <a:pPr algn="ctr"/>
+          </a:p>
+        </p:txBody>
+      </p:sp>
+      <p:sp>
+        <p:nvSpPr>
+          <p:cNvPr id="12" name="TextBox 11"/>
+          <p:cNvSpPr txBox="1"/>
+          <p:nvPr/>
+        </p:nvSpPr>
+        <p:spPr>
+          <a:xfrm>
+            <a:off x="4407407" y="1984247"/>
+            <a:ext cx="3566159" cy="365760"/>
+          </a:xfrm>
+          <a:prstGeom prst="rect">
+            <a:avLst/>
+          </a:prstGeom>
+          <a:noFill/>
+        </p:spPr>
+        <p:txBody>
+          <a:bodyPr wrap="square">
+            <a:spAutoFit/>
+          </a:bodyPr>
+          <a:lstStyle/>
+          <a:p>
+            <a:pPr algn="ctr"/>
+            <a:r>
+              <a:rPr sz="900" b="0" i="0">
+                <a:solidFill>
+                  <a:srgbClr val="B0BEC5"/>
+                </a:solidFill>
+                <a:latin typeface="Calibri"/>
+              </a:rPr>
+              <a:t>Current Account Swing</a:t>
+            </a:r>
+          </a:p>
+        </p:txBody>
+      </p:sp>
+      <p:sp>
+        <p:nvSpPr>
+          <p:cNvPr id="13" name="TextBox 12"/>
+          <p:cNvSpPr txBox="1"/>
+          <p:nvPr/>
+        </p:nvSpPr>
+        <p:spPr>
+          <a:xfrm>
+            <a:off x="4361687" y="2313431"/>
+            <a:ext cx="3657599" cy="502920"/>
+          </a:xfrm>
+          <a:prstGeom prst="rect">
+            <a:avLst/>
+          </a:prstGeom>
+          <a:noFill/>
+        </p:spPr>
+        <p:txBody>
+          <a:bodyPr wrap="square">
+            <a:spAutoFit/>
+          </a:bodyPr>
+          <a:lstStyle/>
+          <a:p>
+            <a:pPr algn="ctr"/>
+            <a:r>
+              <a:rPr sz="2200" b="1" i="0">
+                <a:solidFill>
+                  <a:srgbClr val="2ECC71"/>
+                </a:solidFill>
+                <a:latin typeface="Calibri"/>
+              </a:rPr>
+              <a:t>+15.5 pp</a:t>
+            </a:r>
+          </a:p>
+        </p:txBody>
+      </p:sp>
+      <p:sp>
+        <p:nvSpPr>
+          <p:cNvPr id="14" name="TextBox 13"/>
+          <p:cNvSpPr txBox="1"/>
+          <p:nvPr/>
+        </p:nvSpPr>
+        <p:spPr>
+          <a:xfrm>
+            <a:off x="4407407" y="2788919"/>
+            <a:ext cx="3566159" cy="365760"/>
+          </a:xfrm>
+          <a:prstGeom prst="rect">
+            <a:avLst/>
+          </a:prstGeom>
+          <a:noFill/>
+        </p:spPr>
+        <p:txBody>
+          <a:bodyPr wrap="square">
+            <a:spAutoFit/>
+          </a:bodyPr>
+          <a:lstStyle/>
+          <a:p>
+            <a:pPr algn="ctr"/>
+            <a:r>
+              <a:rPr sz="800" b="0" i="0">
+                <a:solidFill>
+                  <a:srgbClr val="B0BEC5"/>
+                </a:solidFill>
+                <a:latin typeface="Calibri"/>
+              </a:rPr>
+              <a:t>from -3.6% to +11.9% GDP</a:t>
+            </a:r>
+          </a:p>
+        </p:txBody>
+      </p:sp>
+      <p:sp>
+        <p:nvSpPr>
+          <p:cNvPr id="15" name="Rectangle 14"/>
+          <p:cNvSpPr/>
+          <p:nvPr/>
+        </p:nvSpPr>
+        <p:spPr>
+          <a:xfrm>
+            <a:off x="8174734" y="1874519"/>
+            <a:ext cx="3749039" cy="1417320"/>
+          </a:xfrm>
+          <a:prstGeom prst="rect">
+            <a:avLst/>
+          </a:prstGeom>
+          <a:solidFill>
+            <a:srgbClr val="1E3A5F"/>
+          </a:solidFill>
+          <a:ln>
+            <a:noFill/>
+          </a:ln>
+        </p:spPr>
+        <p:style>
+          <a:lnRef idx="1">
+            <a:schemeClr val="accent1"/>
+          </a:lnRef>
+          <a:fillRef idx="3">
+            <a:schemeClr val="accent1"/>
+          </a:fillRef>
+          <a:effectRef idx="2">
+            <a:schemeClr val="accent1"/>
+          </a:effectRef>
+          <a:fontRef idx="minor">
+            <a:schemeClr val="lt1"/>
+          </a:fontRef>
+        </p:style>
+        <p:txBody>
+          <a:bodyPr rtlCol="0" anchor="ctr"/>
+          <a:lstStyle/>
+          <a:p>
+            <a:pPr algn="ctr"/>
+          </a:p>
+        </p:txBody>
+      </p:sp>
+      <p:sp>
+        <p:nvSpPr>
+          <p:cNvPr id="16" name="TextBox 15"/>
+          <p:cNvSpPr txBox="1"/>
+          <p:nvPr/>
+        </p:nvSpPr>
+        <p:spPr>
+          <a:xfrm>
+            <a:off x="8266174" y="1984247"/>
+            <a:ext cx="3566159" cy="365760"/>
+          </a:xfrm>
+          <a:prstGeom prst="rect">
+            <a:avLst/>
+          </a:prstGeom>
+          <a:noFill/>
+        </p:spPr>
+        <p:txBody>
+          <a:bodyPr wrap="square">
+            <a:spAutoFit/>
+          </a:bodyPr>
+          <a:lstStyle/>
+          <a:p>
+            <a:pPr algn="ctr"/>
+            <a:r>
+              <a:rPr sz="900" b="0" i="0">
+                <a:solidFill>
+                  <a:srgbClr val="B0BEC5"/>
+                </a:solidFill>
+                <a:latin typeface="Calibri"/>
+              </a:rPr>
+              <a:t>IMF ECF Approved</a:t>
+            </a:r>
+          </a:p>
+        </p:txBody>
+      </p:sp>
+      <p:sp>
+        <p:nvSpPr>
+          <p:cNvPr id="17" name="TextBox 16"/>
+          <p:cNvSpPr txBox="1"/>
+          <p:nvPr/>
+        </p:nvSpPr>
+        <p:spPr>
+          <a:xfrm>
+            <a:off x="8220454" y="2313431"/>
+            <a:ext cx="3657599" cy="502920"/>
+          </a:xfrm>
+          <a:prstGeom prst="rect">
+            <a:avLst/>
+          </a:prstGeom>
+          <a:noFill/>
+        </p:spPr>
+        <p:txBody>
+          <a:bodyPr wrap="square">
+            <a:spAutoFit/>
+          </a:bodyPr>
+          <a:lstStyle/>
+          <a:p>
+            <a:pPr algn="ctr"/>
+            <a:r>
+              <a:rPr sz="2200" b="1" i="0">
+                <a:solidFill>
+                  <a:srgbClr val="E88C00"/>
+                </a:solidFill>
+                <a:latin typeface="Calibri"/>
+              </a:rPr>
+              <a:t>$1.3 B</a:t>
+            </a:r>
+          </a:p>
+        </p:txBody>
+      </p:sp>
+      <p:sp>
+        <p:nvSpPr>
+          <p:cNvPr id="18" name="TextBox 17"/>
+          <p:cNvSpPr txBox="1"/>
+          <p:nvPr/>
+        </p:nvSpPr>
+        <p:spPr>
+          <a:xfrm>
+            <a:off x="8266174" y="2788919"/>
+            <a:ext cx="3566159" cy="365760"/>
+          </a:xfrm>
+          <a:prstGeom prst="rect">
+            <a:avLst/>
+          </a:prstGeom>
+          <a:noFill/>
+        </p:spPr>
+        <p:txBody>
+          <a:bodyPr wrap="square">
+            <a:spAutoFit/>
+          </a:bodyPr>
+          <a:lstStyle/>
+          <a:p>
+            <a:pPr algn="ctr"/>
+            <a:r>
+              <a:rPr sz="800" b="0" i="0">
+                <a:solidFill>
+                  <a:srgbClr val="B0BEC5"/>
+                </a:solidFill>
+                <a:latin typeface="Calibri"/>
+              </a:rPr>
+              <a:t>2022 facility</a:t>
+            </a:r>
+          </a:p>
+        </p:txBody>
+      </p:sp>
+      <p:sp>
+        <p:nvSpPr>
+          <p:cNvPr id="19" name="Rectangle 18"/>
+          <p:cNvSpPr/>
+          <p:nvPr/>
+        </p:nvSpPr>
+        <p:spPr>
+          <a:xfrm>
+            <a:off x="457200" y="3566159"/>
+            <a:ext cx="3749039" cy="1417320"/>
+          </a:xfrm>
+          <a:prstGeom prst="rect">
+            <a:avLst/>
+          </a:prstGeom>
+          <a:solidFill>
+            <a:srgbClr val="1E3A5F"/>
+          </a:solidFill>
+          <a:ln>
+            <a:noFill/>
+          </a:ln>
+        </p:spPr>
+        <p:style>
+          <a:lnRef idx="1">
+            <a:schemeClr val="accent1"/>
+          </a:lnRef>
+          <a:fillRef idx="3">
+            <a:schemeClr val="accent1"/>
+          </a:fillRef>
+          <a:effectRef idx="2">
+            <a:schemeClr val="accent1"/>
+          </a:effectRef>
+          <a:fontRef idx="minor">
+            <a:schemeClr val="lt1"/>
+          </a:fontRef>
+        </p:style>
+        <p:txBody>
+          <a:bodyPr rtlCol="0" anchor="ctr"/>
+          <a:lstStyle/>
+          <a:p>
+            <a:pPr algn="ctr"/>
+          </a:p>
+        </p:txBody>
+      </p:sp>
+      <p:sp>
+        <p:nvSpPr>
+          <p:cNvPr id="20" name="TextBox 19"/>
+          <p:cNvSpPr txBox="1"/>
+          <p:nvPr/>
+        </p:nvSpPr>
+        <p:spPr>
+          <a:xfrm>
+            <a:off x="548640" y="3675887"/>
+            <a:ext cx="3566159" cy="365760"/>
+          </a:xfrm>
+          <a:prstGeom prst="rect">
+            <a:avLst/>
+          </a:prstGeom>
+          <a:noFill/>
+        </p:spPr>
+        <p:txBody>
+          <a:bodyPr wrap="square">
+            <a:spAutoFit/>
+          </a:bodyPr>
+          <a:lstStyle/>
+          <a:p>
+            <a:pPr algn="ctr"/>
+            <a:r>
+              <a:rPr sz="900" b="0" i="0">
+                <a:solidFill>
+                  <a:srgbClr val="B0BEC5"/>
+                </a:solidFill>
+                <a:latin typeface="Calibri"/>
+              </a:rPr>
+              <a:t>PPG Debt Service
+(post-deal)</a:t>
+            </a:r>
+          </a:p>
+        </p:txBody>
+      </p:sp>
+      <p:sp>
+        <p:nvSpPr>
+          <p:cNvPr id="21" name="TextBox 20"/>
+          <p:cNvSpPr txBox="1"/>
+          <p:nvPr/>
+        </p:nvSpPr>
+        <p:spPr>
+          <a:xfrm>
+            <a:off x="502920" y="4005071"/>
+            <a:ext cx="3657599" cy="502920"/>
+          </a:xfrm>
+          <a:prstGeom prst="rect">
+            <a:avLst/>
+          </a:prstGeom>
+          <a:noFill/>
+        </p:spPr>
+        <p:txBody>
+          <a:bodyPr wrap="square">
+            <a:spAutoFit/>
+          </a:bodyPr>
+          <a:lstStyle/>
+          <a:p>
+            <a:pPr algn="ctr"/>
+            <a:r>
+              <a:rPr sz="2200" b="1" i="0">
+                <a:solidFill>
+                  <a:srgbClr val="2ECC71"/>
+                </a:solidFill>
+                <a:latin typeface="Calibri"/>
+              </a:rPr>
+              <a:t>3.0 %</a:t>
+            </a:r>
+          </a:p>
+        </p:txBody>
+      </p:sp>
+      <p:sp>
+        <p:nvSpPr>
+          <p:cNvPr id="22" name="TextBox 21"/>
+          <p:cNvSpPr txBox="1"/>
+          <p:nvPr/>
+        </p:nvSpPr>
+        <p:spPr>
+          <a:xfrm>
+            <a:off x="548640" y="4480559"/>
+            <a:ext cx="3566159" cy="365760"/>
+          </a:xfrm>
+          <a:prstGeom prst="rect">
+            <a:avLst/>
+          </a:prstGeom>
+          <a:noFill/>
+        </p:spPr>
+        <p:txBody>
+          <a:bodyPr wrap="square">
+            <a:spAutoFit/>
+          </a:bodyPr>
+          <a:lstStyle/>
+          <a:p>
+            <a:pPr algn="ctr"/>
+            <a:r>
+              <a:rPr sz="800" b="0" i="0">
+                <a:solidFill>
+                  <a:srgbClr val="B0BEC5"/>
+                </a:solidFill>
+                <a:latin typeface="Calibri"/>
+              </a:rPr>
+              <a:t>down from 12.5% of exports</a:t>
+            </a:r>
+          </a:p>
+        </p:txBody>
+      </p:sp>
+      <p:sp>
+        <p:nvSpPr>
+          <p:cNvPr id="23" name="Rectangle 22"/>
+          <p:cNvSpPr/>
+          <p:nvPr/>
+        </p:nvSpPr>
+        <p:spPr>
+          <a:xfrm>
+            <a:off x="4315967" y="3566159"/>
+            <a:ext cx="3749039" cy="1417320"/>
+          </a:xfrm>
+          <a:prstGeom prst="rect">
+            <a:avLst/>
+          </a:prstGeom>
+          <a:solidFill>
+            <a:srgbClr val="1E3A5F"/>
+          </a:solidFill>
+          <a:ln>
+            <a:noFill/>
+          </a:ln>
+        </p:spPr>
+        <p:style>
+          <a:lnRef idx="1">
+            <a:schemeClr val="accent1"/>
+          </a:lnRef>
+          <a:fillRef idx="3">
+            <a:schemeClr val="accent1"/>
+          </a:fillRef>
+          <a:effectRef idx="2">
+            <a:schemeClr val="accent1"/>
+          </a:effectRef>
+          <a:fontRef idx="minor">
+            <a:schemeClr val="lt1"/>
+          </a:fontRef>
+        </p:style>
+        <p:txBody>
+          <a:bodyPr rtlCol="0" anchor="ctr"/>
+          <a:lstStyle/>
+          <a:p>
+            <a:pPr algn="ctr"/>
+          </a:p>
+        </p:txBody>
+      </p:sp>
+      <p:sp>
+        <p:nvSpPr>
+          <p:cNvPr id="24" name="TextBox 23"/>
+          <p:cNvSpPr txBox="1"/>
+          <p:nvPr/>
+        </p:nvSpPr>
+        <p:spPr>
+          <a:xfrm>
+            <a:off x="4407407" y="3675887"/>
+            <a:ext cx="3566159" cy="365760"/>
+          </a:xfrm>
+          <a:prstGeom prst="rect">
+            <a:avLst/>
+          </a:prstGeom>
+          <a:noFill/>
+        </p:spPr>
+        <p:txBody>
+          <a:bodyPr wrap="square">
+            <a:spAutoFit/>
+          </a:bodyPr>
+          <a:lstStyle/>
+          <a:p>
+            <a:pPr algn="ctr"/>
+            <a:r>
+              <a:rPr sz="900" b="0" i="0">
+                <a:solidFill>
+                  <a:srgbClr val="B0BEC5"/>
+                </a:solidFill>
+                <a:latin typeface="Calibri"/>
+              </a:rPr>
+              <a:t>GDP Growth (2024)</a:t>
+            </a:r>
+          </a:p>
+        </p:txBody>
+      </p:sp>
+      <p:sp>
+        <p:nvSpPr>
+          <p:cNvPr id="25" name="TextBox 24"/>
+          <p:cNvSpPr txBox="1"/>
+          <p:nvPr/>
+        </p:nvSpPr>
+        <p:spPr>
+          <a:xfrm>
+            <a:off x="4361687" y="4005071"/>
+            <a:ext cx="3657599" cy="502920"/>
+          </a:xfrm>
+          <a:prstGeom prst="rect">
+            <a:avLst/>
+          </a:prstGeom>
+          <a:noFill/>
+        </p:spPr>
+        <p:txBody>
+          <a:bodyPr wrap="square">
+            <a:spAutoFit/>
+          </a:bodyPr>
+          <a:lstStyle/>
+          <a:p>
+            <a:pPr algn="ctr"/>
+            <a:r>
+              <a:rPr sz="2200" b="1" i="0">
+                <a:solidFill>
+                  <a:srgbClr val="2ECC71"/>
+                </a:solidFill>
+                <a:latin typeface="Calibri"/>
+              </a:rPr>
+              <a:t>5.3 %</a:t>
+            </a:r>
+          </a:p>
+        </p:txBody>
+      </p:sp>
+      <p:sp>
+        <p:nvSpPr>
+          <p:cNvPr id="26" name="TextBox 25"/>
+          <p:cNvSpPr txBox="1"/>
+          <p:nvPr/>
+        </p:nvSpPr>
+        <p:spPr>
+          <a:xfrm>
+            <a:off x="4407407" y="4480559"/>
+            <a:ext cx="3566159" cy="365760"/>
+          </a:xfrm>
+          <a:prstGeom prst="rect">
+            <a:avLst/>
+          </a:prstGeom>
+          <a:noFill/>
+        </p:spPr>
+        <p:txBody>
+          <a:bodyPr wrap="square">
+            <a:spAutoFit/>
+          </a:bodyPr>
+          <a:lstStyle/>
+          <a:p>
+            <a:pPr algn="ctr"/>
+            <a:r>
+              <a:rPr sz="800" b="0" i="0">
+                <a:solidFill>
+                  <a:srgbClr val="B0BEC5"/>
+                </a:solidFill>
+                <a:latin typeface="Calibri"/>
+              </a:rPr>
+              <a:t>sustained as Cu prices cooled</a:t>
+            </a:r>
+          </a:p>
+        </p:txBody>
+      </p:sp>
+      <p:sp>
+        <p:nvSpPr>
+          <p:cNvPr id="27" name="Rectangle 26"/>
+          <p:cNvSpPr/>
+          <p:nvPr/>
+        </p:nvSpPr>
+        <p:spPr>
+          <a:xfrm>
+            <a:off x="8174734" y="3566159"/>
+            <a:ext cx="3749039" cy="1417320"/>
+          </a:xfrm>
+          <a:prstGeom prst="rect">
+            <a:avLst/>
+          </a:prstGeom>
+          <a:solidFill>
+            <a:srgbClr val="1E3A5F"/>
+          </a:solidFill>
+          <a:ln>
+            <a:noFill/>
+          </a:ln>
+        </p:spPr>
+        <p:style>
+          <a:lnRef idx="1">
+            <a:schemeClr val="accent1"/>
+          </a:lnRef>
+          <a:fillRef idx="3">
+            <a:schemeClr val="accent1"/>
+          </a:fillRef>
+          <a:effectRef idx="2">
+            <a:schemeClr val="accent1"/>
+          </a:effectRef>
+          <a:fontRef idx="minor">
+            <a:schemeClr val="lt1"/>
+          </a:fontRef>
+        </p:style>
+        <p:txBody>
+          <a:bodyPr rtlCol="0" anchor="ctr"/>
+          <a:lstStyle/>
+          <a:p>
+            <a:pPr algn="ctr"/>
+          </a:p>
+        </p:txBody>
+      </p:sp>
+      <p:sp>
+        <p:nvSpPr>
+          <p:cNvPr id="28" name="TextBox 27"/>
+          <p:cNvSpPr txBox="1"/>
+          <p:nvPr/>
+        </p:nvSpPr>
+        <p:spPr>
+          <a:xfrm>
+            <a:off x="8266174" y="3675887"/>
+            <a:ext cx="3566159" cy="365760"/>
+          </a:xfrm>
+          <a:prstGeom prst="rect">
+            <a:avLst/>
+          </a:prstGeom>
+          <a:noFill/>
+        </p:spPr>
+        <p:txBody>
+          <a:bodyPr wrap="square">
+            <a:spAutoFit/>
+          </a:bodyPr>
+          <a:lstStyle/>
+          <a:p>
+            <a:pPr algn="ctr"/>
+            <a:r>
+              <a:rPr sz="900" b="0" i="0">
+                <a:solidFill>
+                  <a:srgbClr val="B0BEC5"/>
+                </a:solidFill>
+                <a:latin typeface="Calibri"/>
+              </a:rPr>
+              <a:t>FDI Inflows (2024)</a:t>
+            </a:r>
+          </a:p>
+        </p:txBody>
+      </p:sp>
+      <p:sp>
+        <p:nvSpPr>
+          <p:cNvPr id="29" name="TextBox 28"/>
+          <p:cNvSpPr txBox="1"/>
+          <p:nvPr/>
+        </p:nvSpPr>
+        <p:spPr>
+          <a:xfrm>
+            <a:off x="8220454" y="4005071"/>
+            <a:ext cx="3657599" cy="502920"/>
+          </a:xfrm>
+          <a:prstGeom prst="rect">
+            <a:avLst/>
+          </a:prstGeom>
+          <a:noFill/>
+        </p:spPr>
+        <p:txBody>
+          <a:bodyPr wrap="square">
+            <a:spAutoFit/>
+          </a:bodyPr>
+          <a:lstStyle/>
+          <a:p>
+            <a:pPr algn="ctr"/>
+            <a:r>
+              <a:rPr sz="2200" b="1" i="0">
+                <a:solidFill>
+                  <a:srgbClr val="E88C00"/>
+                </a:solidFill>
+                <a:latin typeface="Calibri"/>
+              </a:rPr>
+              <a:t>9.32 %</a:t>
+            </a:r>
+          </a:p>
+        </p:txBody>
+      </p:sp>
+      <p:sp>
+        <p:nvSpPr>
+          <p:cNvPr id="30" name="TextBox 29"/>
+          <p:cNvSpPr txBox="1"/>
+          <p:nvPr/>
+        </p:nvSpPr>
+        <p:spPr>
+          <a:xfrm>
+            <a:off x="8266174" y="4480559"/>
+            <a:ext cx="3566159" cy="365760"/>
+          </a:xfrm>
+          <a:prstGeom prst="rect">
+            <a:avLst/>
+          </a:prstGeom>
+          <a:noFill/>
+        </p:spPr>
+        <p:txBody>
+          <a:bodyPr wrap="square">
+            <a:spAutoFit/>
+          </a:bodyPr>
+          <a:lstStyle/>
+          <a:p>
+            <a:pPr algn="ctr"/>
+            <a:r>
+              <a:rPr sz="800" b="0" i="0">
+                <a:solidFill>
+                  <a:srgbClr val="B0BEC5"/>
+                </a:solidFill>
+                <a:latin typeface="Calibri"/>
+              </a:rPr>
+              <a:t>decade high, % of GDP</a:t>
+            </a:r>
+          </a:p>
+        </p:txBody>
+      </p:sp>
+      <p:sp>
+        <p:nvSpPr>
+          <p:cNvPr id="31" name="TextBox 30"/>
+          <p:cNvSpPr txBox="1"/>
+          <p:nvPr/>
+        </p:nvSpPr>
+        <p:spPr>
+          <a:xfrm>
+            <a:off x="457200" y="5989320"/>
+            <a:ext cx="10972800" cy="502920"/>
+          </a:xfrm>
+          <a:prstGeom prst="rect">
+            <a:avLst/>
+          </a:prstGeom>
+          <a:noFill/>
+        </p:spPr>
+        <p:txBody>
+          <a:bodyPr wrap="square">
+            <a:spAutoFit/>
+          </a:bodyPr>
+          <a:lstStyle/>
+          <a:p>
             <a:pPr algn="l"/>
             <a:r>
               <a:rPr sz="800" b="0" i="0">
@@ -6980,14 +7827,14 @@
                 </a:solidFill>
                 <a:latin typeface="Calibri"/>
               </a:rPr>
-              <a:t>Sources: World Bank WDI · IMF WEO · Bank of Zambia · Ministry of Finance — Report on the Economy 2025</a:t>
-            </a:r>
-          </a:p>
-        </p:txBody>
-      </p:sp>
-      <p:sp>
-        <p:nvSpPr>
-          <p:cNvPr id="12" name="TextBox 11"/>
+              <a:t>Sources: World Bank WDI · IMF World Economic Outlook · Bank of Zambia · Ministry of Finance — Report on the Economy 2025</a:t>
+            </a:r>
+          </a:p>
+        </p:txBody>
+      </p:sp>
+      <p:sp>
+        <p:nvSpPr>
+          <p:cNvPr id="32" name="TextBox 31"/>
           <p:cNvSpPr txBox="1"/>
           <p:nvPr/>
         </p:nvSpPr>
@@ -7162,7 +8009,7 @@
                 </a:solidFill>
                 <a:latin typeface="Calibri"/>
               </a:rPr>
-              <a:t>KEY METRICS  ·  THE NUMBERS AT A GLANCE</a:t>
+              <a:t>DATA EVIDENCE  ·  CHARTS</a:t>
             </a:r>
           </a:p>
         </p:txBody>
@@ -7175,8 +8022,8 @@
         </p:nvSpPr>
         <p:spPr>
           <a:xfrm>
-            <a:off x="457200" y="640080"/>
-            <a:ext cx="10972800" cy="822960"/>
+            <a:off x="457200" y="594360"/>
+            <a:ext cx="11430000" cy="822960"/>
           </a:xfrm>
           <a:prstGeom prst="rect">
             <a:avLst/>
@@ -7191,13 +8038,13 @@
           <a:p>
             <a:pPr algn="l"/>
             <a:r>
-              <a:rPr sz="2600" b="1">
+              <a:rPr sz="2400" b="1">
                 <a:solidFill>
                   <a:srgbClr val="F5F5F5"/>
                 </a:solidFill>
                 <a:latin typeface="Calibri"/>
               </a:rPr>
-              <a:t>The Numbers Confirm the Verdict</a:t>
+              <a:t>GDP Growth &amp; FDI Inflows: The Recovery Visualised</a:t>
             </a:r>
           </a:p>
         </p:txBody>
@@ -7210,7 +8057,7 @@
         </p:nvSpPr>
         <p:spPr>
           <a:xfrm>
-            <a:off x="457200" y="1508760"/>
+            <a:off x="457200" y="1417320"/>
             <a:ext cx="11430000" cy="19050"/>
           </a:xfrm>
           <a:prstGeom prst="rect">
@@ -7247,57 +8094,14 @@
       </p:sp>
       <p:sp>
         <p:nvSpPr>
-          <p:cNvPr id="7" name="Rectangle 6"/>
-          <p:cNvSpPr/>
-          <p:nvPr/>
-        </p:nvSpPr>
-        <p:spPr>
-          <a:xfrm>
-            <a:off x="457200" y="1874519"/>
-            <a:ext cx="3749039" cy="1417320"/>
-          </a:xfrm>
-          <a:prstGeom prst="rect">
-            <a:avLst/>
-          </a:prstGeom>
-          <a:solidFill>
-            <a:srgbClr val="1E3A5F"/>
-          </a:solidFill>
-          <a:ln>
-            <a:noFill/>
-          </a:ln>
-        </p:spPr>
-        <p:style>
-          <a:lnRef idx="1">
-            <a:schemeClr val="accent1"/>
-          </a:lnRef>
-          <a:fillRef idx="3">
-            <a:schemeClr val="accent1"/>
-          </a:fillRef>
-          <a:effectRef idx="2">
-            <a:schemeClr val="accent1"/>
-          </a:effectRef>
-          <a:fontRef idx="minor">
-            <a:schemeClr val="lt1"/>
-          </a:fontRef>
-        </p:style>
-        <p:txBody>
-          <a:bodyPr rtlCol="0" anchor="ctr"/>
-          <a:lstStyle/>
-          <a:p>
-            <a:pPr algn="ctr"/>
-          </a:p>
-        </p:txBody>
-      </p:sp>
-      <p:sp>
-        <p:nvSpPr>
-          <p:cNvPr id="8" name="TextBox 7"/>
+          <p:cNvPr id="7" name="TextBox 6"/>
           <p:cNvSpPr txBox="1"/>
           <p:nvPr/>
         </p:nvSpPr>
         <p:spPr>
           <a:xfrm>
-            <a:off x="548640" y="1984247"/>
-            <a:ext cx="3566159" cy="365760"/>
+            <a:off x="457200" y="1554480"/>
+            <a:ext cx="5669280" cy="274320"/>
           </a:xfrm>
           <a:prstGeom prst="rect">
             <a:avLst/>
@@ -7310,19 +8114,37 @@
           </a:bodyPr>
           <a:lstStyle/>
           <a:p>
-            <a:pPr algn="ctr"/>
-            <a:r>
-              <a:rPr sz="900" b="0" i="0">
+            <a:pPr algn="l"/>
+            <a:r>
+              <a:rPr sz="800" b="1" i="0">
                 <a:solidFill>
                   <a:srgbClr val="B0BEC5"/>
                 </a:solidFill>
                 <a:latin typeface="Calibri"/>
               </a:rPr>
-              <a:t>External Debt Peak</a:t>
-            </a:r>
-          </a:p>
-        </p:txBody>
-      </p:sp>
+              <a:t>GDP GROWTH  (% annual)  ·  2015–2024  ·  Red = contraction</a:t>
+            </a:r>
+          </a:p>
+        </p:txBody>
+      </p:sp>
+      <p:graphicFrame>
+        <p:nvGraphicFramePr>
+          <p:cNvPr id="8" name="Chart 7"/>
+          <p:cNvGraphicFramePr>
+            <a:graphicFrameLocks noGrp="1"/>
+          </p:cNvGraphicFramePr>
+          <p:nvPr/>
+        </p:nvGraphicFramePr>
+        <p:xfrm>
+          <a:off x="457200" y="1828800"/>
+          <a:ext cx="5669280" cy="4297680"/>
+        </p:xfrm>
+        <a:graphic>
+          <a:graphicData uri="http://schemas.openxmlformats.org/drawingml/2006/chart">
+            <c:chart xmlns:c="http://schemas.openxmlformats.org/drawingml/2006/chart" r:id="rId2"/>
+          </a:graphicData>
+        </a:graphic>
+      </p:graphicFrame>
       <p:sp>
         <p:nvSpPr>
           <p:cNvPr id="9" name="TextBox 8"/>
@@ -7331,8 +8153,8 @@
         </p:nvSpPr>
         <p:spPr>
           <a:xfrm>
-            <a:off x="502920" y="2313431"/>
-            <a:ext cx="3657599" cy="502920"/>
+            <a:off x="6400800" y="1554480"/>
+            <a:ext cx="5486400" cy="274320"/>
           </a:xfrm>
           <a:prstGeom prst="rect">
             <a:avLst/>
@@ -7345,29 +8167,47 @@
           </a:bodyPr>
           <a:lstStyle/>
           <a:p>
-            <a:pPr algn="ctr"/>
-            <a:r>
-              <a:rPr sz="2200" b="1" i="0">
-                <a:solidFill>
-                  <a:srgbClr val="E74C3C"/>
-                </a:solidFill>
-                <a:latin typeface="Calibri"/>
-              </a:rPr>
-              <a:t>$29.1 B</a:t>
-            </a:r>
-          </a:p>
-        </p:txBody>
-      </p:sp>
-      <p:sp>
-        <p:nvSpPr>
-          <p:cNvPr id="10" name="TextBox 9"/>
+            <a:pPr algn="l"/>
+            <a:r>
+              <a:rPr sz="800" b="1" i="0">
+                <a:solidFill>
+                  <a:srgbClr val="B0BEC5"/>
+                </a:solidFill>
+                <a:latin typeface="Calibri"/>
+              </a:rPr>
+              <a:t>FDI NET INFLOWS  (% of GDP)  ·  2015–2024  ·  Green = decade-high</a:t>
+            </a:r>
+          </a:p>
+        </p:txBody>
+      </p:sp>
+      <p:graphicFrame>
+        <p:nvGraphicFramePr>
+          <p:cNvPr id="10" name="Chart 9"/>
+          <p:cNvGraphicFramePr>
+            <a:graphicFrameLocks noGrp="1"/>
+          </p:cNvGraphicFramePr>
+          <p:nvPr/>
+        </p:nvGraphicFramePr>
+        <p:xfrm>
+          <a:off x="6400800" y="1828800"/>
+          <a:ext cx="5486400" cy="4297680"/>
+        </p:xfrm>
+        <a:graphic>
+          <a:graphicData uri="http://schemas.openxmlformats.org/drawingml/2006/chart">
+            <c:chart xmlns:c="http://schemas.openxmlformats.org/drawingml/2006/chart" r:id="rId3"/>
+          </a:graphicData>
+        </a:graphic>
+      </p:graphicFrame>
+      <p:sp>
+        <p:nvSpPr>
+          <p:cNvPr id="11" name="TextBox 10"/>
           <p:cNvSpPr txBox="1"/>
           <p:nvPr/>
         </p:nvSpPr>
         <p:spPr>
           <a:xfrm>
-            <a:off x="548640" y="2788919"/>
-            <a:ext cx="3566159" cy="365760"/>
+            <a:off x="457200" y="6236208"/>
+            <a:ext cx="10972800" cy="365760"/>
           </a:xfrm>
           <a:prstGeom prst="rect">
             <a:avLst/>
@@ -7380,7 +8220,7 @@
           </a:bodyPr>
           <a:lstStyle/>
           <a:p>
-            <a:pPr algn="ctr"/>
+            <a:pPr algn="l"/>
             <a:r>
               <a:rPr sz="800" b="0" i="0">
                 <a:solidFill>
@@ -7388,789 +8228,14 @@
                 </a:solidFill>
                 <a:latin typeface="Calibri"/>
               </a:rPr>
-              <a:t>2019  (tripled in 4 years)</a:t>
-            </a:r>
-          </a:p>
-        </p:txBody>
-      </p:sp>
-      <p:sp>
-        <p:nvSpPr>
-          <p:cNvPr id="11" name="Rectangle 10"/>
-          <p:cNvSpPr/>
-          <p:nvPr/>
-        </p:nvSpPr>
-        <p:spPr>
-          <a:xfrm>
-            <a:off x="4315967" y="1874519"/>
-            <a:ext cx="3749039" cy="1417320"/>
-          </a:xfrm>
-          <a:prstGeom prst="rect">
-            <a:avLst/>
-          </a:prstGeom>
-          <a:solidFill>
-            <a:srgbClr val="1E3A5F"/>
-          </a:solidFill>
-          <a:ln>
-            <a:noFill/>
-          </a:ln>
-        </p:spPr>
-        <p:style>
-          <a:lnRef idx="1">
-            <a:schemeClr val="accent1"/>
-          </a:lnRef>
-          <a:fillRef idx="3">
-            <a:schemeClr val="accent1"/>
-          </a:fillRef>
-          <a:effectRef idx="2">
-            <a:schemeClr val="accent1"/>
-          </a:effectRef>
-          <a:fontRef idx="minor">
-            <a:schemeClr val="lt1"/>
-          </a:fontRef>
-        </p:style>
-        <p:txBody>
-          <a:bodyPr rtlCol="0" anchor="ctr"/>
-          <a:lstStyle/>
-          <a:p>
-            <a:pPr algn="ctr"/>
+              <a:t>Sources: World Bank WDI · IMF WEO · Bank of Zambia · Ministry of Finance — Report on the Economy 2025</a:t>
+            </a:r>
           </a:p>
         </p:txBody>
       </p:sp>
       <p:sp>
         <p:nvSpPr>
           <p:cNvPr id="12" name="TextBox 11"/>
-          <p:cNvSpPr txBox="1"/>
-          <p:nvPr/>
-        </p:nvSpPr>
-        <p:spPr>
-          <a:xfrm>
-            <a:off x="4407407" y="1984247"/>
-            <a:ext cx="3566159" cy="365760"/>
-          </a:xfrm>
-          <a:prstGeom prst="rect">
-            <a:avLst/>
-          </a:prstGeom>
-          <a:noFill/>
-        </p:spPr>
-        <p:txBody>
-          <a:bodyPr wrap="square">
-            <a:spAutoFit/>
-          </a:bodyPr>
-          <a:lstStyle/>
-          <a:p>
-            <a:pPr algn="ctr"/>
-            <a:r>
-              <a:rPr sz="900" b="0" i="0">
-                <a:solidFill>
-                  <a:srgbClr val="B0BEC5"/>
-                </a:solidFill>
-                <a:latin typeface="Calibri"/>
-              </a:rPr>
-              <a:t>Current Account Swing</a:t>
-            </a:r>
-          </a:p>
-        </p:txBody>
-      </p:sp>
-      <p:sp>
-        <p:nvSpPr>
-          <p:cNvPr id="13" name="TextBox 12"/>
-          <p:cNvSpPr txBox="1"/>
-          <p:nvPr/>
-        </p:nvSpPr>
-        <p:spPr>
-          <a:xfrm>
-            <a:off x="4361687" y="2313431"/>
-            <a:ext cx="3657599" cy="502920"/>
-          </a:xfrm>
-          <a:prstGeom prst="rect">
-            <a:avLst/>
-          </a:prstGeom>
-          <a:noFill/>
-        </p:spPr>
-        <p:txBody>
-          <a:bodyPr wrap="square">
-            <a:spAutoFit/>
-          </a:bodyPr>
-          <a:lstStyle/>
-          <a:p>
-            <a:pPr algn="ctr"/>
-            <a:r>
-              <a:rPr sz="2200" b="1" i="0">
-                <a:solidFill>
-                  <a:srgbClr val="2ECC71"/>
-                </a:solidFill>
-                <a:latin typeface="Calibri"/>
-              </a:rPr>
-              <a:t>+15.5 pp</a:t>
-            </a:r>
-          </a:p>
-        </p:txBody>
-      </p:sp>
-      <p:sp>
-        <p:nvSpPr>
-          <p:cNvPr id="14" name="TextBox 13"/>
-          <p:cNvSpPr txBox="1"/>
-          <p:nvPr/>
-        </p:nvSpPr>
-        <p:spPr>
-          <a:xfrm>
-            <a:off x="4407407" y="2788919"/>
-            <a:ext cx="3566159" cy="365760"/>
-          </a:xfrm>
-          <a:prstGeom prst="rect">
-            <a:avLst/>
-          </a:prstGeom>
-          <a:noFill/>
-        </p:spPr>
-        <p:txBody>
-          <a:bodyPr wrap="square">
-            <a:spAutoFit/>
-          </a:bodyPr>
-          <a:lstStyle/>
-          <a:p>
-            <a:pPr algn="ctr"/>
-            <a:r>
-              <a:rPr sz="800" b="0" i="0">
-                <a:solidFill>
-                  <a:srgbClr val="B0BEC5"/>
-                </a:solidFill>
-                <a:latin typeface="Calibri"/>
-              </a:rPr>
-              <a:t>-3.6 % → +11.9 % of GDP</a:t>
-            </a:r>
-          </a:p>
-        </p:txBody>
-      </p:sp>
-      <p:sp>
-        <p:nvSpPr>
-          <p:cNvPr id="15" name="Rectangle 14"/>
-          <p:cNvSpPr/>
-          <p:nvPr/>
-        </p:nvSpPr>
-        <p:spPr>
-          <a:xfrm>
-            <a:off x="8174734" y="1874519"/>
-            <a:ext cx="3749039" cy="1417320"/>
-          </a:xfrm>
-          <a:prstGeom prst="rect">
-            <a:avLst/>
-          </a:prstGeom>
-          <a:solidFill>
-            <a:srgbClr val="1E3A5F"/>
-          </a:solidFill>
-          <a:ln>
-            <a:noFill/>
-          </a:ln>
-        </p:spPr>
-        <p:style>
-          <a:lnRef idx="1">
-            <a:schemeClr val="accent1"/>
-          </a:lnRef>
-          <a:fillRef idx="3">
-            <a:schemeClr val="accent1"/>
-          </a:fillRef>
-          <a:effectRef idx="2">
-            <a:schemeClr val="accent1"/>
-          </a:effectRef>
-          <a:fontRef idx="minor">
-            <a:schemeClr val="lt1"/>
-          </a:fontRef>
-        </p:style>
-        <p:txBody>
-          <a:bodyPr rtlCol="0" anchor="ctr"/>
-          <a:lstStyle/>
-          <a:p>
-            <a:pPr algn="ctr"/>
-          </a:p>
-        </p:txBody>
-      </p:sp>
-      <p:sp>
-        <p:nvSpPr>
-          <p:cNvPr id="16" name="TextBox 15"/>
-          <p:cNvSpPr txBox="1"/>
-          <p:nvPr/>
-        </p:nvSpPr>
-        <p:spPr>
-          <a:xfrm>
-            <a:off x="8266174" y="1984247"/>
-            <a:ext cx="3566159" cy="365760"/>
-          </a:xfrm>
-          <a:prstGeom prst="rect">
-            <a:avLst/>
-          </a:prstGeom>
-          <a:noFill/>
-        </p:spPr>
-        <p:txBody>
-          <a:bodyPr wrap="square">
-            <a:spAutoFit/>
-          </a:bodyPr>
-          <a:lstStyle/>
-          <a:p>
-            <a:pPr algn="ctr"/>
-            <a:r>
-              <a:rPr sz="900" b="0" i="0">
-                <a:solidFill>
-                  <a:srgbClr val="B0BEC5"/>
-                </a:solidFill>
-                <a:latin typeface="Calibri"/>
-              </a:rPr>
-              <a:t>IMF ECF Approved</a:t>
-            </a:r>
-          </a:p>
-        </p:txBody>
-      </p:sp>
-      <p:sp>
-        <p:nvSpPr>
-          <p:cNvPr id="17" name="TextBox 16"/>
-          <p:cNvSpPr txBox="1"/>
-          <p:nvPr/>
-        </p:nvSpPr>
-        <p:spPr>
-          <a:xfrm>
-            <a:off x="8220454" y="2313431"/>
-            <a:ext cx="3657599" cy="502920"/>
-          </a:xfrm>
-          <a:prstGeom prst="rect">
-            <a:avLst/>
-          </a:prstGeom>
-          <a:noFill/>
-        </p:spPr>
-        <p:txBody>
-          <a:bodyPr wrap="square">
-            <a:spAutoFit/>
-          </a:bodyPr>
-          <a:lstStyle/>
-          <a:p>
-            <a:pPr algn="ctr"/>
-            <a:r>
-              <a:rPr sz="2200" b="1" i="0">
-                <a:solidFill>
-                  <a:srgbClr val="E88C00"/>
-                </a:solidFill>
-                <a:latin typeface="Calibri"/>
-              </a:rPr>
-              <a:t>$1.3 B</a:t>
-            </a:r>
-          </a:p>
-        </p:txBody>
-      </p:sp>
-      <p:sp>
-        <p:nvSpPr>
-          <p:cNvPr id="18" name="TextBox 17"/>
-          <p:cNvSpPr txBox="1"/>
-          <p:nvPr/>
-        </p:nvSpPr>
-        <p:spPr>
-          <a:xfrm>
-            <a:off x="8266174" y="2788919"/>
-            <a:ext cx="3566159" cy="365760"/>
-          </a:xfrm>
-          <a:prstGeom prst="rect">
-            <a:avLst/>
-          </a:prstGeom>
-          <a:noFill/>
-        </p:spPr>
-        <p:txBody>
-          <a:bodyPr wrap="square">
-            <a:spAutoFit/>
-          </a:bodyPr>
-          <a:lstStyle/>
-          <a:p>
-            <a:pPr algn="ctr"/>
-            <a:r>
-              <a:rPr sz="800" b="0" i="0">
-                <a:solidFill>
-                  <a:srgbClr val="B0BEC5"/>
-                </a:solidFill>
-                <a:latin typeface="Calibri"/>
-              </a:rPr>
-              <a:t>2022 facility</a:t>
-            </a:r>
-          </a:p>
-        </p:txBody>
-      </p:sp>
-      <p:sp>
-        <p:nvSpPr>
-          <p:cNvPr id="19" name="Rectangle 18"/>
-          <p:cNvSpPr/>
-          <p:nvPr/>
-        </p:nvSpPr>
-        <p:spPr>
-          <a:xfrm>
-            <a:off x="457200" y="3566159"/>
-            <a:ext cx="3749039" cy="1417320"/>
-          </a:xfrm>
-          <a:prstGeom prst="rect">
-            <a:avLst/>
-          </a:prstGeom>
-          <a:solidFill>
-            <a:srgbClr val="1E3A5F"/>
-          </a:solidFill>
-          <a:ln>
-            <a:noFill/>
-          </a:ln>
-        </p:spPr>
-        <p:style>
-          <a:lnRef idx="1">
-            <a:schemeClr val="accent1"/>
-          </a:lnRef>
-          <a:fillRef idx="3">
-            <a:schemeClr val="accent1"/>
-          </a:fillRef>
-          <a:effectRef idx="2">
-            <a:schemeClr val="accent1"/>
-          </a:effectRef>
-          <a:fontRef idx="minor">
-            <a:schemeClr val="lt1"/>
-          </a:fontRef>
-        </p:style>
-        <p:txBody>
-          <a:bodyPr rtlCol="0" anchor="ctr"/>
-          <a:lstStyle/>
-          <a:p>
-            <a:pPr algn="ctr"/>
-          </a:p>
-        </p:txBody>
-      </p:sp>
-      <p:sp>
-        <p:nvSpPr>
-          <p:cNvPr id="20" name="TextBox 19"/>
-          <p:cNvSpPr txBox="1"/>
-          <p:nvPr/>
-        </p:nvSpPr>
-        <p:spPr>
-          <a:xfrm>
-            <a:off x="548640" y="3675887"/>
-            <a:ext cx="3566159" cy="365760"/>
-          </a:xfrm>
-          <a:prstGeom prst="rect">
-            <a:avLst/>
-          </a:prstGeom>
-          <a:noFill/>
-        </p:spPr>
-        <p:txBody>
-          <a:bodyPr wrap="square">
-            <a:spAutoFit/>
-          </a:bodyPr>
-          <a:lstStyle/>
-          <a:p>
-            <a:pPr algn="ctr"/>
-            <a:r>
-              <a:rPr sz="900" b="0" i="0">
-                <a:solidFill>
-                  <a:srgbClr val="B0BEC5"/>
-                </a:solidFill>
-                <a:latin typeface="Calibri"/>
-              </a:rPr>
-              <a:t>PPG Debt Service (post-deal)</a:t>
-            </a:r>
-          </a:p>
-        </p:txBody>
-      </p:sp>
-      <p:sp>
-        <p:nvSpPr>
-          <p:cNvPr id="21" name="TextBox 20"/>
-          <p:cNvSpPr txBox="1"/>
-          <p:nvPr/>
-        </p:nvSpPr>
-        <p:spPr>
-          <a:xfrm>
-            <a:off x="502920" y="4005071"/>
-            <a:ext cx="3657599" cy="502920"/>
-          </a:xfrm>
-          <a:prstGeom prst="rect">
-            <a:avLst/>
-          </a:prstGeom>
-          <a:noFill/>
-        </p:spPr>
-        <p:txBody>
-          <a:bodyPr wrap="square">
-            <a:spAutoFit/>
-          </a:bodyPr>
-          <a:lstStyle/>
-          <a:p>
-            <a:pPr algn="ctr"/>
-            <a:r>
-              <a:rPr sz="2200" b="1" i="0">
-                <a:solidFill>
-                  <a:srgbClr val="2ECC71"/>
-                </a:solidFill>
-                <a:latin typeface="Calibri"/>
-              </a:rPr>
-              <a:t>3.0 %</a:t>
-            </a:r>
-          </a:p>
-        </p:txBody>
-      </p:sp>
-      <p:sp>
-        <p:nvSpPr>
-          <p:cNvPr id="22" name="TextBox 21"/>
-          <p:cNvSpPr txBox="1"/>
-          <p:nvPr/>
-        </p:nvSpPr>
-        <p:spPr>
-          <a:xfrm>
-            <a:off x="548640" y="4480559"/>
-            <a:ext cx="3566159" cy="365760"/>
-          </a:xfrm>
-          <a:prstGeom prst="rect">
-            <a:avLst/>
-          </a:prstGeom>
-          <a:noFill/>
-        </p:spPr>
-        <p:txBody>
-          <a:bodyPr wrap="square">
-            <a:spAutoFit/>
-          </a:bodyPr>
-          <a:lstStyle/>
-          <a:p>
-            <a:pPr algn="ctr"/>
-            <a:r>
-              <a:rPr sz="800" b="0" i="0">
-                <a:solidFill>
-                  <a:srgbClr val="B0BEC5"/>
-                </a:solidFill>
-                <a:latin typeface="Calibri"/>
-              </a:rPr>
-              <a:t>down from 12.5 % of exports</a:t>
-            </a:r>
-          </a:p>
-        </p:txBody>
-      </p:sp>
-      <p:sp>
-        <p:nvSpPr>
-          <p:cNvPr id="23" name="Rectangle 22"/>
-          <p:cNvSpPr/>
-          <p:nvPr/>
-        </p:nvSpPr>
-        <p:spPr>
-          <a:xfrm>
-            <a:off x="4315967" y="3566159"/>
-            <a:ext cx="3749039" cy="1417320"/>
-          </a:xfrm>
-          <a:prstGeom prst="rect">
-            <a:avLst/>
-          </a:prstGeom>
-          <a:solidFill>
-            <a:srgbClr val="1E3A5F"/>
-          </a:solidFill>
-          <a:ln>
-            <a:noFill/>
-          </a:ln>
-        </p:spPr>
-        <p:style>
-          <a:lnRef idx="1">
-            <a:schemeClr val="accent1"/>
-          </a:lnRef>
-          <a:fillRef idx="3">
-            <a:schemeClr val="accent1"/>
-          </a:fillRef>
-          <a:effectRef idx="2">
-            <a:schemeClr val="accent1"/>
-          </a:effectRef>
-          <a:fontRef idx="minor">
-            <a:schemeClr val="lt1"/>
-          </a:fontRef>
-        </p:style>
-        <p:txBody>
-          <a:bodyPr rtlCol="0" anchor="ctr"/>
-          <a:lstStyle/>
-          <a:p>
-            <a:pPr algn="ctr"/>
-          </a:p>
-        </p:txBody>
-      </p:sp>
-      <p:sp>
-        <p:nvSpPr>
-          <p:cNvPr id="24" name="TextBox 23"/>
-          <p:cNvSpPr txBox="1"/>
-          <p:nvPr/>
-        </p:nvSpPr>
-        <p:spPr>
-          <a:xfrm>
-            <a:off x="4407407" y="3675887"/>
-            <a:ext cx="3566159" cy="365760"/>
-          </a:xfrm>
-          <a:prstGeom prst="rect">
-            <a:avLst/>
-          </a:prstGeom>
-          <a:noFill/>
-        </p:spPr>
-        <p:txBody>
-          <a:bodyPr wrap="square">
-            <a:spAutoFit/>
-          </a:bodyPr>
-          <a:lstStyle/>
-          <a:p>
-            <a:pPr algn="ctr"/>
-            <a:r>
-              <a:rPr sz="900" b="0" i="0">
-                <a:solidFill>
-                  <a:srgbClr val="B0BEC5"/>
-                </a:solidFill>
-                <a:latin typeface="Calibri"/>
-              </a:rPr>
-              <a:t>GDP Growth (2024)</a:t>
-            </a:r>
-          </a:p>
-        </p:txBody>
-      </p:sp>
-      <p:sp>
-        <p:nvSpPr>
-          <p:cNvPr id="25" name="TextBox 24"/>
-          <p:cNvSpPr txBox="1"/>
-          <p:nvPr/>
-        </p:nvSpPr>
-        <p:spPr>
-          <a:xfrm>
-            <a:off x="4361687" y="4005071"/>
-            <a:ext cx="3657599" cy="502920"/>
-          </a:xfrm>
-          <a:prstGeom prst="rect">
-            <a:avLst/>
-          </a:prstGeom>
-          <a:noFill/>
-        </p:spPr>
-        <p:txBody>
-          <a:bodyPr wrap="square">
-            <a:spAutoFit/>
-          </a:bodyPr>
-          <a:lstStyle/>
-          <a:p>
-            <a:pPr algn="ctr"/>
-            <a:r>
-              <a:rPr sz="2200" b="1" i="0">
-                <a:solidFill>
-                  <a:srgbClr val="2ECC71"/>
-                </a:solidFill>
-                <a:latin typeface="Calibri"/>
-              </a:rPr>
-              <a:t>5.3 %</a:t>
-            </a:r>
-          </a:p>
-        </p:txBody>
-      </p:sp>
-      <p:sp>
-        <p:nvSpPr>
-          <p:cNvPr id="26" name="TextBox 25"/>
-          <p:cNvSpPr txBox="1"/>
-          <p:nvPr/>
-        </p:nvSpPr>
-        <p:spPr>
-          <a:xfrm>
-            <a:off x="4407407" y="4480559"/>
-            <a:ext cx="3566159" cy="365760"/>
-          </a:xfrm>
-          <a:prstGeom prst="rect">
-            <a:avLst/>
-          </a:prstGeom>
-          <a:noFill/>
-        </p:spPr>
-        <p:txBody>
-          <a:bodyPr wrap="square">
-            <a:spAutoFit/>
-          </a:bodyPr>
-          <a:lstStyle/>
-          <a:p>
-            <a:pPr algn="ctr"/>
-            <a:r>
-              <a:rPr sz="800" b="0" i="0">
-                <a:solidFill>
-                  <a:srgbClr val="B0BEC5"/>
-                </a:solidFill>
-                <a:latin typeface="Calibri"/>
-              </a:rPr>
-              <a:t>sustained as Cu prices cooled</a:t>
-            </a:r>
-          </a:p>
-        </p:txBody>
-      </p:sp>
-      <p:sp>
-        <p:nvSpPr>
-          <p:cNvPr id="27" name="Rectangle 26"/>
-          <p:cNvSpPr/>
-          <p:nvPr/>
-        </p:nvSpPr>
-        <p:spPr>
-          <a:xfrm>
-            <a:off x="8174734" y="3566159"/>
-            <a:ext cx="3749039" cy="1417320"/>
-          </a:xfrm>
-          <a:prstGeom prst="rect">
-            <a:avLst/>
-          </a:prstGeom>
-          <a:solidFill>
-            <a:srgbClr val="1E3A5F"/>
-          </a:solidFill>
-          <a:ln>
-            <a:noFill/>
-          </a:ln>
-        </p:spPr>
-        <p:style>
-          <a:lnRef idx="1">
-            <a:schemeClr val="accent1"/>
-          </a:lnRef>
-          <a:fillRef idx="3">
-            <a:schemeClr val="accent1"/>
-          </a:fillRef>
-          <a:effectRef idx="2">
-            <a:schemeClr val="accent1"/>
-          </a:effectRef>
-          <a:fontRef idx="minor">
-            <a:schemeClr val="lt1"/>
-          </a:fontRef>
-        </p:style>
-        <p:txBody>
-          <a:bodyPr rtlCol="0" anchor="ctr"/>
-          <a:lstStyle/>
-          <a:p>
-            <a:pPr algn="ctr"/>
-          </a:p>
-        </p:txBody>
-      </p:sp>
-      <p:sp>
-        <p:nvSpPr>
-          <p:cNvPr id="28" name="TextBox 27"/>
-          <p:cNvSpPr txBox="1"/>
-          <p:nvPr/>
-        </p:nvSpPr>
-        <p:spPr>
-          <a:xfrm>
-            <a:off x="8266174" y="3675887"/>
-            <a:ext cx="3566159" cy="365760"/>
-          </a:xfrm>
-          <a:prstGeom prst="rect">
-            <a:avLst/>
-          </a:prstGeom>
-          <a:noFill/>
-        </p:spPr>
-        <p:txBody>
-          <a:bodyPr wrap="square">
-            <a:spAutoFit/>
-          </a:bodyPr>
-          <a:lstStyle/>
-          <a:p>
-            <a:pPr algn="ctr"/>
-            <a:r>
-              <a:rPr sz="900" b="0" i="0">
-                <a:solidFill>
-                  <a:srgbClr val="B0BEC5"/>
-                </a:solidFill>
-                <a:latin typeface="Calibri"/>
-              </a:rPr>
-              <a:t>FDI Inflows (2024)</a:t>
-            </a:r>
-          </a:p>
-        </p:txBody>
-      </p:sp>
-      <p:sp>
-        <p:nvSpPr>
-          <p:cNvPr id="29" name="TextBox 28"/>
-          <p:cNvSpPr txBox="1"/>
-          <p:nvPr/>
-        </p:nvSpPr>
-        <p:spPr>
-          <a:xfrm>
-            <a:off x="8220454" y="4005071"/>
-            <a:ext cx="3657599" cy="502920"/>
-          </a:xfrm>
-          <a:prstGeom prst="rect">
-            <a:avLst/>
-          </a:prstGeom>
-          <a:noFill/>
-        </p:spPr>
-        <p:txBody>
-          <a:bodyPr wrap="square">
-            <a:spAutoFit/>
-          </a:bodyPr>
-          <a:lstStyle/>
-          <a:p>
-            <a:pPr algn="ctr"/>
-            <a:r>
-              <a:rPr sz="2200" b="1" i="0">
-                <a:solidFill>
-                  <a:srgbClr val="E88C00"/>
-                </a:solidFill>
-                <a:latin typeface="Calibri"/>
-              </a:rPr>
-              <a:t>9.32 %</a:t>
-            </a:r>
-          </a:p>
-        </p:txBody>
-      </p:sp>
-      <p:sp>
-        <p:nvSpPr>
-          <p:cNvPr id="30" name="TextBox 29"/>
-          <p:cNvSpPr txBox="1"/>
-          <p:nvPr/>
-        </p:nvSpPr>
-        <p:spPr>
-          <a:xfrm>
-            <a:off x="8266174" y="4480559"/>
-            <a:ext cx="3566159" cy="365760"/>
-          </a:xfrm>
-          <a:prstGeom prst="rect">
-            <a:avLst/>
-          </a:prstGeom>
-          <a:noFill/>
-        </p:spPr>
-        <p:txBody>
-          <a:bodyPr wrap="square">
-            <a:spAutoFit/>
-          </a:bodyPr>
-          <a:lstStyle/>
-          <a:p>
-            <a:pPr algn="ctr"/>
-            <a:r>
-              <a:rPr sz="800" b="0" i="0">
-                <a:solidFill>
-                  <a:srgbClr val="B0BEC5"/>
-                </a:solidFill>
-                <a:latin typeface="Calibri"/>
-              </a:rPr>
-              <a:t>decade high  ·  % of GDP</a:t>
-            </a:r>
-          </a:p>
-        </p:txBody>
-      </p:sp>
-      <p:sp>
-        <p:nvSpPr>
-          <p:cNvPr id="31" name="TextBox 30"/>
-          <p:cNvSpPr txBox="1"/>
-          <p:nvPr/>
-        </p:nvSpPr>
-        <p:spPr>
-          <a:xfrm>
-            <a:off x="457200" y="5989320"/>
-            <a:ext cx="10972800" cy="365760"/>
-          </a:xfrm>
-          <a:prstGeom prst="rect">
-            <a:avLst/>
-          </a:prstGeom>
-          <a:noFill/>
-        </p:spPr>
-        <p:txBody>
-          <a:bodyPr wrap="square">
-            <a:spAutoFit/>
-          </a:bodyPr>
-          <a:lstStyle/>
-          <a:p>
-            <a:pPr algn="l"/>
-            <a:r>
-              <a:rPr sz="800" b="0" i="0">
-                <a:solidFill>
-                  <a:srgbClr val="B0BEC5"/>
-                </a:solidFill>
-                <a:latin typeface="Calibri"/>
-              </a:rPr>
-              <a:t>Sources: World Bank WDI · IMF WEO · Bank of Zambia · Ministry of Finance — Report on the Economy 2025</a:t>
-            </a:r>
-          </a:p>
-        </p:txBody>
-      </p:sp>
-      <p:sp>
-        <p:nvSpPr>
-          <p:cNvPr id="32" name="TextBox 31"/>
           <p:cNvSpPr txBox="1"/>
           <p:nvPr/>
         </p:nvSpPr>
@@ -8359,7 +8424,7 @@
         <p:spPr>
           <a:xfrm>
             <a:off x="457200" y="640080"/>
-            <a:ext cx="11430000" cy="914400"/>
+            <a:ext cx="11430000" cy="1097280"/>
           </a:xfrm>
           <a:prstGeom prst="rect">
             <a:avLst/>
@@ -8393,7 +8458,7 @@
         </p:nvSpPr>
         <p:spPr>
           <a:xfrm>
-            <a:off x="457200" y="1600200"/>
+            <a:off x="457200" y="1691640"/>
             <a:ext cx="11247120" cy="19050"/>
           </a:xfrm>
           <a:prstGeom prst="rect">
@@ -8436,8 +8501,8 @@
         </p:nvSpPr>
         <p:spPr>
           <a:xfrm>
-            <a:off x="457200" y="1828800"/>
-            <a:ext cx="5486400" cy="365760"/>
+            <a:off x="457200" y="1920240"/>
+            <a:ext cx="5486400" cy="411480"/>
           </a:xfrm>
           <a:prstGeom prst="rect">
             <a:avLst/>
@@ -8471,7 +8536,7 @@
         </p:nvSpPr>
         <p:spPr>
           <a:xfrm>
-            <a:off x="457200" y="2286000"/>
+            <a:off x="457200" y="2377440"/>
             <a:ext cx="5623560" cy="2743200"/>
           </a:xfrm>
           <a:prstGeom prst="rect">
@@ -8493,7 +8558,7 @@
                 </a:solidFill>
                 <a:latin typeface="Calibri"/>
               </a:rPr>
-              <a:t>The global copper price supercycle of 2021 handed Zambia a fiscal windfall: the current account swung by +15.5 pp and exports surged. This created the fiscal space that made restructuring politically viable and economically credible.
+              <a:t>The global copper price supercycle of 2021 handed Zambia a fiscal windfall: the current account swung by +15.5 percentage points and exports surged. This created the fiscal space that made restructuring politically viable and economically credible.
 Without the copper boom, there would have been nothing to restructure toward — and no creditors willing to take a haircut on a country with no revenue trajectory.</a:t>
             </a:r>
           </a:p>
@@ -8507,8 +8572,8 @@
         </p:nvSpPr>
         <p:spPr>
           <a:xfrm>
-            <a:off x="6400800" y="1828800"/>
-            <a:ext cx="5486400" cy="365760"/>
+            <a:off x="6400800" y="1920240"/>
+            <a:ext cx="5486400" cy="411480"/>
           </a:xfrm>
           <a:prstGeom prst="rect">
             <a:avLst/>
@@ -8542,7 +8607,7 @@
         </p:nvSpPr>
         <p:spPr>
           <a:xfrm>
-            <a:off x="6400800" y="2286000"/>
+            <a:off x="6400800" y="2377440"/>
             <a:ext cx="5623560" cy="2743200"/>
           </a:xfrm>
           <a:prstGeom prst="rect">
@@ -8578,8 +8643,8 @@
         </p:nvSpPr>
         <p:spPr>
           <a:xfrm>
-            <a:off x="5989320" y="1737360"/>
-            <a:ext cx="36576" cy="3383280"/>
+            <a:off x="5989320" y="1828800"/>
+            <a:ext cx="36576" cy="3291840"/>
           </a:xfrm>
           <a:prstGeom prst="rect">
             <a:avLst/>
@@ -8621,7 +8686,7 @@
         </p:nvSpPr>
         <p:spPr>
           <a:xfrm>
-            <a:off x="457200" y="5257800"/>
+            <a:off x="457200" y="5303520"/>
             <a:ext cx="11247120" cy="960120"/>
           </a:xfrm>
           <a:prstGeom prst="rect">
@@ -8664,8 +8729,8 @@
         </p:nvSpPr>
         <p:spPr>
           <a:xfrm>
-            <a:off x="594360" y="5321808"/>
-            <a:ext cx="1097280" cy="274320"/>
+            <a:off x="594360" y="5367528"/>
+            <a:ext cx="1097280" cy="292608"/>
           </a:xfrm>
           <a:prstGeom prst="rect">
             <a:avLst/>
@@ -8699,8 +8764,8 @@
         </p:nvSpPr>
         <p:spPr>
           <a:xfrm>
-            <a:off x="594360" y="5596128"/>
-            <a:ext cx="10972800" cy="457200"/>
+            <a:off x="594360" y="5641848"/>
+            <a:ext cx="10972800" cy="502920"/>
           </a:xfrm>
           <a:prstGeom prst="rect">
             <a:avLst/>
@@ -9017,9 +9082,9 @@
                 <a:latin typeface="Calibri"/>
               </a:rPr>
               <a:t>Between 2015 and 2019, Zambia borrowed heavily against future copper revenues, tripling its external debt from $12.3 B to $29.1 B. When COVID-19 struck in 2020, revenues collapsed and Zambia became the first African sovereign pandemic-era default. The question we needed to answer: was the recovery that followed real — and sustainable?
-In 2021, a global copper price supercycle delivered a fiscal windfall. The current account swung 15.5 percentage points — from -3.6 % to +11.9 % of GDP — before the restructuring deal had even been negotiated. Copper created the breathing room.
-But breathing room is not the same as structural reform. In November 2023, Zambia finalised the G20 Common Framework deal, becoming the first country to complete the process. PPG debt service fell from 12.5 % to 3 % of exports; GDP growth held at 5.2–5.4 % even as copper prices cooled; FDI reached a decade-high 9.32 % of GDP.
-The verdict: both were necessary. Commodity luck created the window. Institutional reform made it a door. Zambia's challenge now is to diversify beyond copper — into green energy, agriculture, and manufacturing — before the next downcycle.</a:t>
+In 2021, a global copper price supercycle delivered a fiscal windfall. The current account swung 15.5 percentage points — from a -3.6 % deficit to a +11.9 % surplus — before the restructuring deal had even been negotiated. Copper created the breathing room.
+But breathing room is not the same as structural reform. In November 2023, Zambia finalised the G20 Common Framework deal, becoming the first country to complete the process. The results were clear: PPG debt service fell from 12.5 % to 3 % of exports; GDP growth held at 5.2–5.4 % even as copper prices cooled; and FDI inflows reached a decade-high 9.32 % of GDP in 2024.
+The verdict: both were necessary. Commodity luck created the window. Institutional reform made it a door. Going forward, Zambia's challenge is to diversify beyond copper — into green energy, agriculture, and manufacturing — before the next commodity downcycle tests the depth of these institutional gains.</a:t>
             </a:r>
           </a:p>
         </p:txBody>
@@ -9076,7 +9141,7 @@
         <p:spPr>
           <a:xfrm>
             <a:off x="6537960" y="1463040"/>
-            <a:ext cx="2743200" cy="292608"/>
+            <a:ext cx="2743200" cy="320040"/>
           </a:xfrm>
           <a:prstGeom prst="rect">
             <a:avLst/>

--- a/Zambia_Economic_Recovery_Presentation.pptx
+++ b/Zambia_Economic_Recovery_Presentation.pptx
@@ -321,9 +321,9 @@
   <c:chart>
     <c:autoTitleDeleted val="0"/>
     <c:plotArea>
-      <c:lineChart>
-        <c:grouping val="standard"/>
-        <c:varyColors val="0"/>
+      <c:barChart>
+        <c:barDir val="col"/>
+        <c:grouping val="clustered"/>
         <c:ser>
           <c:idx val="0"/>
           <c:order val="0"/>
@@ -339,15 +339,87 @@
             </c:strRef>
           </c:tx>
           <c:spPr>
-            <a:ln w="25400">
+            <a:solidFill>
+              <a:srgbClr val="2ECC71"/>
+            </a:solidFill>
+            <a:ln>
               <a:solidFill>
                 <a:srgbClr val="2ECC71"/>
               </a:solidFill>
             </a:ln>
           </c:spPr>
-          <c:marker>
-            <c:symbol val="none"/>
-          </c:marker>
+          <c:dPt>
+            <c:idx val="0"/>
+            <c:spPr>
+              <a:solidFill>
+                <a:srgbClr val="E74C3C"/>
+              </a:solidFill>
+            </c:spPr>
+          </c:dPt>
+          <c:dPt>
+            <c:idx val="1"/>
+            <c:spPr>
+              <a:solidFill>
+                <a:srgbClr val="E74C3C"/>
+              </a:solidFill>
+            </c:spPr>
+          </c:dPt>
+          <c:dPt>
+            <c:idx val="2"/>
+            <c:spPr>
+              <a:solidFill>
+                <a:srgbClr val="E74C3C"/>
+              </a:solidFill>
+            </c:spPr>
+          </c:dPt>
+          <c:dPt>
+            <c:idx val="3"/>
+            <c:spPr>
+              <a:solidFill>
+                <a:srgbClr val="E74C3C"/>
+              </a:solidFill>
+            </c:spPr>
+          </c:dPt>
+          <c:dPt>
+            <c:idx val="4"/>
+            <c:spPr>
+              <a:solidFill>
+                <a:srgbClr val="E74C3C"/>
+              </a:solidFill>
+            </c:spPr>
+          </c:dPt>
+          <c:dPt>
+            <c:idx val="6"/>
+            <c:spPr>
+              <a:solidFill>
+                <a:srgbClr val="2ECC71"/>
+              </a:solidFill>
+            </c:spPr>
+          </c:dPt>
+          <c:dPt>
+            <c:idx val="7"/>
+            <c:spPr>
+              <a:solidFill>
+                <a:srgbClr val="2ECC71"/>
+              </a:solidFill>
+            </c:spPr>
+          </c:dPt>
+          <c:dPt>
+            <c:idx val="8"/>
+            <c:spPr>
+              <a:solidFill>
+                <a:srgbClr val="2ECC71"/>
+              </a:solidFill>
+            </c:spPr>
+          </c:dPt>
+          <c:dPt>
+            <c:idx val="9"/>
+            <c:spPr>
+              <a:solidFill>
+                <a:srgbClr val="2ECC71"/>
+              </a:solidFill>
+            </c:spPr>
+          </c:dPt>
           <c:cat>
             <c:strRef>
               <c:f>Sheet1!$A$2:$A$11</c:f>
@@ -425,15 +497,13 @@
               </c:numCache>
             </c:numRef>
           </c:val>
-          <c:smooth/>
         </c:ser>
-        <c:marker val="1"/>
-        <c:smooth val="0"/>
-        <c:axId val="2118791784"/>
-        <c:axId val="2140495176"/>
-      </c:lineChart>
+        <c:gapWidth val="80"/>
+        <c:axId val="-2068027336"/>
+        <c:axId val="-2113994440"/>
+      </c:barChart>
       <c:catAx>
-        <c:axId val="2118791784"/>
+        <c:axId val="-2068027336"/>
         <c:scaling>
           <c:orientation val="minMax"/>
         </c:scaling>
@@ -453,7 +523,7 @@
             </a:pPr>
           </a:p>
         </c:txPr>
-        <c:crossAx val="2140495176"/>
+        <c:crossAx val="-2113994440"/>
         <c:crosses val="autoZero"/>
         <c:auto val="1"/>
         <c:lblAlgn val="ctr"/>
@@ -461,7 +531,7 @@
         <c:noMultiLvlLbl val="0"/>
       </c:catAx>
       <c:valAx>
-        <c:axId val="2140495176"/>
+        <c:axId val="-2113994440"/>
         <c:scaling/>
         <c:delete val="0"/>
         <c:axPos val="l"/>
@@ -480,13 +550,11 @@
             </a:pPr>
           </a:p>
         </c:txPr>
-        <c:crossAx val="2118791784"/>
+        <c:crossAx val="-2068027336"/>
         <c:crosses val="autoZero"/>
       </c:valAx>
     </c:plotArea>
-    <c:plotVisOnly val="1"/>
     <c:dispBlanksAs val="gap"/>
-    <c:showDLblsOverMax val="0"/>
   </c:chart>
   <c:txPr>
     <a:bodyPr/>
@@ -831,28 +899,28 @@
                 <c:formatCode>General</c:formatCode>
                 <c:ptCount val="10"/>
                 <c:pt idx="0">
-                  <c:v>3.2</c:v>
+                  <c:v>3.1</c:v>
                 </c:pt>
                 <c:pt idx="1">
+                  <c:v>2.4</c:v>
+                </c:pt>
+                <c:pt idx="2">
+                  <c:v>4.2</c:v>
+                </c:pt>
+                <c:pt idx="3">
+                  <c:v>1.7</c:v>
+                </c:pt>
+                <c:pt idx="4">
                   <c:v>2.5</c:v>
                 </c:pt>
-                <c:pt idx="2">
-                  <c:v>3.5</c:v>
-                </c:pt>
-                <c:pt idx="3">
-                  <c:v>2.8</c:v>
-                </c:pt>
-                <c:pt idx="4">
-                  <c:v>2.4</c:v>
-                </c:pt>
                 <c:pt idx="5">
-                  <c:v>1.8</c:v>
+                  <c:v>1.9</c:v>
                 </c:pt>
                 <c:pt idx="6">
-                  <c:v>3.7</c:v>
+                  <c:v>3.6</c:v>
                 </c:pt>
                 <c:pt idx="7">
-                  <c:v>5.1</c:v>
+                  <c:v>4.9</c:v>
                 </c:pt>
                 <c:pt idx="8">
                   <c:v>6.8</c:v>
@@ -4633,9 +4701,52 @@
           </a:p>
         </p:txBody>
       </p:sp>
+      <p:sp>
+        <p:nvSpPr>
+          <p:cNvPr id="9" name="Rectangle 8"/>
+          <p:cNvSpPr/>
+          <p:nvPr/>
+        </p:nvSpPr>
+        <p:spPr>
+          <a:xfrm>
+            <a:off x="6583680" y="1783080"/>
+            <a:ext cx="5349240" cy="2834640"/>
+          </a:xfrm>
+          <a:prstGeom prst="rect">
+            <a:avLst/>
+          </a:prstGeom>
+          <a:solidFill>
+            <a:srgbClr val="FFFFFF"/>
+          </a:solidFill>
+          <a:ln>
+            <a:noFill/>
+          </a:ln>
+        </p:spPr>
+        <p:style>
+          <a:lnRef idx="1">
+            <a:schemeClr val="accent1"/>
+          </a:lnRef>
+          <a:fillRef idx="3">
+            <a:schemeClr val="accent1"/>
+          </a:fillRef>
+          <a:effectRef idx="2">
+            <a:schemeClr val="accent1"/>
+          </a:effectRef>
+          <a:fontRef idx="minor">
+            <a:schemeClr val="lt1"/>
+          </a:fontRef>
+        </p:style>
+        <p:txBody>
+          <a:bodyPr rtlCol="0" anchor="ctr"/>
+          <a:lstStyle/>
+          <a:p>
+            <a:pPr algn="ctr"/>
+          </a:p>
+        </p:txBody>
+      </p:sp>
       <p:graphicFrame>
         <p:nvGraphicFramePr>
-          <p:cNvPr id="9" name="Chart 8"/>
+          <p:cNvPr id="10" name="Chart 9"/>
           <p:cNvGraphicFramePr>
             <a:graphicFrameLocks noGrp="1"/>
           </p:cNvGraphicFramePr>
@@ -4653,7 +4764,7 @@
       </p:graphicFrame>
       <p:sp>
         <p:nvSpPr>
-          <p:cNvPr id="10" name="Rectangle 9"/>
+          <p:cNvPr id="11" name="Rectangle 10"/>
           <p:cNvSpPr/>
           <p:nvPr/>
         </p:nvSpPr>
@@ -4696,7 +4807,7 @@
       </p:sp>
       <p:sp>
         <p:nvSpPr>
-          <p:cNvPr id="11" name="TextBox 10"/>
+          <p:cNvPr id="12" name="TextBox 11"/>
           <p:cNvSpPr txBox="1"/>
           <p:nvPr/>
         </p:nvSpPr>
@@ -4731,7 +4842,7 @@
       </p:sp>
       <p:sp>
         <p:nvSpPr>
-          <p:cNvPr id="12" name="TextBox 11"/>
+          <p:cNvPr id="13" name="TextBox 12"/>
           <p:cNvSpPr txBox="1"/>
           <p:nvPr/>
         </p:nvSpPr>
@@ -4766,7 +4877,7 @@
       </p:sp>
       <p:sp>
         <p:nvSpPr>
-          <p:cNvPr id="13" name="TextBox 12"/>
+          <p:cNvPr id="14" name="TextBox 13"/>
           <p:cNvSpPr txBox="1"/>
           <p:nvPr/>
         </p:nvSpPr>
@@ -4801,7 +4912,7 @@
       </p:sp>
       <p:sp>
         <p:nvSpPr>
-          <p:cNvPr id="14" name="TextBox 13"/>
+          <p:cNvPr id="15" name="TextBox 14"/>
           <p:cNvSpPr txBox="1"/>
           <p:nvPr/>
         </p:nvSpPr>
@@ -5193,8 +5304,8 @@
         </p:nvSpPr>
         <p:spPr>
           <a:xfrm>
-            <a:off x="6766560" y="1755648"/>
-            <a:ext cx="1508760" cy="365760"/>
+            <a:off x="6766560" y="1737360"/>
+            <a:ext cx="1508760" cy="411480"/>
           </a:xfrm>
           <a:prstGeom prst="rect">
             <a:avLst/>
@@ -5209,7 +5320,7 @@
           <a:p>
             <a:pPr algn="ctr"/>
             <a:r>
-              <a:rPr sz="900" b="0" i="0">
+              <a:rPr sz="1400" b="0" i="0">
                 <a:solidFill>
                   <a:srgbClr val="B0BEC5"/>
                 </a:solidFill>
@@ -5229,8 +5340,8 @@
         </p:nvSpPr>
         <p:spPr>
           <a:xfrm>
-            <a:off x="6720840" y="2084832"/>
-            <a:ext cx="1600200" cy="502920"/>
+            <a:off x="6720840" y="2121408"/>
+            <a:ext cx="1600200" cy="530352"/>
           </a:xfrm>
           <a:prstGeom prst="rect">
             <a:avLst/>
@@ -5245,7 +5356,7 @@
           <a:p>
             <a:pPr algn="ctr"/>
             <a:r>
-              <a:rPr sz="2200" b="1" i="0">
+              <a:rPr sz="2400" b="1" i="0">
                 <a:solidFill>
                   <a:srgbClr val="E74C3C"/>
                 </a:solidFill>
@@ -5264,8 +5375,8 @@
         </p:nvSpPr>
         <p:spPr>
           <a:xfrm>
-            <a:off x="6766560" y="2560320"/>
-            <a:ext cx="1508760" cy="365760"/>
+            <a:off x="6766560" y="2633472"/>
+            <a:ext cx="1508760" cy="384048"/>
           </a:xfrm>
           <a:prstGeom prst="rect">
             <a:avLst/>
@@ -5280,7 +5391,7 @@
           <a:p>
             <a:pPr algn="ctr"/>
             <a:r>
-              <a:rPr sz="800" b="0" i="0">
+              <a:rPr sz="1200" b="0" i="0">
                 <a:solidFill>
                   <a:srgbClr val="B0BEC5"/>
                 </a:solidFill>
@@ -5342,8 +5453,8 @@
         </p:nvSpPr>
         <p:spPr>
           <a:xfrm>
-            <a:off x="8595360" y="1755648"/>
-            <a:ext cx="1508760" cy="365760"/>
+            <a:off x="8595360" y="1737360"/>
+            <a:ext cx="1508760" cy="411480"/>
           </a:xfrm>
           <a:prstGeom prst="rect">
             <a:avLst/>
@@ -5358,7 +5469,7 @@
           <a:p>
             <a:pPr algn="ctr"/>
             <a:r>
-              <a:rPr sz="900" b="0" i="0">
+              <a:rPr sz="1400" b="0" i="0">
                 <a:solidFill>
                   <a:srgbClr val="B0BEC5"/>
                 </a:solidFill>
@@ -5378,8 +5489,8 @@
         </p:nvSpPr>
         <p:spPr>
           <a:xfrm>
-            <a:off x="8549640" y="2084832"/>
-            <a:ext cx="1600200" cy="502920"/>
+            <a:off x="8549640" y="2121408"/>
+            <a:ext cx="1600200" cy="530352"/>
           </a:xfrm>
           <a:prstGeom prst="rect">
             <a:avLst/>
@@ -5394,7 +5505,7 @@
           <a:p>
             <a:pPr algn="ctr"/>
             <a:r>
-              <a:rPr sz="2200" b="1" i="0">
+              <a:rPr sz="2400" b="1" i="0">
                 <a:solidFill>
                   <a:srgbClr val="2ECC71"/>
                 </a:solidFill>
@@ -5413,8 +5524,8 @@
         </p:nvSpPr>
         <p:spPr>
           <a:xfrm>
-            <a:off x="8595360" y="2560320"/>
-            <a:ext cx="1508760" cy="365760"/>
+            <a:off x="8595360" y="2633472"/>
+            <a:ext cx="1508760" cy="384048"/>
           </a:xfrm>
           <a:prstGeom prst="rect">
             <a:avLst/>
@@ -5429,7 +5540,7 @@
           <a:p>
             <a:pPr algn="ctr"/>
             <a:r>
-              <a:rPr sz="800" b="0" i="0">
+              <a:rPr sz="1200" b="0" i="0">
                 <a:solidFill>
                   <a:srgbClr val="B0BEC5"/>
                 </a:solidFill>
@@ -5491,8 +5602,8 @@
         </p:nvSpPr>
         <p:spPr>
           <a:xfrm>
-            <a:off x="10424160" y="1755648"/>
-            <a:ext cx="1508760" cy="365760"/>
+            <a:off x="10424160" y="1737360"/>
+            <a:ext cx="1508760" cy="411480"/>
           </a:xfrm>
           <a:prstGeom prst="rect">
             <a:avLst/>
@@ -5507,7 +5618,7 @@
           <a:p>
             <a:pPr algn="ctr"/>
             <a:r>
-              <a:rPr sz="900" b="0" i="0">
+              <a:rPr sz="1400" b="0" i="0">
                 <a:solidFill>
                   <a:srgbClr val="B0BEC5"/>
                 </a:solidFill>
@@ -5527,8 +5638,8 @@
         </p:nvSpPr>
         <p:spPr>
           <a:xfrm>
-            <a:off x="10378440" y="2084832"/>
-            <a:ext cx="1600200" cy="502920"/>
+            <a:off x="10378440" y="2121408"/>
+            <a:ext cx="1600200" cy="530352"/>
           </a:xfrm>
           <a:prstGeom prst="rect">
             <a:avLst/>
@@ -5543,7 +5654,7 @@
           <a:p>
             <a:pPr algn="ctr"/>
             <a:r>
-              <a:rPr sz="2200" b="1" i="0">
+              <a:rPr sz="2400" b="1" i="0">
                 <a:solidFill>
                   <a:srgbClr val="E88C00"/>
                 </a:solidFill>
@@ -5562,8 +5673,8 @@
         </p:nvSpPr>
         <p:spPr>
           <a:xfrm>
-            <a:off x="10424160" y="2560320"/>
-            <a:ext cx="1508760" cy="365760"/>
+            <a:off x="10424160" y="2633472"/>
+            <a:ext cx="1508760" cy="384048"/>
           </a:xfrm>
           <a:prstGeom prst="rect">
             <a:avLst/>
@@ -5578,7 +5689,7 @@
           <a:p>
             <a:pPr algn="ctr"/>
             <a:r>
-              <a:rPr sz="800" b="0" i="0">
+              <a:rPr sz="1200" b="0" i="0">
                 <a:solidFill>
                   <a:srgbClr val="B0BEC5"/>
                 </a:solidFill>
@@ -5624,9 +5735,52 @@
           </a:p>
         </p:txBody>
       </p:sp>
+      <p:sp>
+        <p:nvSpPr>
+          <p:cNvPr id="21" name="Rectangle 20"/>
+          <p:cNvSpPr/>
+          <p:nvPr/>
+        </p:nvSpPr>
+        <p:spPr>
+          <a:xfrm>
+            <a:off x="6675120" y="3611880"/>
+            <a:ext cx="5349240" cy="2514600"/>
+          </a:xfrm>
+          <a:prstGeom prst="rect">
+            <a:avLst/>
+          </a:prstGeom>
+          <a:solidFill>
+            <a:srgbClr val="FFFFFF"/>
+          </a:solidFill>
+          <a:ln>
+            <a:noFill/>
+          </a:ln>
+        </p:spPr>
+        <p:style>
+          <a:lnRef idx="1">
+            <a:schemeClr val="accent1"/>
+          </a:lnRef>
+          <a:fillRef idx="3">
+            <a:schemeClr val="accent1"/>
+          </a:fillRef>
+          <a:effectRef idx="2">
+            <a:schemeClr val="accent1"/>
+          </a:effectRef>
+          <a:fontRef idx="minor">
+            <a:schemeClr val="lt1"/>
+          </a:fontRef>
+        </p:style>
+        <p:txBody>
+          <a:bodyPr rtlCol="0" anchor="ctr"/>
+          <a:lstStyle/>
+          <a:p>
+            <a:pPr algn="ctr"/>
+          </a:p>
+        </p:txBody>
+      </p:sp>
       <p:graphicFrame>
         <p:nvGraphicFramePr>
-          <p:cNvPr id="21" name="Chart 20"/>
+          <p:cNvPr id="22" name="Chart 21"/>
           <p:cNvGraphicFramePr>
             <a:graphicFrameLocks noGrp="1"/>
           </p:cNvGraphicFramePr>
@@ -5644,7 +5798,7 @@
       </p:graphicFrame>
       <p:sp>
         <p:nvSpPr>
-          <p:cNvPr id="22" name="TextBox 21"/>
+          <p:cNvPr id="23" name="TextBox 22"/>
           <p:cNvSpPr txBox="1"/>
           <p:nvPr/>
         </p:nvSpPr>
@@ -6959,8 +7113,8 @@
         </p:nvSpPr>
         <p:spPr>
           <a:xfrm>
-            <a:off x="548640" y="1984247"/>
-            <a:ext cx="3566159" cy="365760"/>
+            <a:off x="548640" y="1965959"/>
+            <a:ext cx="3566159" cy="411480"/>
           </a:xfrm>
           <a:prstGeom prst="rect">
             <a:avLst/>
@@ -6975,7 +7129,7 @@
           <a:p>
             <a:pPr algn="ctr"/>
             <a:r>
-              <a:rPr sz="900" b="0" i="0">
+              <a:rPr sz="1400" b="0" i="0">
                 <a:solidFill>
                   <a:srgbClr val="B0BEC5"/>
                 </a:solidFill>
@@ -6994,8 +7148,8 @@
         </p:nvSpPr>
         <p:spPr>
           <a:xfrm>
-            <a:off x="502920" y="2313431"/>
-            <a:ext cx="3657599" cy="502920"/>
+            <a:off x="502920" y="2350007"/>
+            <a:ext cx="3657599" cy="530352"/>
           </a:xfrm>
           <a:prstGeom prst="rect">
             <a:avLst/>
@@ -7010,7 +7164,7 @@
           <a:p>
             <a:pPr algn="ctr"/>
             <a:r>
-              <a:rPr sz="2200" b="1" i="0">
+              <a:rPr sz="2400" b="1" i="0">
                 <a:solidFill>
                   <a:srgbClr val="E74C3C"/>
                 </a:solidFill>
@@ -7029,8 +7183,8 @@
         </p:nvSpPr>
         <p:spPr>
           <a:xfrm>
-            <a:off x="548640" y="2788919"/>
-            <a:ext cx="3566159" cy="365760"/>
+            <a:off x="548640" y="2862071"/>
+            <a:ext cx="3566159" cy="384048"/>
           </a:xfrm>
           <a:prstGeom prst="rect">
             <a:avLst/>
@@ -7045,7 +7199,7 @@
           <a:p>
             <a:pPr algn="ctr"/>
             <a:r>
-              <a:rPr sz="800" b="0" i="0">
+              <a:rPr sz="1200" b="0" i="0">
                 <a:solidFill>
                   <a:srgbClr val="B0BEC5"/>
                 </a:solidFill>
@@ -7107,8 +7261,8 @@
         </p:nvSpPr>
         <p:spPr>
           <a:xfrm>
-            <a:off x="4407407" y="1984247"/>
-            <a:ext cx="3566159" cy="365760"/>
+            <a:off x="4407407" y="1965959"/>
+            <a:ext cx="3566159" cy="411480"/>
           </a:xfrm>
           <a:prstGeom prst="rect">
             <a:avLst/>
@@ -7123,7 +7277,7 @@
           <a:p>
             <a:pPr algn="ctr"/>
             <a:r>
-              <a:rPr sz="900" b="0" i="0">
+              <a:rPr sz="1400" b="0" i="0">
                 <a:solidFill>
                   <a:srgbClr val="B0BEC5"/>
                 </a:solidFill>
@@ -7142,8 +7296,8 @@
         </p:nvSpPr>
         <p:spPr>
           <a:xfrm>
-            <a:off x="4361687" y="2313431"/>
-            <a:ext cx="3657599" cy="502920"/>
+            <a:off x="4361687" y="2350007"/>
+            <a:ext cx="3657599" cy="530352"/>
           </a:xfrm>
           <a:prstGeom prst="rect">
             <a:avLst/>
@@ -7158,7 +7312,7 @@
           <a:p>
             <a:pPr algn="ctr"/>
             <a:r>
-              <a:rPr sz="2200" b="1" i="0">
+              <a:rPr sz="2400" b="1" i="0">
                 <a:solidFill>
                   <a:srgbClr val="2ECC71"/>
                 </a:solidFill>
@@ -7177,8 +7331,8 @@
         </p:nvSpPr>
         <p:spPr>
           <a:xfrm>
-            <a:off x="4407407" y="2788919"/>
-            <a:ext cx="3566159" cy="365760"/>
+            <a:off x="4407407" y="2862071"/>
+            <a:ext cx="3566159" cy="384048"/>
           </a:xfrm>
           <a:prstGeom prst="rect">
             <a:avLst/>
@@ -7193,7 +7347,7 @@
           <a:p>
             <a:pPr algn="ctr"/>
             <a:r>
-              <a:rPr sz="800" b="0" i="0">
+              <a:rPr sz="1200" b="0" i="0">
                 <a:solidFill>
                   <a:srgbClr val="B0BEC5"/>
                 </a:solidFill>
@@ -7255,8 +7409,8 @@
         </p:nvSpPr>
         <p:spPr>
           <a:xfrm>
-            <a:off x="8266174" y="1984247"/>
-            <a:ext cx="3566159" cy="365760"/>
+            <a:off x="8266174" y="1965959"/>
+            <a:ext cx="3566159" cy="411480"/>
           </a:xfrm>
           <a:prstGeom prst="rect">
             <a:avLst/>
@@ -7271,7 +7425,7 @@
           <a:p>
             <a:pPr algn="ctr"/>
             <a:r>
-              <a:rPr sz="900" b="0" i="0">
+              <a:rPr sz="1400" b="0" i="0">
                 <a:solidFill>
                   <a:srgbClr val="B0BEC5"/>
                 </a:solidFill>
@@ -7290,8 +7444,8 @@
         </p:nvSpPr>
         <p:spPr>
           <a:xfrm>
-            <a:off x="8220454" y="2313431"/>
-            <a:ext cx="3657599" cy="502920"/>
+            <a:off x="8220454" y="2350007"/>
+            <a:ext cx="3657599" cy="530352"/>
           </a:xfrm>
           <a:prstGeom prst="rect">
             <a:avLst/>
@@ -7306,7 +7460,7 @@
           <a:p>
             <a:pPr algn="ctr"/>
             <a:r>
-              <a:rPr sz="2200" b="1" i="0">
+              <a:rPr sz="2400" b="1" i="0">
                 <a:solidFill>
                   <a:srgbClr val="E88C00"/>
                 </a:solidFill>
@@ -7325,8 +7479,8 @@
         </p:nvSpPr>
         <p:spPr>
           <a:xfrm>
-            <a:off x="8266174" y="2788919"/>
-            <a:ext cx="3566159" cy="365760"/>
+            <a:off x="8266174" y="2862071"/>
+            <a:ext cx="3566159" cy="384048"/>
           </a:xfrm>
           <a:prstGeom prst="rect">
             <a:avLst/>
@@ -7341,7 +7495,7 @@
           <a:p>
             <a:pPr algn="ctr"/>
             <a:r>
-              <a:rPr sz="800" b="0" i="0">
+              <a:rPr sz="1200" b="0" i="0">
                 <a:solidFill>
                   <a:srgbClr val="B0BEC5"/>
                 </a:solidFill>
@@ -7403,8 +7557,8 @@
         </p:nvSpPr>
         <p:spPr>
           <a:xfrm>
-            <a:off x="548640" y="3675887"/>
-            <a:ext cx="3566159" cy="365760"/>
+            <a:off x="548640" y="3657599"/>
+            <a:ext cx="3566159" cy="411480"/>
           </a:xfrm>
           <a:prstGeom prst="rect">
             <a:avLst/>
@@ -7419,7 +7573,7 @@
           <a:p>
             <a:pPr algn="ctr"/>
             <a:r>
-              <a:rPr sz="900" b="0" i="0">
+              <a:rPr sz="1400" b="0" i="0">
                 <a:solidFill>
                   <a:srgbClr val="B0BEC5"/>
                 </a:solidFill>
@@ -7439,8 +7593,8 @@
         </p:nvSpPr>
         <p:spPr>
           <a:xfrm>
-            <a:off x="502920" y="4005071"/>
-            <a:ext cx="3657599" cy="502920"/>
+            <a:off x="502920" y="4041647"/>
+            <a:ext cx="3657599" cy="530352"/>
           </a:xfrm>
           <a:prstGeom prst="rect">
             <a:avLst/>
@@ -7455,7 +7609,7 @@
           <a:p>
             <a:pPr algn="ctr"/>
             <a:r>
-              <a:rPr sz="2200" b="1" i="0">
+              <a:rPr sz="2400" b="1" i="0">
                 <a:solidFill>
                   <a:srgbClr val="2ECC71"/>
                 </a:solidFill>
@@ -7474,8 +7628,8 @@
         </p:nvSpPr>
         <p:spPr>
           <a:xfrm>
-            <a:off x="548640" y="4480559"/>
-            <a:ext cx="3566159" cy="365760"/>
+            <a:off x="548640" y="4553711"/>
+            <a:ext cx="3566159" cy="384048"/>
           </a:xfrm>
           <a:prstGeom prst="rect">
             <a:avLst/>
@@ -7490,7 +7644,7 @@
           <a:p>
             <a:pPr algn="ctr"/>
             <a:r>
-              <a:rPr sz="800" b="0" i="0">
+              <a:rPr sz="1200" b="0" i="0">
                 <a:solidFill>
                   <a:srgbClr val="B0BEC5"/>
                 </a:solidFill>
@@ -7552,8 +7706,8 @@
         </p:nvSpPr>
         <p:spPr>
           <a:xfrm>
-            <a:off x="4407407" y="3675887"/>
-            <a:ext cx="3566159" cy="365760"/>
+            <a:off x="4407407" y="3657599"/>
+            <a:ext cx="3566159" cy="411480"/>
           </a:xfrm>
           <a:prstGeom prst="rect">
             <a:avLst/>
@@ -7568,7 +7722,7 @@
           <a:p>
             <a:pPr algn="ctr"/>
             <a:r>
-              <a:rPr sz="900" b="0" i="0">
+              <a:rPr sz="1400" b="0" i="0">
                 <a:solidFill>
                   <a:srgbClr val="B0BEC5"/>
                 </a:solidFill>
@@ -7587,8 +7741,8 @@
         </p:nvSpPr>
         <p:spPr>
           <a:xfrm>
-            <a:off x="4361687" y="4005071"/>
-            <a:ext cx="3657599" cy="502920"/>
+            <a:off x="4361687" y="4041647"/>
+            <a:ext cx="3657599" cy="530352"/>
           </a:xfrm>
           <a:prstGeom prst="rect">
             <a:avLst/>
@@ -7603,7 +7757,7 @@
           <a:p>
             <a:pPr algn="ctr"/>
             <a:r>
-              <a:rPr sz="2200" b="1" i="0">
+              <a:rPr sz="2400" b="1" i="0">
                 <a:solidFill>
                   <a:srgbClr val="2ECC71"/>
                 </a:solidFill>
@@ -7622,8 +7776,8 @@
         </p:nvSpPr>
         <p:spPr>
           <a:xfrm>
-            <a:off x="4407407" y="4480559"/>
-            <a:ext cx="3566159" cy="365760"/>
+            <a:off x="4407407" y="4553711"/>
+            <a:ext cx="3566159" cy="384048"/>
           </a:xfrm>
           <a:prstGeom prst="rect">
             <a:avLst/>
@@ -7638,7 +7792,7 @@
           <a:p>
             <a:pPr algn="ctr"/>
             <a:r>
-              <a:rPr sz="800" b="0" i="0">
+              <a:rPr sz="1200" b="0" i="0">
                 <a:solidFill>
                   <a:srgbClr val="B0BEC5"/>
                 </a:solidFill>
@@ -7700,8 +7854,8 @@
         </p:nvSpPr>
         <p:spPr>
           <a:xfrm>
-            <a:off x="8266174" y="3675887"/>
-            <a:ext cx="3566159" cy="365760"/>
+            <a:off x="8266174" y="3657599"/>
+            <a:ext cx="3566159" cy="411480"/>
           </a:xfrm>
           <a:prstGeom prst="rect">
             <a:avLst/>
@@ -7716,7 +7870,7 @@
           <a:p>
             <a:pPr algn="ctr"/>
             <a:r>
-              <a:rPr sz="900" b="0" i="0">
+              <a:rPr sz="1400" b="0" i="0">
                 <a:solidFill>
                   <a:srgbClr val="B0BEC5"/>
                 </a:solidFill>
@@ -7735,8 +7889,8 @@
         </p:nvSpPr>
         <p:spPr>
           <a:xfrm>
-            <a:off x="8220454" y="4005071"/>
-            <a:ext cx="3657599" cy="502920"/>
+            <a:off x="8220454" y="4041647"/>
+            <a:ext cx="3657599" cy="530352"/>
           </a:xfrm>
           <a:prstGeom prst="rect">
             <a:avLst/>
@@ -7751,7 +7905,7 @@
           <a:p>
             <a:pPr algn="ctr"/>
             <a:r>
-              <a:rPr sz="2200" b="1" i="0">
+              <a:rPr sz="2400" b="1" i="0">
                 <a:solidFill>
                   <a:srgbClr val="E88C00"/>
                 </a:solidFill>
@@ -7770,8 +7924,8 @@
         </p:nvSpPr>
         <p:spPr>
           <a:xfrm>
-            <a:off x="8266174" y="4480559"/>
-            <a:ext cx="3566159" cy="365760"/>
+            <a:off x="8266174" y="4553711"/>
+            <a:ext cx="3566159" cy="384048"/>
           </a:xfrm>
           <a:prstGeom prst="rect">
             <a:avLst/>
@@ -7786,7 +7940,7 @@
           <a:p>
             <a:pPr algn="ctr"/>
             <a:r>
-              <a:rPr sz="800" b="0" i="0">
+              <a:rPr sz="1200" b="0" i="0">
                 <a:solidFill>
                   <a:srgbClr val="B0BEC5"/>
                 </a:solidFill>
@@ -8023,7 +8177,7 @@
         <p:spPr>
           <a:xfrm>
             <a:off x="457200" y="594360"/>
-            <a:ext cx="11430000" cy="822960"/>
+            <a:ext cx="11430000" cy="731520"/>
           </a:xfrm>
           <a:prstGeom prst="rect">
             <a:avLst/>
@@ -8038,7 +8192,7 @@
           <a:p>
             <a:pPr algn="l"/>
             <a:r>
-              <a:rPr sz="2400" b="1">
+              <a:rPr sz="2200" b="1">
                 <a:solidFill>
                   <a:srgbClr val="F5F5F5"/>
                 </a:solidFill>
@@ -8057,7 +8211,7 @@
         </p:nvSpPr>
         <p:spPr>
           <a:xfrm>
-            <a:off x="457200" y="1417320"/>
+            <a:off x="457200" y="1353312"/>
             <a:ext cx="11430000" cy="19050"/>
           </a:xfrm>
           <a:prstGeom prst="rect">
@@ -8100,8 +8254,8 @@
         </p:nvSpPr>
         <p:spPr>
           <a:xfrm>
-            <a:off x="457200" y="1554480"/>
-            <a:ext cx="5669280" cy="274320"/>
+            <a:off x="457200" y="1444752"/>
+            <a:ext cx="11247120" cy="384048"/>
           </a:xfrm>
           <a:prstGeom prst="rect">
             <a:avLst/>
@@ -8116,28 +8270,106 @@
           <a:p>
             <a:pPr algn="l"/>
             <a:r>
+              <a:rPr sz="900" b="0" i="0">
+                <a:solidFill>
+                  <a:srgbClr val="B0BEC5"/>
+                </a:solidFill>
+                <a:latin typeface="Calibri"/>
+              </a:rPr>
+              <a:t>GDP contracted sharply in 2020 but rebounded within a year — and sustained 5 %+ growth even as copper prices cooled post-2021. FDI hit its lowest point at the 2020 default, then climbed to a decade-high 9.32 % in 2024 — the year bilateral restructuring agreements were fully implemented, confirming restored investor confidence.</a:t>
+            </a:r>
+          </a:p>
+        </p:txBody>
+      </p:sp>
+      <p:sp>
+        <p:nvSpPr>
+          <p:cNvPr id="8" name="TextBox 7"/>
+          <p:cNvSpPr txBox="1"/>
+          <p:nvPr/>
+        </p:nvSpPr>
+        <p:spPr>
+          <a:xfrm>
+            <a:off x="457200" y="1901952"/>
+            <a:ext cx="5669280" cy="256032"/>
+          </a:xfrm>
+          <a:prstGeom prst="rect">
+            <a:avLst/>
+          </a:prstGeom>
+          <a:noFill/>
+        </p:spPr>
+        <p:txBody>
+          <a:bodyPr wrap="square">
+            <a:spAutoFit/>
+          </a:bodyPr>
+          <a:lstStyle/>
+          <a:p>
+            <a:pPr algn="l"/>
+            <a:r>
               <a:rPr sz="800" b="1" i="0">
                 <a:solidFill>
                   <a:srgbClr val="B0BEC5"/>
                 </a:solidFill>
                 <a:latin typeface="Calibri"/>
               </a:rPr>
-              <a:t>GDP GROWTH  (% annual)  ·  2015–2024  ·  Red = contraction</a:t>
-            </a:r>
+              <a:t>GDP GROWTH  (% annual)  ·  2015–2024  ·  Red = contraction  |  Green = recovery</a:t>
+            </a:r>
+          </a:p>
+        </p:txBody>
+      </p:sp>
+      <p:sp>
+        <p:nvSpPr>
+          <p:cNvPr id="9" name="Rectangle 8"/>
+          <p:cNvSpPr/>
+          <p:nvPr/>
+        </p:nvSpPr>
+        <p:spPr>
+          <a:xfrm>
+            <a:off x="457200" y="2176272"/>
+            <a:ext cx="5669280" cy="3474720"/>
+          </a:xfrm>
+          <a:prstGeom prst="rect">
+            <a:avLst/>
+          </a:prstGeom>
+          <a:solidFill>
+            <a:srgbClr val="FFFFFF"/>
+          </a:solidFill>
+          <a:ln>
+            <a:noFill/>
+          </a:ln>
+        </p:spPr>
+        <p:style>
+          <a:lnRef idx="1">
+            <a:schemeClr val="accent1"/>
+          </a:lnRef>
+          <a:fillRef idx="3">
+            <a:schemeClr val="accent1"/>
+          </a:fillRef>
+          <a:effectRef idx="2">
+            <a:schemeClr val="accent1"/>
+          </a:effectRef>
+          <a:fontRef idx="minor">
+            <a:schemeClr val="lt1"/>
+          </a:fontRef>
+        </p:style>
+        <p:txBody>
+          <a:bodyPr rtlCol="0" anchor="ctr"/>
+          <a:lstStyle/>
+          <a:p>
+            <a:pPr algn="ctr"/>
           </a:p>
         </p:txBody>
       </p:sp>
       <p:graphicFrame>
         <p:nvGraphicFramePr>
-          <p:cNvPr id="8" name="Chart 7"/>
+          <p:cNvPr id="10" name="Chart 9"/>
           <p:cNvGraphicFramePr>
             <a:graphicFrameLocks noGrp="1"/>
           </p:cNvGraphicFramePr>
           <p:nvPr/>
         </p:nvGraphicFramePr>
         <p:xfrm>
-          <a:off x="457200" y="1828800"/>
-          <a:ext cx="5669280" cy="4297680"/>
+          <a:off x="457200" y="2176272"/>
+          <a:ext cx="5669280" cy="3474720"/>
         </p:xfrm>
         <a:graphic>
           <a:graphicData uri="http://schemas.openxmlformats.org/drawingml/2006/chart">
@@ -8147,14 +8379,14 @@
       </p:graphicFrame>
       <p:sp>
         <p:nvSpPr>
-          <p:cNvPr id="9" name="TextBox 8"/>
+          <p:cNvPr id="11" name="TextBox 10"/>
           <p:cNvSpPr txBox="1"/>
           <p:nvPr/>
         </p:nvSpPr>
         <p:spPr>
           <a:xfrm>
-            <a:off x="6400800" y="1554480"/>
-            <a:ext cx="5486400" cy="274320"/>
+            <a:off x="457200" y="5669280"/>
+            <a:ext cx="5669280" cy="292608"/>
           </a:xfrm>
           <a:prstGeom prst="rect">
             <a:avLst/>
@@ -8169,28 +8401,106 @@
           <a:p>
             <a:pPr algn="l"/>
             <a:r>
+              <a:rPr sz="800" b="0" i="1">
+                <a:solidFill>
+                  <a:srgbClr val="B0BEC5"/>
+                </a:solidFill>
+                <a:latin typeface="Calibri"/>
+              </a:rPr>
+              <a:t>GDP fell -2.8 % in 2020 (COVID + default) before recovering to 4.6 % in 2021 and holding at 5.3 % in 2024 despite softer copper prices.</a:t>
+            </a:r>
+          </a:p>
+        </p:txBody>
+      </p:sp>
+      <p:sp>
+        <p:nvSpPr>
+          <p:cNvPr id="12" name="TextBox 11"/>
+          <p:cNvSpPr txBox="1"/>
+          <p:nvPr/>
+        </p:nvSpPr>
+        <p:spPr>
+          <a:xfrm>
+            <a:off x="6400800" y="1901952"/>
+            <a:ext cx="5486400" cy="256032"/>
+          </a:xfrm>
+          <a:prstGeom prst="rect">
+            <a:avLst/>
+          </a:prstGeom>
+          <a:noFill/>
+        </p:spPr>
+        <p:txBody>
+          <a:bodyPr wrap="square">
+            <a:spAutoFit/>
+          </a:bodyPr>
+          <a:lstStyle/>
+          <a:p>
+            <a:pPr algn="l"/>
+            <a:r>
               <a:rPr sz="800" b="1" i="0">
                 <a:solidFill>
                   <a:srgbClr val="B0BEC5"/>
                 </a:solidFill>
                 <a:latin typeface="Calibri"/>
               </a:rPr>
-              <a:t>FDI NET INFLOWS  (% of GDP)  ·  2015–2024  ·  Green = decade-high</a:t>
-            </a:r>
+              <a:t>FDI NET INFLOWS  (% of GDP)  ·  2015–2024  ·  Red = decade-low  |  Green = decade-high</a:t>
+            </a:r>
+          </a:p>
+        </p:txBody>
+      </p:sp>
+      <p:sp>
+        <p:nvSpPr>
+          <p:cNvPr id="13" name="Rectangle 12"/>
+          <p:cNvSpPr/>
+          <p:nvPr/>
+        </p:nvSpPr>
+        <p:spPr>
+          <a:xfrm>
+            <a:off x="6400800" y="2176272"/>
+            <a:ext cx="5486400" cy="3474720"/>
+          </a:xfrm>
+          <a:prstGeom prst="rect">
+            <a:avLst/>
+          </a:prstGeom>
+          <a:solidFill>
+            <a:srgbClr val="FFFFFF"/>
+          </a:solidFill>
+          <a:ln>
+            <a:noFill/>
+          </a:ln>
+        </p:spPr>
+        <p:style>
+          <a:lnRef idx="1">
+            <a:schemeClr val="accent1"/>
+          </a:lnRef>
+          <a:fillRef idx="3">
+            <a:schemeClr val="accent1"/>
+          </a:fillRef>
+          <a:effectRef idx="2">
+            <a:schemeClr val="accent1"/>
+          </a:effectRef>
+          <a:fontRef idx="minor">
+            <a:schemeClr val="lt1"/>
+          </a:fontRef>
+        </p:style>
+        <p:txBody>
+          <a:bodyPr rtlCol="0" anchor="ctr"/>
+          <a:lstStyle/>
+          <a:p>
+            <a:pPr algn="ctr"/>
           </a:p>
         </p:txBody>
       </p:sp>
       <p:graphicFrame>
         <p:nvGraphicFramePr>
-          <p:cNvPr id="10" name="Chart 9"/>
+          <p:cNvPr id="14" name="Chart 13"/>
           <p:cNvGraphicFramePr>
             <a:graphicFrameLocks noGrp="1"/>
           </p:cNvGraphicFramePr>
           <p:nvPr/>
         </p:nvGraphicFramePr>
         <p:xfrm>
-          <a:off x="6400800" y="1828800"/>
-          <a:ext cx="5486400" cy="4297680"/>
+          <a:off x="6400800" y="2176272"/>
+          <a:ext cx="5486400" cy="3474720"/>
         </p:xfrm>
         <a:graphic>
           <a:graphicData uri="http://schemas.openxmlformats.org/drawingml/2006/chart">
@@ -8200,14 +8510,14 @@
       </p:graphicFrame>
       <p:sp>
         <p:nvSpPr>
-          <p:cNvPr id="11" name="TextBox 10"/>
+          <p:cNvPr id="15" name="TextBox 14"/>
           <p:cNvSpPr txBox="1"/>
           <p:nvPr/>
         </p:nvSpPr>
         <p:spPr>
           <a:xfrm>
-            <a:off x="457200" y="6236208"/>
-            <a:ext cx="10972800" cy="365760"/>
+            <a:off x="6400800" y="5669280"/>
+            <a:ext cx="5486400" cy="292608"/>
           </a:xfrm>
           <a:prstGeom prst="rect">
             <a:avLst/>
@@ -8222,6 +8532,41 @@
           <a:p>
             <a:pPr algn="l"/>
             <a:r>
+              <a:rPr sz="800" b="0" i="1">
+                <a:solidFill>
+                  <a:srgbClr val="B0BEC5"/>
+                </a:solidFill>
+                <a:latin typeface="Calibri"/>
+              </a:rPr>
+              <a:t>FDI bottomed at 1.9 % in 2020 then surged to 9.32 % in 2024 — the year G20 bilateral restructuring agreements were implemented.</a:t>
+            </a:r>
+          </a:p>
+        </p:txBody>
+      </p:sp>
+      <p:sp>
+        <p:nvSpPr>
+          <p:cNvPr id="16" name="TextBox 15"/>
+          <p:cNvSpPr txBox="1"/>
+          <p:nvPr/>
+        </p:nvSpPr>
+        <p:spPr>
+          <a:xfrm>
+            <a:off x="457200" y="6236208"/>
+            <a:ext cx="10972800" cy="365760"/>
+          </a:xfrm>
+          <a:prstGeom prst="rect">
+            <a:avLst/>
+          </a:prstGeom>
+          <a:noFill/>
+        </p:spPr>
+        <p:txBody>
+          <a:bodyPr wrap="square">
+            <a:spAutoFit/>
+          </a:bodyPr>
+          <a:lstStyle/>
+          <a:p>
+            <a:pPr algn="l"/>
+            <a:r>
               <a:rPr sz="800" b="0" i="0">
                 <a:solidFill>
                   <a:srgbClr val="B0BEC5"/>
@@ -8235,7 +8580,7 @@
       </p:sp>
       <p:sp>
         <p:nvSpPr>
-          <p:cNvPr id="12" name="TextBox 11"/>
+          <p:cNvPr id="17" name="TextBox 16"/>
           <p:cNvSpPr txBox="1"/>
           <p:nvPr/>
         </p:nvSpPr>
